--- a/Slides/Chapter03.pptx
+++ b/Slides/Chapter03.pptx
@@ -2,7 +2,7 @@
 <file path=ppt/presentation.xml><?xml version="1.0" encoding="utf-8"?>
 <p:presentation xmlns:a="http://schemas.openxmlformats.org/drawingml/2006/main" xmlns:r="http://schemas.openxmlformats.org/officeDocument/2006/relationships" xmlns:p="http://schemas.openxmlformats.org/presentationml/2006/main" saveSubsetFonts="1" autoCompressPictures="0">
   <p:sldMasterIdLst>
-    <p:sldMasterId id="2147483660" r:id="rId1"/>
+    <p:sldMasterId id="2147483669" r:id="rId1"/>
   </p:sldMasterIdLst>
   <p:notesMasterIdLst>
     <p:notesMasterId r:id="rId66"/>
@@ -260,7 +260,7 @@
           <a:p>
             <a:fld id="{66C5F379-1205-D941-81E6-151AA704F12A}" type="datetimeFigureOut">
               <a:rPr lang="en-US" smtClean="0"/>
-              <a:t>8/18/24</a:t>
+              <a:t>10/8/26</a:t>
             </a:fld>
             <a:endParaRPr lang="en-US"/>
           </a:p>
@@ -724,7 +724,7 @@
         </p:nvSpPr>
         <p:spPr>
           <a:xfrm>
-            <a:off x="914400" y="1058938"/>
+            <a:off x="914400" y="1058940"/>
             <a:ext cx="10363200" cy="1470025"/>
           </a:xfrm>
           <a:solidFill>
@@ -776,9 +776,14 @@
         </p:nvSpPr>
         <p:spPr>
           <a:xfrm>
-            <a:off x="2281186" y="2983610"/>
+            <a:off x="2281187" y="2983612"/>
             <a:ext cx="7609479" cy="1009561"/>
           </a:xfrm>
+          <a:prstGeom prst="roundRect">
+            <a:avLst>
+              <a:gd name="adj" fmla="val 37895"/>
+            </a:avLst>
+          </a:prstGeom>
           <a:solidFill>
             <a:schemeClr val="bg1">
               <a:alpha val="95000"/>
@@ -837,10 +842,98 @@
           </a:p>
         </p:txBody>
       </p:sp>
+      <p:sp>
+        <p:nvSpPr>
+          <p:cNvPr id="2" name="Date Placeholder 1">
+            <a:extLst>
+              <a:ext uri="{FF2B5EF4-FFF2-40B4-BE49-F238E27FC236}">
+                <a16:creationId xmlns:a16="http://schemas.microsoft.com/office/drawing/2014/main" id="{9B409C91-6E3E-5409-2F44-4E770C50190C}"/>
+              </a:ext>
+            </a:extLst>
+          </p:cNvPr>
+          <p:cNvSpPr>
+            <a:spLocks noGrp="1"/>
+          </p:cNvSpPr>
+          <p:nvPr>
+            <p:ph type="dt" sz="half" idx="11"/>
+          </p:nvPr>
+        </p:nvSpPr>
+        <p:spPr/>
+        <p:txBody>
+          <a:bodyPr/>
+          <a:lstStyle/>
+          <a:p>
+            <a:fld id="{E774CA8C-DA5A-D548-AF53-ED2D47C8C3C7}" type="datetime1">
+              <a:rPr lang="en-US" smtClean="0"/>
+              <a:t>10/8/26</a:t>
+            </a:fld>
+            <a:endParaRPr lang="en-US" dirty="0"/>
+          </a:p>
+        </p:txBody>
+      </p:sp>
+      <p:sp>
+        <p:nvSpPr>
+          <p:cNvPr id="4" name="Footer Placeholder 3">
+            <a:extLst>
+              <a:ext uri="{FF2B5EF4-FFF2-40B4-BE49-F238E27FC236}">
+                <a16:creationId xmlns:a16="http://schemas.microsoft.com/office/drawing/2014/main" id="{594118C6-B924-AA1F-AEFC-17607998D78C}"/>
+              </a:ext>
+            </a:extLst>
+          </p:cNvPr>
+          <p:cNvSpPr>
+            <a:spLocks noGrp="1"/>
+          </p:cNvSpPr>
+          <p:nvPr>
+            <p:ph type="ftr" sz="quarter" idx="12"/>
+          </p:nvPr>
+        </p:nvSpPr>
+        <p:spPr/>
+        <p:txBody>
+          <a:bodyPr/>
+          <a:lstStyle/>
+          <a:p>
+            <a:r>
+              <a:rPr lang="en-US"/>
+              <a:t>© Steve Beaty and others as cited</a:t>
+            </a:r>
+            <a:endParaRPr lang="en-US" dirty="0"/>
+          </a:p>
+        </p:txBody>
+      </p:sp>
+      <p:sp>
+        <p:nvSpPr>
+          <p:cNvPr id="5" name="Slide Number Placeholder 4">
+            <a:extLst>
+              <a:ext uri="{FF2B5EF4-FFF2-40B4-BE49-F238E27FC236}">
+                <a16:creationId xmlns:a16="http://schemas.microsoft.com/office/drawing/2014/main" id="{29E93608-8881-8010-4D06-440F9FBB6BE8}"/>
+              </a:ext>
+            </a:extLst>
+          </p:cNvPr>
+          <p:cNvSpPr>
+            <a:spLocks noGrp="1"/>
+          </p:cNvSpPr>
+          <p:nvPr>
+            <p:ph type="sldNum" sz="quarter" idx="13"/>
+          </p:nvPr>
+        </p:nvSpPr>
+        <p:spPr/>
+        <p:txBody>
+          <a:bodyPr/>
+          <a:lstStyle/>
+          <a:p>
+            <a:fld id="{37D050C8-32A2-8944-BC0A-E76DEAECED1E}" type="slidenum">
+              <a:rPr lang="en-US" smtClean="0"/>
+              <a:pPr/>
+              <a:t>‹#›</a:t>
+            </a:fld>
+            <a:endParaRPr lang="en-US" dirty="0"/>
+          </a:p>
+        </p:txBody>
+      </p:sp>
     </p:spTree>
     <p:extLst>
       <p:ext uri="{BB962C8B-B14F-4D97-AF65-F5344CB8AC3E}">
-        <p14:creationId xmlns:p14="http://schemas.microsoft.com/office/powerpoint/2010/main" val="3857698023"/>
+        <p14:creationId xmlns:p14="http://schemas.microsoft.com/office/powerpoint/2010/main" val="4162958357"/>
       </p:ext>
     </p:extLst>
   </p:cSld>
@@ -849,12 +942,12 @@
   </p:clrMapOvr>
   <mc:AlternateContent xmlns:mc="http://schemas.openxmlformats.org/markup-compatibility/2006" xmlns:p14="http://schemas.microsoft.com/office/powerpoint/2010/main">
     <mc:Choice Requires="p14">
-      <p:transition spd="slow" p14:dur="1200">
-        <p14:prism/>
+      <p:transition spd="slow" p14:dur="2000">
+        <p14:prism isContent="1"/>
       </p:transition>
     </mc:Choice>
     <mc:Fallback xmlns="">
-      <p:transition xmlns:p14="http://schemas.microsoft.com/office/powerpoint/2010/main" spd="slow">
+      <p:transition spd="slow">
         <p:fade/>
       </p:transition>
     </mc:Fallback>
@@ -959,7 +1052,13 @@
       </p:sp>
       <p:sp>
         <p:nvSpPr>
-          <p:cNvPr id="4" name="Date Placeholder 3"/>
+          <p:cNvPr id="8" name="Date Placeholder 7">
+            <a:extLst>
+              <a:ext uri="{FF2B5EF4-FFF2-40B4-BE49-F238E27FC236}">
+                <a16:creationId xmlns:a16="http://schemas.microsoft.com/office/drawing/2014/main" id="{DB39033B-5031-2DE5-AF8A-E269BDEE889F}"/>
+              </a:ext>
+            </a:extLst>
+          </p:cNvPr>
           <p:cNvSpPr>
             <a:spLocks noGrp="1"/>
           </p:cNvSpPr>
@@ -967,22 +1066,14 @@
             <p:ph type="dt" sz="half" idx="10"/>
           </p:nvPr>
         </p:nvSpPr>
-        <p:spPr>
-          <a:xfrm>
-            <a:off x="4406051" y="6308727"/>
-            <a:ext cx="1169155" cy="485424"/>
-          </a:xfrm>
-          <a:prstGeom prst="rect">
-            <a:avLst/>
-          </a:prstGeom>
-        </p:spPr>
-        <p:txBody>
-          <a:bodyPr/>
-          <a:lstStyle/>
-          <a:p>
-            <a:fld id="{D8739445-9E2F-9043-A28C-3FBDF648EB25}" type="datetimeFigureOut">
+        <p:spPr/>
+        <p:txBody>
+          <a:bodyPr/>
+          <a:lstStyle/>
+          <a:p>
+            <a:fld id="{4A2459B2-F28E-2042-97EB-CBE548EF1252}" type="datetime1">
               <a:rPr lang="en-US" smtClean="0"/>
-              <a:t>8/18/24</a:t>
+              <a:t>10/8/26</a:t>
             </a:fld>
             <a:endParaRPr lang="en-US"/>
           </a:p>
@@ -990,7 +1081,13 @@
       </p:sp>
       <p:sp>
         <p:nvSpPr>
-          <p:cNvPr id="5" name="Footer Placeholder 4"/>
+          <p:cNvPr id="9" name="Footer Placeholder 8">
+            <a:extLst>
+              <a:ext uri="{FF2B5EF4-FFF2-40B4-BE49-F238E27FC236}">
+                <a16:creationId xmlns:a16="http://schemas.microsoft.com/office/drawing/2014/main" id="{8CC0AD20-1FAB-5697-725E-A23B4E11A490}"/>
+              </a:ext>
+            </a:extLst>
+          </p:cNvPr>
           <p:cNvSpPr>
             <a:spLocks noGrp="1"/>
           </p:cNvSpPr>
@@ -1003,13 +1100,22 @@
           <a:bodyPr/>
           <a:lstStyle/>
           <a:p>
-            <a:endParaRPr lang="en-US"/>
-          </a:p>
-        </p:txBody>
-      </p:sp>
-      <p:sp>
-        <p:nvSpPr>
-          <p:cNvPr id="6" name="Slide Number Placeholder 5"/>
+            <a:r>
+              <a:rPr lang="en-US"/>
+              <a:t>© Steve Beaty and others as cited</a:t>
+            </a:r>
+          </a:p>
+        </p:txBody>
+      </p:sp>
+      <p:sp>
+        <p:nvSpPr>
+          <p:cNvPr id="10" name="SlideNumberWithTotal">
+            <a:extLst>
+              <a:ext uri="{FF2B5EF4-FFF2-40B4-BE49-F238E27FC236}">
+                <a16:creationId xmlns:a16="http://schemas.microsoft.com/office/drawing/2014/main" id="{C85ADDAF-31A4-85DD-32A3-DD43B60F68C2}"/>
+              </a:ext>
+            </a:extLst>
+          </p:cNvPr>
           <p:cNvSpPr>
             <a:spLocks noGrp="1"/>
           </p:cNvSpPr>
@@ -1033,7 +1139,7 @@
     </p:spTree>
     <p:extLst>
       <p:ext uri="{BB962C8B-B14F-4D97-AF65-F5344CB8AC3E}">
-        <p14:creationId xmlns:p14="http://schemas.microsoft.com/office/powerpoint/2010/main" val="4232426203"/>
+        <p14:creationId xmlns:p14="http://schemas.microsoft.com/office/powerpoint/2010/main" val="1623380695"/>
       </p:ext>
     </p:extLst>
   </p:cSld>
@@ -1042,12 +1148,12 @@
   </p:clrMapOvr>
   <mc:AlternateContent xmlns:mc="http://schemas.openxmlformats.org/markup-compatibility/2006" xmlns:p14="http://schemas.microsoft.com/office/powerpoint/2010/main">
     <mc:Choice Requires="p14">
-      <p:transition spd="slow" p14:dur="1200">
-        <p14:prism/>
+      <p:transition spd="slow" p14:dur="2000">
+        <p14:prism isContent="1"/>
       </p:transition>
     </mc:Choice>
     <mc:Fallback xmlns="">
-      <p:transition xmlns:p14="http://schemas.microsoft.com/office/powerpoint/2010/main" spd="slow">
+      <p:transition spd="slow">
         <p:fade/>
       </p:transition>
     </mc:Fallback>
@@ -1140,7 +1246,13 @@
       </p:sp>
       <p:sp>
         <p:nvSpPr>
-          <p:cNvPr id="4" name="Date Placeholder 3"/>
+          <p:cNvPr id="8" name="Date Placeholder 7">
+            <a:extLst>
+              <a:ext uri="{FF2B5EF4-FFF2-40B4-BE49-F238E27FC236}">
+                <a16:creationId xmlns:a16="http://schemas.microsoft.com/office/drawing/2014/main" id="{DEEF9C46-CD18-5177-41DC-5A44F050BB88}"/>
+              </a:ext>
+            </a:extLst>
+          </p:cNvPr>
           <p:cNvSpPr>
             <a:spLocks noGrp="1"/>
           </p:cNvSpPr>
@@ -1148,22 +1260,14 @@
             <p:ph type="dt" sz="half" idx="10"/>
           </p:nvPr>
         </p:nvSpPr>
-        <p:spPr>
-          <a:xfrm>
-            <a:off x="4406051" y="6308727"/>
-            <a:ext cx="1169155" cy="485424"/>
-          </a:xfrm>
-          <a:prstGeom prst="rect">
-            <a:avLst/>
-          </a:prstGeom>
-        </p:spPr>
-        <p:txBody>
-          <a:bodyPr/>
-          <a:lstStyle/>
-          <a:p>
-            <a:fld id="{D8739445-9E2F-9043-A28C-3FBDF648EB25}" type="datetimeFigureOut">
+        <p:spPr/>
+        <p:txBody>
+          <a:bodyPr/>
+          <a:lstStyle/>
+          <a:p>
+            <a:fld id="{ED3F39C8-8EBD-3143-8266-A82F1ED51C6D}" type="datetime1">
               <a:rPr lang="en-US" smtClean="0"/>
-              <a:t>8/18/24</a:t>
+              <a:t>10/8/26</a:t>
             </a:fld>
             <a:endParaRPr lang="en-US"/>
           </a:p>
@@ -1171,7 +1275,13 @@
       </p:sp>
       <p:sp>
         <p:nvSpPr>
-          <p:cNvPr id="5" name="Footer Placeholder 4"/>
+          <p:cNvPr id="9" name="Footer Placeholder 8">
+            <a:extLst>
+              <a:ext uri="{FF2B5EF4-FFF2-40B4-BE49-F238E27FC236}">
+                <a16:creationId xmlns:a16="http://schemas.microsoft.com/office/drawing/2014/main" id="{A6447FE1-5C78-6FAD-D883-46A9B247C887}"/>
+              </a:ext>
+            </a:extLst>
+          </p:cNvPr>
           <p:cNvSpPr>
             <a:spLocks noGrp="1"/>
           </p:cNvSpPr>
@@ -1184,13 +1294,22 @@
           <a:bodyPr/>
           <a:lstStyle/>
           <a:p>
-            <a:endParaRPr lang="en-US"/>
-          </a:p>
-        </p:txBody>
-      </p:sp>
-      <p:sp>
-        <p:nvSpPr>
-          <p:cNvPr id="6" name="Slide Number Placeholder 5"/>
+            <a:r>
+              <a:rPr lang="en-US"/>
+              <a:t>© Steve Beaty and others as cited</a:t>
+            </a:r>
+          </a:p>
+        </p:txBody>
+      </p:sp>
+      <p:sp>
+        <p:nvSpPr>
+          <p:cNvPr id="10" name="Slide Number Placeholder 9">
+            <a:extLst>
+              <a:ext uri="{FF2B5EF4-FFF2-40B4-BE49-F238E27FC236}">
+                <a16:creationId xmlns:a16="http://schemas.microsoft.com/office/drawing/2014/main" id="{3BEAED22-447D-B036-C934-3337B57F57F0}"/>
+              </a:ext>
+            </a:extLst>
+          </p:cNvPr>
           <p:cNvSpPr>
             <a:spLocks noGrp="1"/>
           </p:cNvSpPr>
@@ -1214,13 +1333,25 @@
     </p:spTree>
     <p:extLst>
       <p:ext uri="{BB962C8B-B14F-4D97-AF65-F5344CB8AC3E}">
-        <p14:creationId xmlns:p14="http://schemas.microsoft.com/office/powerpoint/2010/main" val="664918924"/>
+        <p14:creationId xmlns:p14="http://schemas.microsoft.com/office/powerpoint/2010/main" val="4030245796"/>
       </p:ext>
     </p:extLst>
   </p:cSld>
   <p:clrMapOvr>
     <a:masterClrMapping/>
   </p:clrMapOvr>
+  <mc:AlternateContent xmlns:mc="http://schemas.openxmlformats.org/markup-compatibility/2006" xmlns:p14="http://schemas.microsoft.com/office/powerpoint/2010/main">
+    <mc:Choice Requires="p14">
+      <p:transition spd="slow" p14:dur="2000">
+        <p14:prism isContent="1"/>
+      </p:transition>
+    </mc:Choice>
+    <mc:Fallback xmlns="">
+      <p:transition spd="slow">
+        <p:fade/>
+      </p:transition>
+    </mc:Fallback>
+  </mc:AlternateContent>
 </p:sldLayout>
 </file>
 
@@ -1275,7 +1406,7 @@
         </p:nvSpPr>
         <p:spPr>
           <a:xfrm>
-            <a:off x="609600" y="1602487"/>
+            <a:off x="609600" y="1602488"/>
             <a:ext cx="5321600" cy="4525963"/>
           </a:xfrm>
           <a:ln w="25400" cap="flat">
@@ -1310,79 +1441,6 @@
       </p:sp>
       <p:sp>
         <p:nvSpPr>
-          <p:cNvPr id="4" name="Date Placeholder 3"/>
-          <p:cNvSpPr>
-            <a:spLocks noGrp="1"/>
-          </p:cNvSpPr>
-          <p:nvPr>
-            <p:ph type="dt" sz="half" idx="10"/>
-          </p:nvPr>
-        </p:nvSpPr>
-        <p:spPr>
-          <a:xfrm>
-            <a:off x="4406051" y="6308727"/>
-            <a:ext cx="1169155" cy="485424"/>
-          </a:xfrm>
-          <a:prstGeom prst="rect">
-            <a:avLst/>
-          </a:prstGeom>
-        </p:spPr>
-        <p:txBody>
-          <a:bodyPr/>
-          <a:lstStyle/>
-          <a:p>
-            <a:fld id="{D8739445-9E2F-9043-A28C-3FBDF648EB25}" type="datetimeFigureOut">
-              <a:rPr lang="en-US" smtClean="0"/>
-              <a:t>8/18/24</a:t>
-            </a:fld>
-            <a:endParaRPr lang="en-US"/>
-          </a:p>
-        </p:txBody>
-      </p:sp>
-      <p:sp>
-        <p:nvSpPr>
-          <p:cNvPr id="5" name="Footer Placeholder 4"/>
-          <p:cNvSpPr>
-            <a:spLocks noGrp="1"/>
-          </p:cNvSpPr>
-          <p:nvPr>
-            <p:ph type="ftr" sz="quarter" idx="11"/>
-          </p:nvPr>
-        </p:nvSpPr>
-        <p:spPr/>
-        <p:txBody>
-          <a:bodyPr/>
-          <a:lstStyle/>
-          <a:p>
-            <a:endParaRPr lang="en-US"/>
-          </a:p>
-        </p:txBody>
-      </p:sp>
-      <p:sp>
-        <p:nvSpPr>
-          <p:cNvPr id="6" name="Slide Number Placeholder 5"/>
-          <p:cNvSpPr>
-            <a:spLocks noGrp="1"/>
-          </p:cNvSpPr>
-          <p:nvPr>
-            <p:ph type="sldNum" sz="quarter" idx="12"/>
-          </p:nvPr>
-        </p:nvSpPr>
-        <p:spPr/>
-        <p:txBody>
-          <a:bodyPr/>
-          <a:lstStyle/>
-          <a:p>
-            <a:fld id="{5CA8E750-09AF-F04A-AC61-93A8E70A6AD8}" type="slidenum">
-              <a:rPr lang="en-US" smtClean="0"/>
-              <a:t>‹#›</a:t>
-            </a:fld>
-            <a:endParaRPr lang="en-US"/>
-          </a:p>
-        </p:txBody>
-      </p:sp>
-      <p:sp>
-        <p:nvSpPr>
           <p:cNvPr id="7" name="Content Placeholder 2">
             <a:extLst>
               <a:ext uri="{FF2B5EF4-FFF2-40B4-BE49-F238E27FC236}">
@@ -1431,16 +1489,114 @@
           </a:p>
         </p:txBody>
       </p:sp>
+      <p:sp>
+        <p:nvSpPr>
+          <p:cNvPr id="9" name="Date Placeholder 8">
+            <a:extLst>
+              <a:ext uri="{FF2B5EF4-FFF2-40B4-BE49-F238E27FC236}">
+                <a16:creationId xmlns:a16="http://schemas.microsoft.com/office/drawing/2014/main" id="{71D19512-769A-1A2D-AE4B-615827F538DF}"/>
+              </a:ext>
+            </a:extLst>
+          </p:cNvPr>
+          <p:cNvSpPr>
+            <a:spLocks noGrp="1"/>
+          </p:cNvSpPr>
+          <p:nvPr>
+            <p:ph type="dt" sz="half" idx="14"/>
+          </p:nvPr>
+        </p:nvSpPr>
+        <p:spPr/>
+        <p:txBody>
+          <a:bodyPr/>
+          <a:lstStyle/>
+          <a:p>
+            <a:fld id="{045DB866-B932-ED4C-868B-259F15F2D75F}" type="datetime1">
+              <a:rPr lang="en-US" smtClean="0"/>
+              <a:t>10/8/26</a:t>
+            </a:fld>
+            <a:endParaRPr lang="en-US"/>
+          </a:p>
+        </p:txBody>
+      </p:sp>
+      <p:sp>
+        <p:nvSpPr>
+          <p:cNvPr id="10" name="Footer Placeholder 9">
+            <a:extLst>
+              <a:ext uri="{FF2B5EF4-FFF2-40B4-BE49-F238E27FC236}">
+                <a16:creationId xmlns:a16="http://schemas.microsoft.com/office/drawing/2014/main" id="{88537417-0F7B-4AB8-2913-FC8911CF4DFA}"/>
+              </a:ext>
+            </a:extLst>
+          </p:cNvPr>
+          <p:cNvSpPr>
+            <a:spLocks noGrp="1"/>
+          </p:cNvSpPr>
+          <p:nvPr>
+            <p:ph type="ftr" sz="quarter" idx="15"/>
+          </p:nvPr>
+        </p:nvSpPr>
+        <p:spPr/>
+        <p:txBody>
+          <a:bodyPr/>
+          <a:lstStyle/>
+          <a:p>
+            <a:r>
+              <a:rPr lang="en-US"/>
+              <a:t>© Steve Beaty and others as cited</a:t>
+            </a:r>
+          </a:p>
+        </p:txBody>
+      </p:sp>
+      <p:sp>
+        <p:nvSpPr>
+          <p:cNvPr id="11" name="Slide Number Placeholder 10">
+            <a:extLst>
+              <a:ext uri="{FF2B5EF4-FFF2-40B4-BE49-F238E27FC236}">
+                <a16:creationId xmlns:a16="http://schemas.microsoft.com/office/drawing/2014/main" id="{6C508543-3E8A-F349-1E14-7A34163E0A10}"/>
+              </a:ext>
+            </a:extLst>
+          </p:cNvPr>
+          <p:cNvSpPr>
+            <a:spLocks noGrp="1"/>
+          </p:cNvSpPr>
+          <p:nvPr>
+            <p:ph type="sldNum" sz="quarter" idx="16"/>
+          </p:nvPr>
+        </p:nvSpPr>
+        <p:spPr/>
+        <p:txBody>
+          <a:bodyPr/>
+          <a:lstStyle/>
+          <a:p>
+            <a:fld id="{5CA8E750-09AF-F04A-AC61-93A8E70A6AD8}" type="slidenum">
+              <a:rPr lang="en-US" smtClean="0"/>
+              <a:t>‹#›</a:t>
+            </a:fld>
+            <a:endParaRPr lang="en-US"/>
+          </a:p>
+        </p:txBody>
+      </p:sp>
     </p:spTree>
     <p:extLst>
       <p:ext uri="{BB962C8B-B14F-4D97-AF65-F5344CB8AC3E}">
-        <p14:creationId xmlns:p14="http://schemas.microsoft.com/office/powerpoint/2010/main" val="1516325215"/>
+        <p14:creationId xmlns:p14="http://schemas.microsoft.com/office/powerpoint/2010/main" val="489678207"/>
       </p:ext>
     </p:extLst>
   </p:cSld>
   <p:clrMapOvr>
     <a:masterClrMapping/>
   </p:clrMapOvr>
+  <mc:AlternateContent xmlns:mc="http://schemas.openxmlformats.org/markup-compatibility/2006" xmlns:p14="http://schemas.microsoft.com/office/powerpoint/2010/main">
+    <mc:Choice Requires="p14">
+      <p:transition spd="slow" p14:dur="2000">
+        <p14:prism isContent="1"/>
+      </p:transition>
+    </mc:Choice>
+    <mc:Fallback xmlns="">
+      <p:transition spd="slow">
+        <p:fade/>
+      </p:transition>
+    </mc:Fallback>
+  </mc:AlternateContent>
 </p:sldLayout>
 </file>
 
@@ -1663,7 +1819,7 @@
         </p:nvSpPr>
         <p:spPr>
           <a:xfrm>
-            <a:off x="4406051" y="6308727"/>
+            <a:off x="4406052" y="6308727"/>
             <a:ext cx="1169155" cy="485424"/>
           </a:xfrm>
           <a:prstGeom prst="rect">
@@ -1674,9 +1830,9 @@
           <a:bodyPr/>
           <a:lstStyle/>
           <a:p>
-            <a:fld id="{D8739445-9E2F-9043-A28C-3FBDF648EB25}" type="datetimeFigureOut">
+            <a:fld id="{1539E3A0-76BF-974A-A279-CFA2049CAC3D}" type="datetime1">
               <a:rPr lang="en-US" smtClean="0"/>
-              <a:t>8/18/24</a:t>
+              <a:t>10/8/26</a:t>
             </a:fld>
             <a:endParaRPr lang="en-US"/>
           </a:p>
@@ -1697,7 +1853,10 @@
           <a:bodyPr/>
           <a:lstStyle/>
           <a:p>
-            <a:endParaRPr lang="en-US"/>
+            <a:r>
+              <a:rPr lang="en-US"/>
+              <a:t>© Steve Beaty and others as cited</a:t>
+            </a:r>
           </a:p>
         </p:txBody>
       </p:sp>
@@ -1727,7 +1886,7 @@
     </p:spTree>
     <p:extLst>
       <p:ext uri="{BB962C8B-B14F-4D97-AF65-F5344CB8AC3E}">
-        <p14:creationId xmlns:p14="http://schemas.microsoft.com/office/powerpoint/2010/main" val="2329271758"/>
+        <p14:creationId xmlns:p14="http://schemas.microsoft.com/office/powerpoint/2010/main" val="3394154894"/>
       </p:ext>
     </p:extLst>
   </p:cSld>
@@ -1736,12 +1895,12 @@
   </p:clrMapOvr>
   <mc:AlternateContent xmlns:mc="http://schemas.openxmlformats.org/markup-compatibility/2006" xmlns:p14="http://schemas.microsoft.com/office/powerpoint/2010/main">
     <mc:Choice Requires="p14">
-      <p:transition spd="slow" p14:dur="1200">
-        <p14:prism/>
+      <p:transition spd="slow" p14:dur="2000">
+        <p14:prism isContent="1"/>
       </p:transition>
     </mc:Choice>
     <mc:Fallback xmlns="">
-      <p:transition xmlns:p14="http://schemas.microsoft.com/office/powerpoint/2010/main" spd="slow">
+      <p:transition spd="slow">
         <p:fade/>
       </p:transition>
     </mc:Fallback>
@@ -1790,7 +1949,13 @@
       </p:sp>
       <p:sp>
         <p:nvSpPr>
-          <p:cNvPr id="3" name="Date Placeholder 2"/>
+          <p:cNvPr id="7" name="Date Placeholder 6">
+            <a:extLst>
+              <a:ext uri="{FF2B5EF4-FFF2-40B4-BE49-F238E27FC236}">
+                <a16:creationId xmlns:a16="http://schemas.microsoft.com/office/drawing/2014/main" id="{CD92DC31-8A1B-D6EF-9DCB-F31748611FEA}"/>
+              </a:ext>
+            </a:extLst>
+          </p:cNvPr>
           <p:cNvSpPr>
             <a:spLocks noGrp="1"/>
           </p:cNvSpPr>
@@ -1798,22 +1963,14 @@
             <p:ph type="dt" sz="half" idx="10"/>
           </p:nvPr>
         </p:nvSpPr>
-        <p:spPr>
-          <a:xfrm>
-            <a:off x="4406051" y="6308727"/>
-            <a:ext cx="1169155" cy="485424"/>
-          </a:xfrm>
-          <a:prstGeom prst="rect">
-            <a:avLst/>
-          </a:prstGeom>
-        </p:spPr>
-        <p:txBody>
-          <a:bodyPr/>
-          <a:lstStyle/>
-          <a:p>
-            <a:fld id="{D8739445-9E2F-9043-A28C-3FBDF648EB25}" type="datetimeFigureOut">
+        <p:spPr/>
+        <p:txBody>
+          <a:bodyPr/>
+          <a:lstStyle/>
+          <a:p>
+            <a:fld id="{DD7EF7DA-C7C8-8E45-8FC0-2CB4CE61A9F2}" type="datetime1">
               <a:rPr lang="en-US" smtClean="0"/>
-              <a:t>8/18/24</a:t>
+              <a:t>10/8/26</a:t>
             </a:fld>
             <a:endParaRPr lang="en-US"/>
           </a:p>
@@ -1821,7 +1978,13 @@
       </p:sp>
       <p:sp>
         <p:nvSpPr>
-          <p:cNvPr id="4" name="Footer Placeholder 3"/>
+          <p:cNvPr id="8" name="Footer Placeholder 7">
+            <a:extLst>
+              <a:ext uri="{FF2B5EF4-FFF2-40B4-BE49-F238E27FC236}">
+                <a16:creationId xmlns:a16="http://schemas.microsoft.com/office/drawing/2014/main" id="{3E733F8A-5589-31C8-DB78-246D75351B3B}"/>
+              </a:ext>
+            </a:extLst>
+          </p:cNvPr>
           <p:cNvSpPr>
             <a:spLocks noGrp="1"/>
           </p:cNvSpPr>
@@ -1834,13 +1997,22 @@
           <a:bodyPr/>
           <a:lstStyle/>
           <a:p>
-            <a:endParaRPr lang="en-US"/>
-          </a:p>
-        </p:txBody>
-      </p:sp>
-      <p:sp>
-        <p:nvSpPr>
-          <p:cNvPr id="5" name="Slide Number Placeholder 4"/>
+            <a:r>
+              <a:rPr lang="en-US"/>
+              <a:t>© Steve Beaty and others as cited</a:t>
+            </a:r>
+          </a:p>
+        </p:txBody>
+      </p:sp>
+      <p:sp>
+        <p:nvSpPr>
+          <p:cNvPr id="9" name="Slide Number Placeholder 8">
+            <a:extLst>
+              <a:ext uri="{FF2B5EF4-FFF2-40B4-BE49-F238E27FC236}">
+                <a16:creationId xmlns:a16="http://schemas.microsoft.com/office/drawing/2014/main" id="{CF4200DB-D3DA-2D0A-8CD3-6E48E32FC594}"/>
+              </a:ext>
+            </a:extLst>
+          </p:cNvPr>
           <p:cNvSpPr>
             <a:spLocks noGrp="1"/>
           </p:cNvSpPr>
@@ -1864,7 +2036,7 @@
     </p:spTree>
     <p:extLst>
       <p:ext uri="{BB962C8B-B14F-4D97-AF65-F5344CB8AC3E}">
-        <p14:creationId xmlns:p14="http://schemas.microsoft.com/office/powerpoint/2010/main" val="533189903"/>
+        <p14:creationId xmlns:p14="http://schemas.microsoft.com/office/powerpoint/2010/main" val="1531891698"/>
       </p:ext>
     </p:extLst>
   </p:cSld>
@@ -1873,12 +2045,12 @@
   </p:clrMapOvr>
   <mc:AlternateContent xmlns:mc="http://schemas.openxmlformats.org/markup-compatibility/2006" xmlns:p14="http://schemas.microsoft.com/office/powerpoint/2010/main">
     <mc:Choice Requires="p14">
-      <p:transition spd="slow" p14:dur="1200">
-        <p14:prism/>
+      <p:transition spd="slow" p14:dur="2000">
+        <p14:prism isContent="1"/>
       </p:transition>
     </mc:Choice>
     <mc:Fallback xmlns="">
-      <p:transition xmlns:p14="http://schemas.microsoft.com/office/powerpoint/2010/main" spd="slow">
+      <p:transition spd="slow">
         <p:fade/>
       </p:transition>
     </mc:Fallback>
@@ -1905,7 +2077,13 @@
       </p:grpSpPr>
       <p:sp>
         <p:nvSpPr>
-          <p:cNvPr id="3" name="Date Placeholder 2"/>
+          <p:cNvPr id="6" name="Date Placeholder 5">
+            <a:extLst>
+              <a:ext uri="{FF2B5EF4-FFF2-40B4-BE49-F238E27FC236}">
+                <a16:creationId xmlns:a16="http://schemas.microsoft.com/office/drawing/2014/main" id="{5C487D0D-A6BE-50D0-4804-465FF9AE0F65}"/>
+              </a:ext>
+            </a:extLst>
+          </p:cNvPr>
           <p:cNvSpPr>
             <a:spLocks noGrp="1"/>
           </p:cNvSpPr>
@@ -1913,22 +2091,14 @@
             <p:ph type="dt" sz="half" idx="10"/>
           </p:nvPr>
         </p:nvSpPr>
-        <p:spPr>
-          <a:xfrm>
-            <a:off x="4406051" y="6308727"/>
-            <a:ext cx="1169155" cy="485424"/>
-          </a:xfrm>
-          <a:prstGeom prst="rect">
-            <a:avLst/>
-          </a:prstGeom>
-        </p:spPr>
-        <p:txBody>
-          <a:bodyPr/>
-          <a:lstStyle/>
-          <a:p>
-            <a:fld id="{D8739445-9E2F-9043-A28C-3FBDF648EB25}" type="datetimeFigureOut">
+        <p:spPr/>
+        <p:txBody>
+          <a:bodyPr/>
+          <a:lstStyle/>
+          <a:p>
+            <a:fld id="{EDC9CE6A-4CDE-9447-AA30-49F4533AC4C1}" type="datetime1">
               <a:rPr lang="en-US" smtClean="0"/>
-              <a:t>8/18/24</a:t>
+              <a:t>10/8/26</a:t>
             </a:fld>
             <a:endParaRPr lang="en-US"/>
           </a:p>
@@ -1936,7 +2106,13 @@
       </p:sp>
       <p:sp>
         <p:nvSpPr>
-          <p:cNvPr id="4" name="Footer Placeholder 3"/>
+          <p:cNvPr id="7" name="Footer Placeholder 6">
+            <a:extLst>
+              <a:ext uri="{FF2B5EF4-FFF2-40B4-BE49-F238E27FC236}">
+                <a16:creationId xmlns:a16="http://schemas.microsoft.com/office/drawing/2014/main" id="{FF4343B0-C3EA-68AB-7293-4C580E1ED630}"/>
+              </a:ext>
+            </a:extLst>
+          </p:cNvPr>
           <p:cNvSpPr>
             <a:spLocks noGrp="1"/>
           </p:cNvSpPr>
@@ -1949,13 +2125,22 @@
           <a:bodyPr/>
           <a:lstStyle/>
           <a:p>
-            <a:endParaRPr lang="en-US"/>
-          </a:p>
-        </p:txBody>
-      </p:sp>
-      <p:sp>
-        <p:nvSpPr>
-          <p:cNvPr id="5" name="Slide Number Placeholder 4"/>
+            <a:r>
+              <a:rPr lang="en-US"/>
+              <a:t>© Steve Beaty and others as cited</a:t>
+            </a:r>
+          </a:p>
+        </p:txBody>
+      </p:sp>
+      <p:sp>
+        <p:nvSpPr>
+          <p:cNvPr id="8" name="Slide Number Placeholder 7">
+            <a:extLst>
+              <a:ext uri="{FF2B5EF4-FFF2-40B4-BE49-F238E27FC236}">
+                <a16:creationId xmlns:a16="http://schemas.microsoft.com/office/drawing/2014/main" id="{498496D9-0557-9109-1A11-35D97D8FDD5A}"/>
+              </a:ext>
+            </a:extLst>
+          </p:cNvPr>
           <p:cNvSpPr>
             <a:spLocks noGrp="1"/>
           </p:cNvSpPr>
@@ -1979,7 +2164,7 @@
     </p:spTree>
     <p:extLst>
       <p:ext uri="{BB962C8B-B14F-4D97-AF65-F5344CB8AC3E}">
-        <p14:creationId xmlns:p14="http://schemas.microsoft.com/office/powerpoint/2010/main" val="1394086124"/>
+        <p14:creationId xmlns:p14="http://schemas.microsoft.com/office/powerpoint/2010/main" val="756496181"/>
       </p:ext>
     </p:extLst>
   </p:cSld>
@@ -1988,236 +2173,16 @@
   </p:clrMapOvr>
   <mc:AlternateContent xmlns:mc="http://schemas.openxmlformats.org/markup-compatibility/2006" xmlns:p14="http://schemas.microsoft.com/office/powerpoint/2010/main">
     <mc:Choice Requires="p14">
-      <p:transition spd="slow" p14:dur="1200">
-        <p14:prism/>
+      <p:transition spd="slow" p14:dur="2000">
+        <p14:prism isContent="1"/>
       </p:transition>
     </mc:Choice>
     <mc:Fallback xmlns="">
-      <p:transition xmlns:p14="http://schemas.microsoft.com/office/powerpoint/2010/main" spd="slow">
+      <p:transition spd="slow">
         <p:fade/>
       </p:transition>
     </mc:Fallback>
   </mc:AlternateContent>
-</p:sldLayout>
-</file>
-
-<file path=ppt/slideLayouts/slideLayout8.xml><?xml version="1.0" encoding="utf-8"?>
-<p:sldLayout xmlns:a="http://schemas.openxmlformats.org/drawingml/2006/main" xmlns:r="http://schemas.openxmlformats.org/officeDocument/2006/relationships" xmlns:p="http://schemas.openxmlformats.org/presentationml/2006/main" type="title">
-  <p:cSld name="1_Title Slide">
-    <p:spTree>
-      <p:nvGrpSpPr>
-        <p:cNvPr id="1" name=""/>
-        <p:cNvGrpSpPr/>
-        <p:nvPr/>
-      </p:nvGrpSpPr>
-      <p:grpSpPr>
-        <a:xfrm>
-          <a:off x="0" y="0"/>
-          <a:ext cx="0" cy="0"/>
-          <a:chOff x="0" y="0"/>
-          <a:chExt cx="0" cy="0"/>
-        </a:xfrm>
-      </p:grpSpPr>
-      <p:sp>
-        <p:nvSpPr>
-          <p:cNvPr id="2" name="Title 1">
-            <a:extLst>
-              <a:ext uri="{FF2B5EF4-FFF2-40B4-BE49-F238E27FC236}">
-                <a16:creationId xmlns:a16="http://schemas.microsoft.com/office/drawing/2014/main" id="{33B3DF78-715C-D2E8-1AFC-2E02E959AB91}"/>
-              </a:ext>
-            </a:extLst>
-          </p:cNvPr>
-          <p:cNvSpPr>
-            <a:spLocks noGrp="1"/>
-          </p:cNvSpPr>
-          <p:nvPr>
-            <p:ph type="ctrTitle"/>
-          </p:nvPr>
-        </p:nvSpPr>
-        <p:spPr>
-          <a:xfrm>
-            <a:off x="1524000" y="1122363"/>
-            <a:ext cx="9144000" cy="2387600"/>
-          </a:xfrm>
-        </p:spPr>
-        <p:txBody>
-          <a:bodyPr anchor="b"/>
-          <a:lstStyle>
-            <a:lvl1pPr algn="ctr">
-              <a:defRPr sz="6000"/>
-            </a:lvl1pPr>
-          </a:lstStyle>
-          <a:p>
-            <a:r>
-              <a:rPr lang="en-US"/>
-              <a:t>Click to edit Master title style</a:t>
-            </a:r>
-          </a:p>
-        </p:txBody>
-      </p:sp>
-      <p:sp>
-        <p:nvSpPr>
-          <p:cNvPr id="3" name="Subtitle 2">
-            <a:extLst>
-              <a:ext uri="{FF2B5EF4-FFF2-40B4-BE49-F238E27FC236}">
-                <a16:creationId xmlns:a16="http://schemas.microsoft.com/office/drawing/2014/main" id="{A85CF7A1-C53A-02A9-9F5A-1D9167B6EAAB}"/>
-              </a:ext>
-            </a:extLst>
-          </p:cNvPr>
-          <p:cNvSpPr>
-            <a:spLocks noGrp="1"/>
-          </p:cNvSpPr>
-          <p:nvPr>
-            <p:ph type="subTitle" idx="1"/>
-          </p:nvPr>
-        </p:nvSpPr>
-        <p:spPr>
-          <a:xfrm>
-            <a:off x="1524000" y="3602038"/>
-            <a:ext cx="9144000" cy="1655762"/>
-          </a:xfrm>
-        </p:spPr>
-        <p:txBody>
-          <a:bodyPr/>
-          <a:lstStyle>
-            <a:lvl1pPr marL="0" indent="0" algn="ctr">
-              <a:buNone/>
-              <a:defRPr sz="2400"/>
-            </a:lvl1pPr>
-            <a:lvl2pPr marL="457200" indent="0" algn="ctr">
-              <a:buNone/>
-              <a:defRPr sz="2000"/>
-            </a:lvl2pPr>
-            <a:lvl3pPr marL="914400" indent="0" algn="ctr">
-              <a:buNone/>
-              <a:defRPr sz="1800"/>
-            </a:lvl3pPr>
-            <a:lvl4pPr marL="1371600" indent="0" algn="ctr">
-              <a:buNone/>
-              <a:defRPr sz="1600"/>
-            </a:lvl4pPr>
-            <a:lvl5pPr marL="1828800" indent="0" algn="ctr">
-              <a:buNone/>
-              <a:defRPr sz="1600"/>
-            </a:lvl5pPr>
-            <a:lvl6pPr marL="2286000" indent="0" algn="ctr">
-              <a:buNone/>
-              <a:defRPr sz="1600"/>
-            </a:lvl6pPr>
-            <a:lvl7pPr marL="2743200" indent="0" algn="ctr">
-              <a:buNone/>
-              <a:defRPr sz="1600"/>
-            </a:lvl7pPr>
-            <a:lvl8pPr marL="3200400" indent="0" algn="ctr">
-              <a:buNone/>
-              <a:defRPr sz="1600"/>
-            </a:lvl8pPr>
-            <a:lvl9pPr marL="3657600" indent="0" algn="ctr">
-              <a:buNone/>
-              <a:defRPr sz="1600"/>
-            </a:lvl9pPr>
-          </a:lstStyle>
-          <a:p>
-            <a:r>
-              <a:rPr lang="en-US"/>
-              <a:t>Click to edit Master subtitle style</a:t>
-            </a:r>
-          </a:p>
-        </p:txBody>
-      </p:sp>
-      <p:sp>
-        <p:nvSpPr>
-          <p:cNvPr id="4" name="Date Placeholder 3">
-            <a:extLst>
-              <a:ext uri="{FF2B5EF4-FFF2-40B4-BE49-F238E27FC236}">
-                <a16:creationId xmlns:a16="http://schemas.microsoft.com/office/drawing/2014/main" id="{2439A829-D2A7-D231-52FA-C8E829B3EA04}"/>
-              </a:ext>
-            </a:extLst>
-          </p:cNvPr>
-          <p:cNvSpPr>
-            <a:spLocks noGrp="1"/>
-          </p:cNvSpPr>
-          <p:nvPr>
-            <p:ph type="dt" sz="half" idx="10"/>
-          </p:nvPr>
-        </p:nvSpPr>
-        <p:spPr/>
-        <p:txBody>
-          <a:bodyPr/>
-          <a:lstStyle/>
-          <a:p>
-            <a:fld id="{D8739445-9E2F-9043-A28C-3FBDF648EB25}" type="datetimeFigureOut">
-              <a:rPr lang="en-US" smtClean="0"/>
-              <a:t>8/18/24</a:t>
-            </a:fld>
-            <a:endParaRPr lang="en-US"/>
-          </a:p>
-        </p:txBody>
-      </p:sp>
-      <p:sp>
-        <p:nvSpPr>
-          <p:cNvPr id="5" name="Footer Placeholder 4">
-            <a:extLst>
-              <a:ext uri="{FF2B5EF4-FFF2-40B4-BE49-F238E27FC236}">
-                <a16:creationId xmlns:a16="http://schemas.microsoft.com/office/drawing/2014/main" id="{C1F3F63D-ACB7-A22A-22B2-7DB520DEB82C}"/>
-              </a:ext>
-            </a:extLst>
-          </p:cNvPr>
-          <p:cNvSpPr>
-            <a:spLocks noGrp="1"/>
-          </p:cNvSpPr>
-          <p:nvPr>
-            <p:ph type="ftr" sz="quarter" idx="11"/>
-          </p:nvPr>
-        </p:nvSpPr>
-        <p:spPr/>
-        <p:txBody>
-          <a:bodyPr/>
-          <a:lstStyle/>
-          <a:p>
-            <a:endParaRPr lang="en-US"/>
-          </a:p>
-        </p:txBody>
-      </p:sp>
-      <p:sp>
-        <p:nvSpPr>
-          <p:cNvPr id="6" name="Slide Number Placeholder 5">
-            <a:extLst>
-              <a:ext uri="{FF2B5EF4-FFF2-40B4-BE49-F238E27FC236}">
-                <a16:creationId xmlns:a16="http://schemas.microsoft.com/office/drawing/2014/main" id="{26D64745-0EA0-988D-9593-C6BAAFDD15AF}"/>
-              </a:ext>
-            </a:extLst>
-          </p:cNvPr>
-          <p:cNvSpPr>
-            <a:spLocks noGrp="1"/>
-          </p:cNvSpPr>
-          <p:nvPr>
-            <p:ph type="sldNum" sz="quarter" idx="12"/>
-          </p:nvPr>
-        </p:nvSpPr>
-        <p:spPr/>
-        <p:txBody>
-          <a:bodyPr/>
-          <a:lstStyle/>
-          <a:p>
-            <a:fld id="{5CA8E750-09AF-F04A-AC61-93A8E70A6AD8}" type="slidenum">
-              <a:rPr lang="en-US" smtClean="0"/>
-              <a:t>‹#›</a:t>
-            </a:fld>
-            <a:endParaRPr lang="en-US"/>
-          </a:p>
-        </p:txBody>
-      </p:sp>
-    </p:spTree>
-    <p:extLst>
-      <p:ext uri="{BB962C8B-B14F-4D97-AF65-F5344CB8AC3E}">
-        <p14:creationId xmlns:p14="http://schemas.microsoft.com/office/powerpoint/2010/main" val="3389219325"/>
-      </p:ext>
-    </p:extLst>
-  </p:cSld>
-  <p:clrMapOvr>
-    <a:masterClrMapping/>
-  </p:clrMapOvr>
 </p:sldLayout>
 </file>
 
@@ -2227,7 +2192,7 @@
     <p:bg>
       <p:bgPr>
         <a:blipFill dpi="0" rotWithShape="1">
-          <a:blip r:embed="rId10">
+          <a:blip r:embed="rId9">
             <a:lum/>
           </a:blip>
           <a:srcRect/>
@@ -2267,8 +2232,10 @@
             <a:off x="609600" y="274639"/>
             <a:ext cx="10972800" cy="1143000"/>
           </a:xfrm>
-          <a:prstGeom prst="rect">
-            <a:avLst/>
+          <a:prstGeom prst="roundRect">
+            <a:avLst>
+              <a:gd name="adj" fmla="val 44167"/>
+            </a:avLst>
           </a:prstGeom>
           <a:solidFill>
             <a:schemeClr val="bg1">
@@ -2315,7 +2282,7 @@
             <a:off x="609600" y="1600201"/>
             <a:ext cx="10972800" cy="4525963"/>
           </a:xfrm>
-          <a:prstGeom prst="rect">
+          <a:prstGeom prst="roundRect">
             <a:avLst/>
           </a:prstGeom>
           <a:solidFill>
@@ -2389,11 +2356,13 @@
         </p:nvSpPr>
         <p:spPr>
           <a:xfrm>
-            <a:off x="1596887" y="6309418"/>
-            <a:ext cx="8998226" cy="487680"/>
+            <a:off x="1881809" y="6308727"/>
+            <a:ext cx="7945363" cy="487680"/>
           </a:xfrm>
-          <a:prstGeom prst="rect">
-            <a:avLst/>
+          <a:prstGeom prst="roundRect">
+            <a:avLst>
+              <a:gd name="adj" fmla="val 48894"/>
+            </a:avLst>
           </a:prstGeom>
           <a:solidFill>
             <a:schemeClr val="bg1"/>
@@ -2414,7 +2383,10 @@
             </a:lvl1pPr>
           </a:lstStyle>
           <a:p>
-            <a:endParaRPr lang="en-US"/>
+            <a:r>
+              <a:rPr lang="en-US"/>
+              <a:t>© Steve Beaty and others as cited</a:t>
+            </a:r>
           </a:p>
         </p:txBody>
       </p:sp>
@@ -2430,11 +2402,13 @@
         </p:nvSpPr>
         <p:spPr>
           <a:xfrm>
-            <a:off x="10702624" y="6308727"/>
+            <a:off x="9934686" y="6308727"/>
             <a:ext cx="879777" cy="487680"/>
           </a:xfrm>
-          <a:prstGeom prst="rect">
-            <a:avLst/>
+          <a:prstGeom prst="roundRect">
+            <a:avLst>
+              <a:gd name="adj" fmla="val 43034"/>
+            </a:avLst>
           </a:prstGeom>
           <a:solidFill>
             <a:schemeClr val="bg1"/>
@@ -2446,7 +2420,7 @@
         <p:txBody>
           <a:bodyPr vert="horz" lIns="91440" tIns="45720" rIns="91440" bIns="45720" rtlCol="0" anchor="ctr"/>
           <a:lstStyle>
-            <a:lvl1pPr algn="r">
+            <a:lvl1pPr algn="ctr">
               <a:defRPr sz="1600">
                 <a:solidFill>
                   <a:schemeClr val="tx1">
@@ -2465,23 +2439,210 @@
           </a:p>
         </p:txBody>
       </p:sp>
+      <p:sp>
+        <p:nvSpPr>
+          <p:cNvPr id="4" name="Date Placeholder 2">
+            <a:extLst>
+              <a:ext uri="{FF2B5EF4-FFF2-40B4-BE49-F238E27FC236}">
+                <a16:creationId xmlns:a16="http://schemas.microsoft.com/office/drawing/2014/main" id="{B6740CB2-DC30-5DDB-24B8-219C9C3F5967}"/>
+              </a:ext>
+            </a:extLst>
+          </p:cNvPr>
+          <p:cNvSpPr>
+            <a:spLocks noGrp="1"/>
+          </p:cNvSpPr>
+          <p:nvPr>
+            <p:ph type="dt" sz="half" idx="2"/>
+          </p:nvPr>
+        </p:nvSpPr>
+        <p:spPr>
+          <a:xfrm>
+            <a:off x="605141" y="6308727"/>
+            <a:ext cx="1169155" cy="487680"/>
+          </a:xfrm>
+          <a:prstGeom prst="roundRect">
+            <a:avLst>
+              <a:gd name="adj" fmla="val 48894"/>
+            </a:avLst>
+          </a:prstGeom>
+          <a:solidFill>
+            <a:schemeClr val="bg1"/>
+          </a:solidFill>
+          <a:effectLst>
+            <a:softEdge rad="63500"/>
+          </a:effectLst>
+        </p:spPr>
+        <p:txBody>
+          <a:bodyPr anchor="ctr" anchorCtr="0"/>
+          <a:lstStyle>
+            <a:lvl1pPr algn="ctr">
+              <a:defRPr sz="1600"/>
+            </a:lvl1pPr>
+          </a:lstStyle>
+          <a:p>
+            <a:fld id="{990AB998-6673-A04F-9F54-D3F507C68E2F}" type="datetime1">
+              <a:rPr lang="en-US" smtClean="0"/>
+              <a:t>10/8/26</a:t>
+            </a:fld>
+            <a:endParaRPr lang="en-US"/>
+          </a:p>
+        </p:txBody>
+      </p:sp>
+      <p:sp>
+        <p:nvSpPr>
+          <p:cNvPr id="7" name="SlideTotal">
+            <a:extLst>
+              <a:ext uri="{FF2B5EF4-FFF2-40B4-BE49-F238E27FC236}">
+                <a16:creationId xmlns:a16="http://schemas.microsoft.com/office/drawing/2014/main" id="{B74D5B4B-3C60-FF6A-4438-A067B7DE7333}"/>
+              </a:ext>
+            </a:extLst>
+          </p:cNvPr>
+          <p:cNvSpPr txBox="1">
+            <a:spLocks/>
+          </p:cNvSpPr>
+          <p:nvPr/>
+        </p:nvSpPr>
+        <p:spPr>
+          <a:xfrm>
+            <a:off x="10702624" y="6308727"/>
+            <a:ext cx="879777" cy="487680"/>
+          </a:xfrm>
+          <a:prstGeom prst="roundRect">
+            <a:avLst>
+              <a:gd name="adj" fmla="val 43034"/>
+            </a:avLst>
+          </a:prstGeom>
+          <a:solidFill>
+            <a:schemeClr val="bg1"/>
+          </a:solidFill>
+          <a:effectLst>
+            <a:softEdge rad="63500"/>
+          </a:effectLst>
+        </p:spPr>
+        <p:txBody>
+          <a:bodyPr vert="horz" lIns="121920" tIns="60960" rIns="121920" bIns="60960" rtlCol="0" anchor="ctr"/>
+          <a:lstStyle>
+            <a:defPPr>
+              <a:defRPr lang="en-US"/>
+            </a:defPPr>
+            <a:lvl1pPr marL="0" algn="ctr" defTabSz="914400" rtl="0" eaLnBrk="1" latinLnBrk="0" hangingPunct="1">
+              <a:defRPr sz="1200" kern="1200">
+                <a:solidFill>
+                  <a:schemeClr val="tx1">
+                    <a:tint val="75000"/>
+                  </a:schemeClr>
+                </a:solidFill>
+                <a:latin typeface="+mn-lt"/>
+                <a:ea typeface="+mn-ea"/>
+                <a:cs typeface="+mn-cs"/>
+              </a:defRPr>
+            </a:lvl1pPr>
+            <a:lvl2pPr marL="457200" algn="l" defTabSz="914400" rtl="0" eaLnBrk="1" latinLnBrk="0" hangingPunct="1">
+              <a:defRPr sz="1800" kern="1200">
+                <a:solidFill>
+                  <a:schemeClr val="tx1"/>
+                </a:solidFill>
+                <a:latin typeface="+mn-lt"/>
+                <a:ea typeface="+mn-ea"/>
+                <a:cs typeface="+mn-cs"/>
+              </a:defRPr>
+            </a:lvl2pPr>
+            <a:lvl3pPr marL="914400" algn="l" defTabSz="914400" rtl="0" eaLnBrk="1" latinLnBrk="0" hangingPunct="1">
+              <a:defRPr sz="1800" kern="1200">
+                <a:solidFill>
+                  <a:schemeClr val="tx1"/>
+                </a:solidFill>
+                <a:latin typeface="+mn-lt"/>
+                <a:ea typeface="+mn-ea"/>
+                <a:cs typeface="+mn-cs"/>
+              </a:defRPr>
+            </a:lvl3pPr>
+            <a:lvl4pPr marL="1371600" algn="l" defTabSz="914400" rtl="0" eaLnBrk="1" latinLnBrk="0" hangingPunct="1">
+              <a:defRPr sz="1800" kern="1200">
+                <a:solidFill>
+                  <a:schemeClr val="tx1"/>
+                </a:solidFill>
+                <a:latin typeface="+mn-lt"/>
+                <a:ea typeface="+mn-ea"/>
+                <a:cs typeface="+mn-cs"/>
+              </a:defRPr>
+            </a:lvl4pPr>
+            <a:lvl5pPr marL="1828800" algn="l" defTabSz="914400" rtl="0" eaLnBrk="1" latinLnBrk="0" hangingPunct="1">
+              <a:defRPr sz="1800" kern="1200">
+                <a:solidFill>
+                  <a:schemeClr val="tx1"/>
+                </a:solidFill>
+                <a:latin typeface="+mn-lt"/>
+                <a:ea typeface="+mn-ea"/>
+                <a:cs typeface="+mn-cs"/>
+              </a:defRPr>
+            </a:lvl5pPr>
+            <a:lvl6pPr marL="2286000" algn="l" defTabSz="914400" rtl="0" eaLnBrk="1" latinLnBrk="0" hangingPunct="1">
+              <a:defRPr sz="1800" kern="1200">
+                <a:solidFill>
+                  <a:schemeClr val="tx1"/>
+                </a:solidFill>
+                <a:latin typeface="+mn-lt"/>
+                <a:ea typeface="+mn-ea"/>
+                <a:cs typeface="+mn-cs"/>
+              </a:defRPr>
+            </a:lvl6pPr>
+            <a:lvl7pPr marL="2743200" algn="l" defTabSz="914400" rtl="0" eaLnBrk="1" latinLnBrk="0" hangingPunct="1">
+              <a:defRPr sz="1800" kern="1200">
+                <a:solidFill>
+                  <a:schemeClr val="tx1"/>
+                </a:solidFill>
+                <a:latin typeface="+mn-lt"/>
+                <a:ea typeface="+mn-ea"/>
+                <a:cs typeface="+mn-cs"/>
+              </a:defRPr>
+            </a:lvl7pPr>
+            <a:lvl8pPr marL="3200400" algn="l" defTabSz="914400" rtl="0" eaLnBrk="1" latinLnBrk="0" hangingPunct="1">
+              <a:defRPr sz="1800" kern="1200">
+                <a:solidFill>
+                  <a:schemeClr val="tx1"/>
+                </a:solidFill>
+                <a:latin typeface="+mn-lt"/>
+                <a:ea typeface="+mn-ea"/>
+                <a:cs typeface="+mn-cs"/>
+              </a:defRPr>
+            </a:lvl8pPr>
+            <a:lvl9pPr marL="3657600" algn="l" defTabSz="914400" rtl="0" eaLnBrk="1" latinLnBrk="0" hangingPunct="1">
+              <a:defRPr sz="1800" kern="1200">
+                <a:solidFill>
+                  <a:schemeClr val="tx1"/>
+                </a:solidFill>
+                <a:latin typeface="+mn-lt"/>
+                <a:ea typeface="+mn-ea"/>
+                <a:cs typeface="+mn-cs"/>
+              </a:defRPr>
+            </a:lvl9pPr>
+          </a:lstStyle>
+          <a:p>
+            <a:r>
+              <a:rPr lang="en-US" sz="1600"/>
+              <a:t>64</a:t>
+            </a:r>
+            <a:endParaRPr lang="en-US" sz="1600" dirty="0"/>
+          </a:p>
+        </p:txBody>
+      </p:sp>
     </p:spTree>
     <p:extLst>
       <p:ext uri="{BB962C8B-B14F-4D97-AF65-F5344CB8AC3E}">
-        <p14:creationId xmlns:p14="http://schemas.microsoft.com/office/powerpoint/2010/main" val="525900674"/>
+        <p14:creationId xmlns:p14="http://schemas.microsoft.com/office/powerpoint/2010/main" val="1680480301"/>
       </p:ext>
     </p:extLst>
   </p:cSld>
   <p:clrMap bg1="lt1" tx1="dk1" bg2="lt2" tx2="dk2" accent1="accent1" accent2="accent2" accent3="accent3" accent4="accent4" accent5="accent5" accent6="accent6" hlink="hlink" folHlink="folHlink"/>
   <p:sldLayoutIdLst>
-    <p:sldLayoutId id="2147483661" r:id="rId1"/>
-    <p:sldLayoutId id="2147483662" r:id="rId2"/>
-    <p:sldLayoutId id="2147483663" r:id="rId3"/>
-    <p:sldLayoutId id="2147483664" r:id="rId4"/>
-    <p:sldLayoutId id="2147483665" r:id="rId5"/>
-    <p:sldLayoutId id="2147483666" r:id="rId6"/>
-    <p:sldLayoutId id="2147483667" r:id="rId7"/>
-    <p:sldLayoutId id="2147483668" r:id="rId8"/>
+    <p:sldLayoutId id="2147483670" r:id="rId1"/>
+    <p:sldLayoutId id="2147483671" r:id="rId2"/>
+    <p:sldLayoutId id="2147483672" r:id="rId3"/>
+    <p:sldLayoutId id="2147483673" r:id="rId4"/>
+    <p:sldLayoutId id="2147483674" r:id="rId5"/>
+    <p:sldLayoutId id="2147483675" r:id="rId6"/>
+    <p:sldLayoutId id="2147483676" r:id="rId7"/>
   </p:sldLayoutIdLst>
   <mc:AlternateContent xmlns:mc="http://schemas.openxmlformats.org/markup-compatibility/2006" xmlns:p14="http://schemas.microsoft.com/office/powerpoint/2010/main">
     <mc:Choice Requires="p14">
@@ -2495,9 +2656,10 @@
       </p:transition>
     </mc:Fallback>
   </mc:AlternateContent>
+  <p:hf hdr="0"/>
   <p:txStyles>
     <p:titleStyle>
-      <a:lvl1pPr algn="ctr" defTabSz="609570" rtl="0" eaLnBrk="1" latinLnBrk="0" hangingPunct="1">
+      <a:lvl1pPr algn="ctr" defTabSz="609555" rtl="0" eaLnBrk="1" latinLnBrk="0" hangingPunct="1">
         <a:spcBef>
           <a:spcPct val="0"/>
         </a:spcBef>
@@ -2513,7 +2675,7 @@
       </a:lvl1pPr>
     </p:titleStyle>
     <p:bodyStyle>
-      <a:lvl1pPr marL="457177" indent="-457177" algn="l" defTabSz="609570" rtl="0" eaLnBrk="1" latinLnBrk="0" hangingPunct="1">
+      <a:lvl1pPr marL="457166" indent="-457166" algn="l" defTabSz="609555" rtl="0" eaLnBrk="1" latinLnBrk="0" hangingPunct="1">
         <a:spcBef>
           <a:spcPct val="20000"/>
         </a:spcBef>
@@ -2528,7 +2690,7 @@
           <a:cs typeface="+mn-cs"/>
         </a:defRPr>
       </a:lvl1pPr>
-      <a:lvl2pPr marL="990551" indent="-380982" algn="l" defTabSz="609570" rtl="0" eaLnBrk="1" latinLnBrk="0" hangingPunct="1">
+      <a:lvl2pPr marL="990526" indent="-380973" algn="l" defTabSz="609555" rtl="0" eaLnBrk="1" latinLnBrk="0" hangingPunct="1">
         <a:spcBef>
           <a:spcPct val="20000"/>
         </a:spcBef>
@@ -2543,7 +2705,7 @@
           <a:cs typeface="+mn-cs"/>
         </a:defRPr>
       </a:lvl2pPr>
-      <a:lvl3pPr marL="1523923" indent="-304784" algn="l" defTabSz="609570" rtl="0" eaLnBrk="1" latinLnBrk="0" hangingPunct="1">
+      <a:lvl3pPr marL="1523885" indent="-304776" algn="l" defTabSz="609555" rtl="0" eaLnBrk="1" latinLnBrk="0" hangingPunct="1">
         <a:spcBef>
           <a:spcPct val="20000"/>
         </a:spcBef>
@@ -2558,7 +2720,7 @@
           <a:cs typeface="+mn-cs"/>
         </a:defRPr>
       </a:lvl3pPr>
-      <a:lvl4pPr marL="2133493" indent="-304784" algn="l" defTabSz="609570" rtl="0" eaLnBrk="1" latinLnBrk="0" hangingPunct="1">
+      <a:lvl4pPr marL="2133440" indent="-304776" algn="l" defTabSz="609555" rtl="0" eaLnBrk="1" latinLnBrk="0" hangingPunct="1">
         <a:spcBef>
           <a:spcPct val="20000"/>
         </a:spcBef>
@@ -2573,7 +2735,7 @@
           <a:cs typeface="+mn-cs"/>
         </a:defRPr>
       </a:lvl4pPr>
-      <a:lvl5pPr marL="2743063" indent="-304784" algn="l" defTabSz="609570" rtl="0" eaLnBrk="1" latinLnBrk="0" hangingPunct="1">
+      <a:lvl5pPr marL="2742994" indent="-304776" algn="l" defTabSz="609555" rtl="0" eaLnBrk="1" latinLnBrk="0" hangingPunct="1">
         <a:spcBef>
           <a:spcPct val="20000"/>
         </a:spcBef>
@@ -2588,7 +2750,7 @@
           <a:cs typeface="+mn-cs"/>
         </a:defRPr>
       </a:lvl5pPr>
-      <a:lvl6pPr marL="3352632" indent="-304784" algn="l" defTabSz="609570" rtl="0" eaLnBrk="1" latinLnBrk="0" hangingPunct="1">
+      <a:lvl6pPr marL="3352548" indent="-304776" algn="l" defTabSz="609555" rtl="0" eaLnBrk="1" latinLnBrk="0" hangingPunct="1">
         <a:spcBef>
           <a:spcPct val="20000"/>
         </a:spcBef>
@@ -2603,7 +2765,7 @@
           <a:cs typeface="+mn-cs"/>
         </a:defRPr>
       </a:lvl6pPr>
-      <a:lvl7pPr marL="3962202" indent="-304784" algn="l" defTabSz="609570" rtl="0" eaLnBrk="1" latinLnBrk="0" hangingPunct="1">
+      <a:lvl7pPr marL="3962104" indent="-304776" algn="l" defTabSz="609555" rtl="0" eaLnBrk="1" latinLnBrk="0" hangingPunct="1">
         <a:spcBef>
           <a:spcPct val="20000"/>
         </a:spcBef>
@@ -2618,7 +2780,7 @@
           <a:cs typeface="+mn-cs"/>
         </a:defRPr>
       </a:lvl7pPr>
-      <a:lvl8pPr marL="4571771" indent="-304784" algn="l" defTabSz="609570" rtl="0" eaLnBrk="1" latinLnBrk="0" hangingPunct="1">
+      <a:lvl8pPr marL="4571656" indent="-304776" algn="l" defTabSz="609555" rtl="0" eaLnBrk="1" latinLnBrk="0" hangingPunct="1">
         <a:spcBef>
           <a:spcPct val="20000"/>
         </a:spcBef>
@@ -2633,7 +2795,7 @@
           <a:cs typeface="+mn-cs"/>
         </a:defRPr>
       </a:lvl8pPr>
-      <a:lvl9pPr marL="5181341" indent="-304784" algn="l" defTabSz="609570" rtl="0" eaLnBrk="1" latinLnBrk="0" hangingPunct="1">
+      <a:lvl9pPr marL="5181212" indent="-304776" algn="l" defTabSz="609555" rtl="0" eaLnBrk="1" latinLnBrk="0" hangingPunct="1">
         <a:spcBef>
           <a:spcPct val="20000"/>
         </a:spcBef>
@@ -2653,7 +2815,7 @@
       <a:defPPr>
         <a:defRPr lang="en-US"/>
       </a:defPPr>
-      <a:lvl1pPr marL="0" algn="l" defTabSz="609570" rtl="0" eaLnBrk="1" latinLnBrk="0" hangingPunct="1">
+      <a:lvl1pPr marL="0" algn="l" defTabSz="609555" rtl="0" eaLnBrk="1" latinLnBrk="0" hangingPunct="1">
         <a:defRPr sz="2400" kern="1200">
           <a:solidFill>
             <a:schemeClr val="tx1"/>
@@ -2663,7 +2825,7 @@
           <a:cs typeface="+mn-cs"/>
         </a:defRPr>
       </a:lvl1pPr>
-      <a:lvl2pPr marL="609570" algn="l" defTabSz="609570" rtl="0" eaLnBrk="1" latinLnBrk="0" hangingPunct="1">
+      <a:lvl2pPr marL="609555" algn="l" defTabSz="609555" rtl="0" eaLnBrk="1" latinLnBrk="0" hangingPunct="1">
         <a:defRPr sz="2400" kern="1200">
           <a:solidFill>
             <a:schemeClr val="tx1"/>
@@ -2673,7 +2835,7 @@
           <a:cs typeface="+mn-cs"/>
         </a:defRPr>
       </a:lvl2pPr>
-      <a:lvl3pPr marL="1219139" algn="l" defTabSz="609570" rtl="0" eaLnBrk="1" latinLnBrk="0" hangingPunct="1">
+      <a:lvl3pPr marL="1219108" algn="l" defTabSz="609555" rtl="0" eaLnBrk="1" latinLnBrk="0" hangingPunct="1">
         <a:defRPr sz="2400" kern="1200">
           <a:solidFill>
             <a:schemeClr val="tx1"/>
@@ -2683,7 +2845,7 @@
           <a:cs typeface="+mn-cs"/>
         </a:defRPr>
       </a:lvl3pPr>
-      <a:lvl4pPr marL="1828709" algn="l" defTabSz="609570" rtl="0" eaLnBrk="1" latinLnBrk="0" hangingPunct="1">
+      <a:lvl4pPr marL="1828664" algn="l" defTabSz="609555" rtl="0" eaLnBrk="1" latinLnBrk="0" hangingPunct="1">
         <a:defRPr sz="2400" kern="1200">
           <a:solidFill>
             <a:schemeClr val="tx1"/>
@@ -2693,7 +2855,7 @@
           <a:cs typeface="+mn-cs"/>
         </a:defRPr>
       </a:lvl4pPr>
-      <a:lvl5pPr marL="2438278" algn="l" defTabSz="609570" rtl="0" eaLnBrk="1" latinLnBrk="0" hangingPunct="1">
+      <a:lvl5pPr marL="2438218" algn="l" defTabSz="609555" rtl="0" eaLnBrk="1" latinLnBrk="0" hangingPunct="1">
         <a:defRPr sz="2400" kern="1200">
           <a:solidFill>
             <a:schemeClr val="tx1"/>
@@ -2703,7 +2865,7 @@
           <a:cs typeface="+mn-cs"/>
         </a:defRPr>
       </a:lvl5pPr>
-      <a:lvl6pPr marL="3047848" algn="l" defTabSz="609570" rtl="0" eaLnBrk="1" latinLnBrk="0" hangingPunct="1">
+      <a:lvl6pPr marL="3047772" algn="l" defTabSz="609555" rtl="0" eaLnBrk="1" latinLnBrk="0" hangingPunct="1">
         <a:defRPr sz="2400" kern="1200">
           <a:solidFill>
             <a:schemeClr val="tx1"/>
@@ -2713,7 +2875,7 @@
           <a:cs typeface="+mn-cs"/>
         </a:defRPr>
       </a:lvl6pPr>
-      <a:lvl7pPr marL="3657417" algn="l" defTabSz="609570" rtl="0" eaLnBrk="1" latinLnBrk="0" hangingPunct="1">
+      <a:lvl7pPr marL="3657326" algn="l" defTabSz="609555" rtl="0" eaLnBrk="1" latinLnBrk="0" hangingPunct="1">
         <a:defRPr sz="2400" kern="1200">
           <a:solidFill>
             <a:schemeClr val="tx1"/>
@@ -2723,7 +2885,7 @@
           <a:cs typeface="+mn-cs"/>
         </a:defRPr>
       </a:lvl7pPr>
-      <a:lvl8pPr marL="4266987" algn="l" defTabSz="609570" rtl="0" eaLnBrk="1" latinLnBrk="0" hangingPunct="1">
+      <a:lvl8pPr marL="4266880" algn="l" defTabSz="609555" rtl="0" eaLnBrk="1" latinLnBrk="0" hangingPunct="1">
         <a:defRPr sz="2400" kern="1200">
           <a:solidFill>
             <a:schemeClr val="tx1"/>
@@ -2733,7 +2895,7 @@
           <a:cs typeface="+mn-cs"/>
         </a:defRPr>
       </a:lvl8pPr>
-      <a:lvl9pPr marL="4876557" algn="l" defTabSz="609570" rtl="0" eaLnBrk="1" latinLnBrk="0" hangingPunct="1">
+      <a:lvl9pPr marL="4876435" algn="l" defTabSz="609555" rtl="0" eaLnBrk="1" latinLnBrk="0" hangingPunct="1">
         <a:defRPr sz="2400" kern="1200">
           <a:solidFill>
             <a:schemeClr val="tx1"/>
@@ -2781,12 +2943,7 @@
             <p:ph type="ctrTitle"/>
           </p:nvPr>
         </p:nvSpPr>
-        <p:spPr>
-          <a:xfrm>
-            <a:off x="914400" y="1058938"/>
-            <a:ext cx="10363200" cy="1470025"/>
-          </a:xfrm>
-        </p:spPr>
+        <p:spPr/>
         <p:txBody>
           <a:bodyPr/>
           <a:lstStyle/>
@@ -2814,17 +2971,100 @@
             <p:ph type="body" sz="quarter" idx="10"/>
           </p:nvPr>
         </p:nvSpPr>
-        <p:spPr>
-          <a:xfrm>
-            <a:off x="2281186" y="2983610"/>
-            <a:ext cx="7609479" cy="1009561"/>
-          </a:xfrm>
-        </p:spPr>
+        <p:spPr/>
         <p:txBody>
           <a:bodyPr/>
           <a:lstStyle/>
           <a:p>
             <a:endParaRPr lang="en-US"/>
+          </a:p>
+        </p:txBody>
+      </p:sp>
+      <p:sp>
+        <p:nvSpPr>
+          <p:cNvPr id="2" name="Date Placeholder 1">
+            <a:extLst>
+              <a:ext uri="{FF2B5EF4-FFF2-40B4-BE49-F238E27FC236}">
+                <a16:creationId xmlns:a16="http://schemas.microsoft.com/office/drawing/2014/main" id="{B5C6CBA1-3BFC-34F3-C408-5F923957EA58}"/>
+              </a:ext>
+            </a:extLst>
+          </p:cNvPr>
+          <p:cNvSpPr>
+            <a:spLocks noGrp="1"/>
+          </p:cNvSpPr>
+          <p:nvPr>
+            <p:ph type="dt" sz="half" idx="11"/>
+          </p:nvPr>
+        </p:nvSpPr>
+        <p:spPr/>
+        <p:txBody>
+          <a:bodyPr/>
+          <a:lstStyle/>
+          <a:p>
+            <a:fld id="{4A856225-0086-1C4A-B4A1-BFD10859D0D8}" type="datetime1">
+              <a:rPr lang="en-US" smtClean="0"/>
+              <a:t>10/8/26</a:t>
+            </a:fld>
+            <a:endParaRPr lang="en-US" dirty="0"/>
+          </a:p>
+        </p:txBody>
+      </p:sp>
+      <p:sp>
+        <p:nvSpPr>
+          <p:cNvPr id="3" name="Footer Placeholder 2">
+            <a:extLst>
+              <a:ext uri="{FF2B5EF4-FFF2-40B4-BE49-F238E27FC236}">
+                <a16:creationId xmlns:a16="http://schemas.microsoft.com/office/drawing/2014/main" id="{25D8AD99-6748-D4DB-CCEC-DF341DA6D70C}"/>
+              </a:ext>
+            </a:extLst>
+          </p:cNvPr>
+          <p:cNvSpPr>
+            <a:spLocks noGrp="1"/>
+          </p:cNvSpPr>
+          <p:nvPr>
+            <p:ph type="ftr" sz="quarter" idx="12"/>
+          </p:nvPr>
+        </p:nvSpPr>
+        <p:spPr/>
+        <p:txBody>
+          <a:bodyPr/>
+          <a:lstStyle/>
+          <a:p>
+            <a:r>
+              <a:rPr lang="en-US"/>
+              <a:t>© Steve Beaty and others as cited</a:t>
+            </a:r>
+            <a:endParaRPr lang="en-US" dirty="0"/>
+          </a:p>
+        </p:txBody>
+      </p:sp>
+      <p:sp>
+        <p:nvSpPr>
+          <p:cNvPr id="4" name="Slide Number Placeholder 3">
+            <a:extLst>
+              <a:ext uri="{FF2B5EF4-FFF2-40B4-BE49-F238E27FC236}">
+                <a16:creationId xmlns:a16="http://schemas.microsoft.com/office/drawing/2014/main" id="{56BB35B4-4203-3BB8-0BBD-50A96ED4043A}"/>
+              </a:ext>
+            </a:extLst>
+          </p:cNvPr>
+          <p:cNvSpPr>
+            <a:spLocks noGrp="1"/>
+          </p:cNvSpPr>
+          <p:nvPr>
+            <p:ph type="sldNum" sz="quarter" idx="13"/>
+          </p:nvPr>
+        </p:nvSpPr>
+        <p:spPr/>
+        <p:txBody>
+          <a:bodyPr/>
+          <a:lstStyle/>
+          <a:p>
+            <a:fld id="{37D050C8-32A2-8944-BC0A-E76DEAECED1E}" type="slidenum">
+              <a:rPr lang="en-US" smtClean="0"/>
+              <a:pPr/>
+              <a:t>1</a:t>
+            </a:fld>
+            <a:endParaRPr lang="en-US" dirty="0"/>
           </a:p>
         </p:txBody>
       </p:sp>
@@ -2840,8 +3080,8 @@
   </p:clrMapOvr>
   <mc:AlternateContent xmlns:mc="http://schemas.openxmlformats.org/markup-compatibility/2006" xmlns:p14="http://schemas.microsoft.com/office/powerpoint/2010/main">
     <mc:Choice Requires="p14">
-      <p:transition spd="slow" p14:dur="1200">
-        <p14:prism/>
+      <p:transition spd="slow" p14:dur="2000">
+        <p14:prism isContent="1"/>
       </p:transition>
     </mc:Choice>
     <mc:Fallback xmlns="">
@@ -2888,7 +3128,9 @@
         </p:nvSpPr>
         <p:spPr/>
         <p:txBody>
-          <a:bodyPr/>
+          <a:bodyPr>
+            <a:normAutofit fontScale="90000"/>
+          </a:bodyPr>
           <a:lstStyle/>
           <a:p>
             <a:r>
@@ -2917,7 +3159,7 @@
         <p:spPr/>
         <p:txBody>
           <a:bodyPr>
-            <a:normAutofit fontScale="85000" lnSpcReduction="10000"/>
+            <a:normAutofit fontScale="85000" lnSpcReduction="20000"/>
           </a:bodyPr>
           <a:lstStyle/>
           <a:p>
@@ -2952,6 +3194,92 @@
           </a:p>
           <a:p>
             <a:endParaRPr lang="en-US" dirty="0"/>
+          </a:p>
+        </p:txBody>
+      </p:sp>
+      <p:sp>
+        <p:nvSpPr>
+          <p:cNvPr id="4" name="Date Placeholder 3">
+            <a:extLst>
+              <a:ext uri="{FF2B5EF4-FFF2-40B4-BE49-F238E27FC236}">
+                <a16:creationId xmlns:a16="http://schemas.microsoft.com/office/drawing/2014/main" id="{F551A6BF-B78D-9396-55FE-DBA19222E7BE}"/>
+              </a:ext>
+            </a:extLst>
+          </p:cNvPr>
+          <p:cNvSpPr>
+            <a:spLocks noGrp="1"/>
+          </p:cNvSpPr>
+          <p:nvPr>
+            <p:ph type="dt" sz="half" idx="10"/>
+          </p:nvPr>
+        </p:nvSpPr>
+        <p:spPr/>
+        <p:txBody>
+          <a:bodyPr/>
+          <a:lstStyle/>
+          <a:p>
+            <a:fld id="{53965E5F-D71F-3A4D-B29B-79FB8E35708D}" type="datetime1">
+              <a:rPr lang="en-US" smtClean="0"/>
+              <a:t>10/8/26</a:t>
+            </a:fld>
+            <a:endParaRPr lang="en-US"/>
+          </a:p>
+        </p:txBody>
+      </p:sp>
+      <p:sp>
+        <p:nvSpPr>
+          <p:cNvPr id="5" name="Footer Placeholder 4">
+            <a:extLst>
+              <a:ext uri="{FF2B5EF4-FFF2-40B4-BE49-F238E27FC236}">
+                <a16:creationId xmlns:a16="http://schemas.microsoft.com/office/drawing/2014/main" id="{73CD771D-5496-51EE-5FA2-EC68BF347723}"/>
+              </a:ext>
+            </a:extLst>
+          </p:cNvPr>
+          <p:cNvSpPr>
+            <a:spLocks noGrp="1"/>
+          </p:cNvSpPr>
+          <p:nvPr>
+            <p:ph type="ftr" sz="quarter" idx="11"/>
+          </p:nvPr>
+        </p:nvSpPr>
+        <p:spPr/>
+        <p:txBody>
+          <a:bodyPr/>
+          <a:lstStyle/>
+          <a:p>
+            <a:r>
+              <a:rPr lang="en-US"/>
+              <a:t>© Steve Beaty and others as cited</a:t>
+            </a:r>
+          </a:p>
+        </p:txBody>
+      </p:sp>
+      <p:sp>
+        <p:nvSpPr>
+          <p:cNvPr id="6" name="Slide Number Placeholder 5">
+            <a:extLst>
+              <a:ext uri="{FF2B5EF4-FFF2-40B4-BE49-F238E27FC236}">
+                <a16:creationId xmlns:a16="http://schemas.microsoft.com/office/drawing/2014/main" id="{B29C3320-8845-3679-E203-E99554E81B85}"/>
+              </a:ext>
+            </a:extLst>
+          </p:cNvPr>
+          <p:cNvSpPr>
+            <a:spLocks noGrp="1"/>
+          </p:cNvSpPr>
+          <p:nvPr>
+            <p:ph type="sldNum" sz="quarter" idx="12"/>
+          </p:nvPr>
+        </p:nvSpPr>
+        <p:spPr/>
+        <p:txBody>
+          <a:bodyPr/>
+          <a:lstStyle/>
+          <a:p>
+            <a:fld id="{5CA8E750-09AF-F04A-AC61-93A8E70A6AD8}" type="slidenum">
+              <a:rPr lang="en-US" smtClean="0"/>
+              <a:t>10</a:t>
+            </a:fld>
+            <a:endParaRPr lang="en-US"/>
           </a:p>
         </p:txBody>
       </p:sp>
@@ -2967,12 +3295,12 @@
   </p:clrMapOvr>
   <mc:AlternateContent xmlns:mc="http://schemas.openxmlformats.org/markup-compatibility/2006" xmlns:p14="http://schemas.microsoft.com/office/powerpoint/2010/main">
     <mc:Choice Requires="p14">
-      <p:transition spd="slow" p14:dur="1200">
-        <p14:prism/>
+      <p:transition spd="slow" p14:dur="2000">
+        <p14:prism isContent="1"/>
       </p:transition>
     </mc:Choice>
     <mc:Fallback xmlns="">
-      <p:transition xmlns:p14="http://schemas.microsoft.com/office/powerpoint/2010/main" spd="slow">
+      <p:transition spd="slow">
         <p:fade/>
       </p:transition>
     </mc:Fallback>
@@ -3015,7 +3343,9 @@
         </p:nvSpPr>
         <p:spPr/>
         <p:txBody>
-          <a:bodyPr/>
+          <a:bodyPr>
+            <a:normAutofit fontScale="90000"/>
+          </a:bodyPr>
           <a:lstStyle/>
           <a:p>
             <a:r>
@@ -3044,7 +3374,7 @@
         <p:spPr/>
         <p:txBody>
           <a:bodyPr>
-            <a:normAutofit fontScale="92500" lnSpcReduction="20000"/>
+            <a:normAutofit fontScale="85000" lnSpcReduction="20000"/>
           </a:bodyPr>
           <a:lstStyle/>
           <a:p>
@@ -3070,6 +3400,92 @@
               <a:rPr lang="en-US" dirty="0"/>
               <a:t>Handling client/server state.</a:t>
             </a:r>
+          </a:p>
+        </p:txBody>
+      </p:sp>
+      <p:sp>
+        <p:nvSpPr>
+          <p:cNvPr id="4" name="Date Placeholder 3">
+            <a:extLst>
+              <a:ext uri="{FF2B5EF4-FFF2-40B4-BE49-F238E27FC236}">
+                <a16:creationId xmlns:a16="http://schemas.microsoft.com/office/drawing/2014/main" id="{4F8B5B30-AB77-CBFB-C58E-DDB1ED3FDD45}"/>
+              </a:ext>
+            </a:extLst>
+          </p:cNvPr>
+          <p:cNvSpPr>
+            <a:spLocks noGrp="1"/>
+          </p:cNvSpPr>
+          <p:nvPr>
+            <p:ph type="dt" sz="half" idx="10"/>
+          </p:nvPr>
+        </p:nvSpPr>
+        <p:spPr/>
+        <p:txBody>
+          <a:bodyPr/>
+          <a:lstStyle/>
+          <a:p>
+            <a:fld id="{763A12BE-C8CA-F544-B36E-8896C352A193}" type="datetime1">
+              <a:rPr lang="en-US" smtClean="0"/>
+              <a:t>10/8/26</a:t>
+            </a:fld>
+            <a:endParaRPr lang="en-US"/>
+          </a:p>
+        </p:txBody>
+      </p:sp>
+      <p:sp>
+        <p:nvSpPr>
+          <p:cNvPr id="5" name="Footer Placeholder 4">
+            <a:extLst>
+              <a:ext uri="{FF2B5EF4-FFF2-40B4-BE49-F238E27FC236}">
+                <a16:creationId xmlns:a16="http://schemas.microsoft.com/office/drawing/2014/main" id="{27341D6C-FAE1-F532-0773-659DC67FB1F1}"/>
+              </a:ext>
+            </a:extLst>
+          </p:cNvPr>
+          <p:cNvSpPr>
+            <a:spLocks noGrp="1"/>
+          </p:cNvSpPr>
+          <p:nvPr>
+            <p:ph type="ftr" sz="quarter" idx="11"/>
+          </p:nvPr>
+        </p:nvSpPr>
+        <p:spPr/>
+        <p:txBody>
+          <a:bodyPr/>
+          <a:lstStyle/>
+          <a:p>
+            <a:r>
+              <a:rPr lang="en-US"/>
+              <a:t>© Steve Beaty and others as cited</a:t>
+            </a:r>
+          </a:p>
+        </p:txBody>
+      </p:sp>
+      <p:sp>
+        <p:nvSpPr>
+          <p:cNvPr id="6" name="Slide Number Placeholder 5">
+            <a:extLst>
+              <a:ext uri="{FF2B5EF4-FFF2-40B4-BE49-F238E27FC236}">
+                <a16:creationId xmlns:a16="http://schemas.microsoft.com/office/drawing/2014/main" id="{E4B1EB98-27FA-961F-D88B-E4DF1CE1930D}"/>
+              </a:ext>
+            </a:extLst>
+          </p:cNvPr>
+          <p:cNvSpPr>
+            <a:spLocks noGrp="1"/>
+          </p:cNvSpPr>
+          <p:nvPr>
+            <p:ph type="sldNum" sz="quarter" idx="12"/>
+          </p:nvPr>
+        </p:nvSpPr>
+        <p:spPr/>
+        <p:txBody>
+          <a:bodyPr/>
+          <a:lstStyle/>
+          <a:p>
+            <a:fld id="{5CA8E750-09AF-F04A-AC61-93A8E70A6AD8}" type="slidenum">
+              <a:rPr lang="en-US" smtClean="0"/>
+              <a:t>11</a:t>
+            </a:fld>
+            <a:endParaRPr lang="en-US"/>
           </a:p>
         </p:txBody>
       </p:sp>
@@ -3085,12 +3501,12 @@
   </p:clrMapOvr>
   <mc:AlternateContent xmlns:mc="http://schemas.openxmlformats.org/markup-compatibility/2006" xmlns:p14="http://schemas.microsoft.com/office/powerpoint/2010/main">
     <mc:Choice Requires="p14">
-      <p:transition spd="slow" p14:dur="1200">
-        <p14:prism/>
+      <p:transition spd="slow" p14:dur="2000">
+        <p14:prism isContent="1"/>
       </p:transition>
     </mc:Choice>
     <mc:Fallback xmlns="">
-      <p:transition xmlns:p14="http://schemas.microsoft.com/office/powerpoint/2010/main" spd="slow">
+      <p:transition spd="slow">
         <p:fade/>
       </p:transition>
     </mc:Fallback>
@@ -3133,7 +3549,9 @@
         </p:nvSpPr>
         <p:spPr/>
         <p:txBody>
-          <a:bodyPr/>
+          <a:bodyPr>
+            <a:normAutofit fontScale="90000"/>
+          </a:bodyPr>
           <a:lstStyle/>
           <a:p>
             <a:r>
@@ -3161,7 +3579,9 @@
         </p:nvSpPr>
         <p:spPr/>
         <p:txBody>
-          <a:bodyPr/>
+          <a:bodyPr>
+            <a:normAutofit lnSpcReduction="10000"/>
+          </a:bodyPr>
           <a:lstStyle/>
           <a:p>
             <a:r>
@@ -3188,6 +3608,92 @@
               <a:rPr lang="en-US" dirty="0"/>
               <a:t>We’ll be looking at two: relational and non-relational</a:t>
             </a:r>
+          </a:p>
+        </p:txBody>
+      </p:sp>
+      <p:sp>
+        <p:nvSpPr>
+          <p:cNvPr id="4" name="Date Placeholder 3">
+            <a:extLst>
+              <a:ext uri="{FF2B5EF4-FFF2-40B4-BE49-F238E27FC236}">
+                <a16:creationId xmlns:a16="http://schemas.microsoft.com/office/drawing/2014/main" id="{2A460A9D-DFC9-C751-33F3-08E4714CD538}"/>
+              </a:ext>
+            </a:extLst>
+          </p:cNvPr>
+          <p:cNvSpPr>
+            <a:spLocks noGrp="1"/>
+          </p:cNvSpPr>
+          <p:nvPr>
+            <p:ph type="dt" sz="half" idx="10"/>
+          </p:nvPr>
+        </p:nvSpPr>
+        <p:spPr/>
+        <p:txBody>
+          <a:bodyPr/>
+          <a:lstStyle/>
+          <a:p>
+            <a:fld id="{1892A2D0-9403-E44D-AC5D-277128396AE1}" type="datetime1">
+              <a:rPr lang="en-US" smtClean="0"/>
+              <a:t>10/8/26</a:t>
+            </a:fld>
+            <a:endParaRPr lang="en-US"/>
+          </a:p>
+        </p:txBody>
+      </p:sp>
+      <p:sp>
+        <p:nvSpPr>
+          <p:cNvPr id="5" name="Footer Placeholder 4">
+            <a:extLst>
+              <a:ext uri="{FF2B5EF4-FFF2-40B4-BE49-F238E27FC236}">
+                <a16:creationId xmlns:a16="http://schemas.microsoft.com/office/drawing/2014/main" id="{0E429E9B-C38F-B1D9-D935-716A31531F3B}"/>
+              </a:ext>
+            </a:extLst>
+          </p:cNvPr>
+          <p:cNvSpPr>
+            <a:spLocks noGrp="1"/>
+          </p:cNvSpPr>
+          <p:nvPr>
+            <p:ph type="ftr" sz="quarter" idx="11"/>
+          </p:nvPr>
+        </p:nvSpPr>
+        <p:spPr/>
+        <p:txBody>
+          <a:bodyPr/>
+          <a:lstStyle/>
+          <a:p>
+            <a:r>
+              <a:rPr lang="en-US"/>
+              <a:t>© Steve Beaty and others as cited</a:t>
+            </a:r>
+          </a:p>
+        </p:txBody>
+      </p:sp>
+      <p:sp>
+        <p:nvSpPr>
+          <p:cNvPr id="6" name="Slide Number Placeholder 5">
+            <a:extLst>
+              <a:ext uri="{FF2B5EF4-FFF2-40B4-BE49-F238E27FC236}">
+                <a16:creationId xmlns:a16="http://schemas.microsoft.com/office/drawing/2014/main" id="{B261BE48-B2B7-B67F-70BB-1BA15AE08E06}"/>
+              </a:ext>
+            </a:extLst>
+          </p:cNvPr>
+          <p:cNvSpPr>
+            <a:spLocks noGrp="1"/>
+          </p:cNvSpPr>
+          <p:nvPr>
+            <p:ph type="sldNum" sz="quarter" idx="12"/>
+          </p:nvPr>
+        </p:nvSpPr>
+        <p:spPr/>
+        <p:txBody>
+          <a:bodyPr/>
+          <a:lstStyle/>
+          <a:p>
+            <a:fld id="{5CA8E750-09AF-F04A-AC61-93A8E70A6AD8}" type="slidenum">
+              <a:rPr lang="en-US" smtClean="0"/>
+              <a:t>12</a:t>
+            </a:fld>
+            <a:endParaRPr lang="en-US"/>
           </a:p>
         </p:txBody>
       </p:sp>
@@ -3203,12 +3709,12 @@
   </p:clrMapOvr>
   <mc:AlternateContent xmlns:mc="http://schemas.openxmlformats.org/markup-compatibility/2006" xmlns:p14="http://schemas.microsoft.com/office/powerpoint/2010/main">
     <mc:Choice Requires="p14">
-      <p:transition spd="slow" p14:dur="1200">
-        <p14:prism/>
+      <p:transition spd="slow" p14:dur="2000">
+        <p14:prism isContent="1"/>
       </p:transition>
     </mc:Choice>
     <mc:Fallback xmlns="">
-      <p:transition xmlns:p14="http://schemas.microsoft.com/office/powerpoint/2010/main" spd="slow">
+      <p:transition spd="slow">
         <p:fade/>
       </p:transition>
     </mc:Fallback>
@@ -3251,7 +3757,9 @@
         </p:nvSpPr>
         <p:spPr/>
         <p:txBody>
-          <a:bodyPr/>
+          <a:bodyPr>
+            <a:normAutofit fontScale="90000"/>
+          </a:bodyPr>
           <a:lstStyle/>
           <a:p>
             <a:r>
@@ -3311,6 +3819,92 @@
           </a:p>
           <a:p>
             <a:endParaRPr lang="en-US" dirty="0"/>
+          </a:p>
+        </p:txBody>
+      </p:sp>
+      <p:sp>
+        <p:nvSpPr>
+          <p:cNvPr id="4" name="Date Placeholder 3">
+            <a:extLst>
+              <a:ext uri="{FF2B5EF4-FFF2-40B4-BE49-F238E27FC236}">
+                <a16:creationId xmlns:a16="http://schemas.microsoft.com/office/drawing/2014/main" id="{03969575-E521-F3EB-94E8-DD5D692DE4FB}"/>
+              </a:ext>
+            </a:extLst>
+          </p:cNvPr>
+          <p:cNvSpPr>
+            <a:spLocks noGrp="1"/>
+          </p:cNvSpPr>
+          <p:nvPr>
+            <p:ph type="dt" sz="half" idx="10"/>
+          </p:nvPr>
+        </p:nvSpPr>
+        <p:spPr/>
+        <p:txBody>
+          <a:bodyPr/>
+          <a:lstStyle/>
+          <a:p>
+            <a:fld id="{E513A783-8A55-0B48-9C8C-D51478ABCCF4}" type="datetime1">
+              <a:rPr lang="en-US" smtClean="0"/>
+              <a:t>10/8/26</a:t>
+            </a:fld>
+            <a:endParaRPr lang="en-US"/>
+          </a:p>
+        </p:txBody>
+      </p:sp>
+      <p:sp>
+        <p:nvSpPr>
+          <p:cNvPr id="5" name="Footer Placeholder 4">
+            <a:extLst>
+              <a:ext uri="{FF2B5EF4-FFF2-40B4-BE49-F238E27FC236}">
+                <a16:creationId xmlns:a16="http://schemas.microsoft.com/office/drawing/2014/main" id="{76F39C1A-BF9F-62B8-8BAB-A122CE71802F}"/>
+              </a:ext>
+            </a:extLst>
+          </p:cNvPr>
+          <p:cNvSpPr>
+            <a:spLocks noGrp="1"/>
+          </p:cNvSpPr>
+          <p:nvPr>
+            <p:ph type="ftr" sz="quarter" idx="11"/>
+          </p:nvPr>
+        </p:nvSpPr>
+        <p:spPr/>
+        <p:txBody>
+          <a:bodyPr/>
+          <a:lstStyle/>
+          <a:p>
+            <a:r>
+              <a:rPr lang="en-US"/>
+              <a:t>© Steve Beaty and others as cited</a:t>
+            </a:r>
+          </a:p>
+        </p:txBody>
+      </p:sp>
+      <p:sp>
+        <p:nvSpPr>
+          <p:cNvPr id="6" name="Slide Number Placeholder 5">
+            <a:extLst>
+              <a:ext uri="{FF2B5EF4-FFF2-40B4-BE49-F238E27FC236}">
+                <a16:creationId xmlns:a16="http://schemas.microsoft.com/office/drawing/2014/main" id="{E1CCBA6F-D9B9-1B6E-8F63-C8AC30C92A37}"/>
+              </a:ext>
+            </a:extLst>
+          </p:cNvPr>
+          <p:cNvSpPr>
+            <a:spLocks noGrp="1"/>
+          </p:cNvSpPr>
+          <p:nvPr>
+            <p:ph type="sldNum" sz="quarter" idx="12"/>
+          </p:nvPr>
+        </p:nvSpPr>
+        <p:spPr/>
+        <p:txBody>
+          <a:bodyPr/>
+          <a:lstStyle/>
+          <a:p>
+            <a:fld id="{5CA8E750-09AF-F04A-AC61-93A8E70A6AD8}" type="slidenum">
+              <a:rPr lang="en-US" smtClean="0"/>
+              <a:t>13</a:t>
+            </a:fld>
+            <a:endParaRPr lang="en-US"/>
           </a:p>
         </p:txBody>
       </p:sp>
@@ -3326,12 +3920,12 @@
   </p:clrMapOvr>
   <mc:AlternateContent xmlns:mc="http://schemas.openxmlformats.org/markup-compatibility/2006" xmlns:p14="http://schemas.microsoft.com/office/powerpoint/2010/main">
     <mc:Choice Requires="p14">
-      <p:transition spd="slow" p14:dur="1200">
-        <p14:prism/>
+      <p:transition spd="slow" p14:dur="2000">
+        <p14:prism isContent="1"/>
       </p:transition>
     </mc:Choice>
     <mc:Fallback xmlns="">
-      <p:transition xmlns:p14="http://schemas.microsoft.com/office/powerpoint/2010/main" spd="slow">
+      <p:transition spd="slow">
         <p:fade/>
       </p:transition>
     </mc:Fallback>
@@ -3374,7 +3968,9 @@
         </p:nvSpPr>
         <p:spPr/>
         <p:txBody>
-          <a:bodyPr/>
+          <a:bodyPr>
+            <a:normAutofit fontScale="90000"/>
+          </a:bodyPr>
           <a:lstStyle/>
           <a:p>
             <a:r>
@@ -3436,6 +4032,92 @@
               <a:rPr lang="en-US" dirty="0"/>
               <a:t>The data types</a:t>
             </a:r>
+          </a:p>
+        </p:txBody>
+      </p:sp>
+      <p:sp>
+        <p:nvSpPr>
+          <p:cNvPr id="4" name="Date Placeholder 3">
+            <a:extLst>
+              <a:ext uri="{FF2B5EF4-FFF2-40B4-BE49-F238E27FC236}">
+                <a16:creationId xmlns:a16="http://schemas.microsoft.com/office/drawing/2014/main" id="{EB166376-B249-6F87-A43F-FB90123DCEF8}"/>
+              </a:ext>
+            </a:extLst>
+          </p:cNvPr>
+          <p:cNvSpPr>
+            <a:spLocks noGrp="1"/>
+          </p:cNvSpPr>
+          <p:nvPr>
+            <p:ph type="dt" sz="half" idx="10"/>
+          </p:nvPr>
+        </p:nvSpPr>
+        <p:spPr/>
+        <p:txBody>
+          <a:bodyPr/>
+          <a:lstStyle/>
+          <a:p>
+            <a:fld id="{D79B75F2-25AC-BD4B-BFE0-B1E971C90751}" type="datetime1">
+              <a:rPr lang="en-US" smtClean="0"/>
+              <a:t>10/8/26</a:t>
+            </a:fld>
+            <a:endParaRPr lang="en-US"/>
+          </a:p>
+        </p:txBody>
+      </p:sp>
+      <p:sp>
+        <p:nvSpPr>
+          <p:cNvPr id="5" name="Footer Placeholder 4">
+            <a:extLst>
+              <a:ext uri="{FF2B5EF4-FFF2-40B4-BE49-F238E27FC236}">
+                <a16:creationId xmlns:a16="http://schemas.microsoft.com/office/drawing/2014/main" id="{10AC4BB8-42DE-8F45-8171-57FA13D18D38}"/>
+              </a:ext>
+            </a:extLst>
+          </p:cNvPr>
+          <p:cNvSpPr>
+            <a:spLocks noGrp="1"/>
+          </p:cNvSpPr>
+          <p:nvPr>
+            <p:ph type="ftr" sz="quarter" idx="11"/>
+          </p:nvPr>
+        </p:nvSpPr>
+        <p:spPr/>
+        <p:txBody>
+          <a:bodyPr/>
+          <a:lstStyle/>
+          <a:p>
+            <a:r>
+              <a:rPr lang="en-US"/>
+              <a:t>© Steve Beaty and others as cited</a:t>
+            </a:r>
+          </a:p>
+        </p:txBody>
+      </p:sp>
+      <p:sp>
+        <p:nvSpPr>
+          <p:cNvPr id="6" name="Slide Number Placeholder 5">
+            <a:extLst>
+              <a:ext uri="{FF2B5EF4-FFF2-40B4-BE49-F238E27FC236}">
+                <a16:creationId xmlns:a16="http://schemas.microsoft.com/office/drawing/2014/main" id="{DEC614DD-720A-66D0-F22F-4C03854B09FE}"/>
+              </a:ext>
+            </a:extLst>
+          </p:cNvPr>
+          <p:cNvSpPr>
+            <a:spLocks noGrp="1"/>
+          </p:cNvSpPr>
+          <p:nvPr>
+            <p:ph type="sldNum" sz="quarter" idx="12"/>
+          </p:nvPr>
+        </p:nvSpPr>
+        <p:spPr/>
+        <p:txBody>
+          <a:bodyPr/>
+          <a:lstStyle/>
+          <a:p>
+            <a:fld id="{5CA8E750-09AF-F04A-AC61-93A8E70A6AD8}" type="slidenum">
+              <a:rPr lang="en-US" smtClean="0"/>
+              <a:t>14</a:t>
+            </a:fld>
+            <a:endParaRPr lang="en-US"/>
           </a:p>
         </p:txBody>
       </p:sp>
@@ -3451,12 +4133,12 @@
   </p:clrMapOvr>
   <mc:AlternateContent xmlns:mc="http://schemas.openxmlformats.org/markup-compatibility/2006" xmlns:p14="http://schemas.microsoft.com/office/powerpoint/2010/main">
     <mc:Choice Requires="p14">
-      <p:transition spd="slow" p14:dur="1200">
-        <p14:prism/>
+      <p:transition spd="slow" p14:dur="2000">
+        <p14:prism isContent="1"/>
       </p:transition>
     </mc:Choice>
     <mc:Fallback xmlns="">
-      <p:transition xmlns:p14="http://schemas.microsoft.com/office/powerpoint/2010/main" spd="slow">
+      <p:transition spd="slow">
         <p:fade/>
       </p:transition>
     </mc:Fallback>
@@ -3499,7 +4181,9 @@
         </p:nvSpPr>
         <p:spPr/>
         <p:txBody>
-          <a:bodyPr/>
+          <a:bodyPr>
+            <a:normAutofit fontScale="90000"/>
+          </a:bodyPr>
           <a:lstStyle/>
           <a:p>
             <a:r>
@@ -3528,7 +4212,7 @@
         <p:spPr/>
         <p:txBody>
           <a:bodyPr>
-            <a:normAutofit fontScale="92500" lnSpcReduction="10000"/>
+            <a:normAutofit fontScale="92500" lnSpcReduction="20000"/>
           </a:bodyPr>
           <a:lstStyle/>
           <a:p>
@@ -3576,6 +4260,92 @@
               <a:rPr lang="en-US" dirty="0"/>
               <a:t>Inner, outer, etc.</a:t>
             </a:r>
+          </a:p>
+        </p:txBody>
+      </p:sp>
+      <p:sp>
+        <p:nvSpPr>
+          <p:cNvPr id="4" name="Date Placeholder 3">
+            <a:extLst>
+              <a:ext uri="{FF2B5EF4-FFF2-40B4-BE49-F238E27FC236}">
+                <a16:creationId xmlns:a16="http://schemas.microsoft.com/office/drawing/2014/main" id="{5681A48D-ED2D-C7FA-06E5-4E3F29206DC5}"/>
+              </a:ext>
+            </a:extLst>
+          </p:cNvPr>
+          <p:cNvSpPr>
+            <a:spLocks noGrp="1"/>
+          </p:cNvSpPr>
+          <p:nvPr>
+            <p:ph type="dt" sz="half" idx="10"/>
+          </p:nvPr>
+        </p:nvSpPr>
+        <p:spPr/>
+        <p:txBody>
+          <a:bodyPr/>
+          <a:lstStyle/>
+          <a:p>
+            <a:fld id="{2CE8254E-0077-0A4C-BE1D-835E1CBD9AF3}" type="datetime1">
+              <a:rPr lang="en-US" smtClean="0"/>
+              <a:t>10/8/26</a:t>
+            </a:fld>
+            <a:endParaRPr lang="en-US"/>
+          </a:p>
+        </p:txBody>
+      </p:sp>
+      <p:sp>
+        <p:nvSpPr>
+          <p:cNvPr id="5" name="Footer Placeholder 4">
+            <a:extLst>
+              <a:ext uri="{FF2B5EF4-FFF2-40B4-BE49-F238E27FC236}">
+                <a16:creationId xmlns:a16="http://schemas.microsoft.com/office/drawing/2014/main" id="{58476778-2BBF-2EC5-E860-5D45AED93A51}"/>
+              </a:ext>
+            </a:extLst>
+          </p:cNvPr>
+          <p:cNvSpPr>
+            <a:spLocks noGrp="1"/>
+          </p:cNvSpPr>
+          <p:nvPr>
+            <p:ph type="ftr" sz="quarter" idx="11"/>
+          </p:nvPr>
+        </p:nvSpPr>
+        <p:spPr/>
+        <p:txBody>
+          <a:bodyPr/>
+          <a:lstStyle/>
+          <a:p>
+            <a:r>
+              <a:rPr lang="en-US"/>
+              <a:t>© Steve Beaty and others as cited</a:t>
+            </a:r>
+          </a:p>
+        </p:txBody>
+      </p:sp>
+      <p:sp>
+        <p:nvSpPr>
+          <p:cNvPr id="6" name="Slide Number Placeholder 5">
+            <a:extLst>
+              <a:ext uri="{FF2B5EF4-FFF2-40B4-BE49-F238E27FC236}">
+                <a16:creationId xmlns:a16="http://schemas.microsoft.com/office/drawing/2014/main" id="{15A86B68-BEEE-BB4E-1C18-55CEF99E16BD}"/>
+              </a:ext>
+            </a:extLst>
+          </p:cNvPr>
+          <p:cNvSpPr>
+            <a:spLocks noGrp="1"/>
+          </p:cNvSpPr>
+          <p:nvPr>
+            <p:ph type="sldNum" sz="quarter" idx="12"/>
+          </p:nvPr>
+        </p:nvSpPr>
+        <p:spPr/>
+        <p:txBody>
+          <a:bodyPr/>
+          <a:lstStyle/>
+          <a:p>
+            <a:fld id="{5CA8E750-09AF-F04A-AC61-93A8E70A6AD8}" type="slidenum">
+              <a:rPr lang="en-US" smtClean="0"/>
+              <a:t>15</a:t>
+            </a:fld>
+            <a:endParaRPr lang="en-US"/>
           </a:p>
         </p:txBody>
       </p:sp>
@@ -3591,12 +4361,12 @@
   </p:clrMapOvr>
   <mc:AlternateContent xmlns:mc="http://schemas.openxmlformats.org/markup-compatibility/2006" xmlns:p14="http://schemas.microsoft.com/office/powerpoint/2010/main">
     <mc:Choice Requires="p14">
-      <p:transition spd="slow" p14:dur="1200">
-        <p14:prism/>
+      <p:transition spd="slow" p14:dur="2000">
+        <p14:prism isContent="1"/>
       </p:transition>
     </mc:Choice>
     <mc:Fallback xmlns="">
-      <p:transition xmlns:p14="http://schemas.microsoft.com/office/powerpoint/2010/main" spd="slow">
+      <p:transition spd="slow">
         <p:fade/>
       </p:transition>
     </mc:Fallback>
@@ -3639,7 +4409,9 @@
         </p:nvSpPr>
         <p:spPr/>
         <p:txBody>
-          <a:bodyPr/>
+          <a:bodyPr>
+            <a:normAutofit fontScale="90000"/>
+          </a:bodyPr>
           <a:lstStyle/>
           <a:p>
             <a:r>
@@ -3692,6 +4464,92 @@
               <a:rPr lang="en-US" dirty="0"/>
               <a:t>Product</a:t>
             </a:r>
+          </a:p>
+        </p:txBody>
+      </p:sp>
+      <p:sp>
+        <p:nvSpPr>
+          <p:cNvPr id="4" name="Date Placeholder 3">
+            <a:extLst>
+              <a:ext uri="{FF2B5EF4-FFF2-40B4-BE49-F238E27FC236}">
+                <a16:creationId xmlns:a16="http://schemas.microsoft.com/office/drawing/2014/main" id="{712DF141-9D44-5040-058B-35E1C12DAF9E}"/>
+              </a:ext>
+            </a:extLst>
+          </p:cNvPr>
+          <p:cNvSpPr>
+            <a:spLocks noGrp="1"/>
+          </p:cNvSpPr>
+          <p:nvPr>
+            <p:ph type="dt" sz="half" idx="10"/>
+          </p:nvPr>
+        </p:nvSpPr>
+        <p:spPr/>
+        <p:txBody>
+          <a:bodyPr/>
+          <a:lstStyle/>
+          <a:p>
+            <a:fld id="{9DD7E799-9C2B-7746-96F3-C2B2492F5973}" type="datetime1">
+              <a:rPr lang="en-US" smtClean="0"/>
+              <a:t>10/8/26</a:t>
+            </a:fld>
+            <a:endParaRPr lang="en-US"/>
+          </a:p>
+        </p:txBody>
+      </p:sp>
+      <p:sp>
+        <p:nvSpPr>
+          <p:cNvPr id="5" name="Footer Placeholder 4">
+            <a:extLst>
+              <a:ext uri="{FF2B5EF4-FFF2-40B4-BE49-F238E27FC236}">
+                <a16:creationId xmlns:a16="http://schemas.microsoft.com/office/drawing/2014/main" id="{91025E29-AFDF-18F8-2AF4-28BBEA232077}"/>
+              </a:ext>
+            </a:extLst>
+          </p:cNvPr>
+          <p:cNvSpPr>
+            <a:spLocks noGrp="1"/>
+          </p:cNvSpPr>
+          <p:nvPr>
+            <p:ph type="ftr" sz="quarter" idx="11"/>
+          </p:nvPr>
+        </p:nvSpPr>
+        <p:spPr/>
+        <p:txBody>
+          <a:bodyPr/>
+          <a:lstStyle/>
+          <a:p>
+            <a:r>
+              <a:rPr lang="en-US"/>
+              <a:t>© Steve Beaty and others as cited</a:t>
+            </a:r>
+          </a:p>
+        </p:txBody>
+      </p:sp>
+      <p:sp>
+        <p:nvSpPr>
+          <p:cNvPr id="6" name="Slide Number Placeholder 5">
+            <a:extLst>
+              <a:ext uri="{FF2B5EF4-FFF2-40B4-BE49-F238E27FC236}">
+                <a16:creationId xmlns:a16="http://schemas.microsoft.com/office/drawing/2014/main" id="{86525115-7526-BD37-BA64-7F1B55897A0F}"/>
+              </a:ext>
+            </a:extLst>
+          </p:cNvPr>
+          <p:cNvSpPr>
+            <a:spLocks noGrp="1"/>
+          </p:cNvSpPr>
+          <p:nvPr>
+            <p:ph type="sldNum" sz="quarter" idx="12"/>
+          </p:nvPr>
+        </p:nvSpPr>
+        <p:spPr/>
+        <p:txBody>
+          <a:bodyPr/>
+          <a:lstStyle/>
+          <a:p>
+            <a:fld id="{5CA8E750-09AF-F04A-AC61-93A8E70A6AD8}" type="slidenum">
+              <a:rPr lang="en-US" smtClean="0"/>
+              <a:t>16</a:t>
+            </a:fld>
+            <a:endParaRPr lang="en-US"/>
           </a:p>
         </p:txBody>
       </p:sp>
@@ -3707,12 +4565,12 @@
   </p:clrMapOvr>
   <mc:AlternateContent xmlns:mc="http://schemas.openxmlformats.org/markup-compatibility/2006" xmlns:p14="http://schemas.microsoft.com/office/powerpoint/2010/main">
     <mc:Choice Requires="p14">
-      <p:transition spd="slow" p14:dur="1200">
-        <p14:prism/>
+      <p:transition spd="slow" p14:dur="2000">
+        <p14:prism isContent="1"/>
       </p:transition>
     </mc:Choice>
     <mc:Fallback xmlns="">
-      <p:transition xmlns:p14="http://schemas.microsoft.com/office/powerpoint/2010/main" spd="slow">
+      <p:transition spd="slow">
         <p:fade/>
       </p:transition>
     </mc:Fallback>
@@ -3755,7 +4613,9 @@
         </p:nvSpPr>
         <p:spPr/>
         <p:txBody>
-          <a:bodyPr/>
+          <a:bodyPr>
+            <a:normAutofit fontScale="90000"/>
+          </a:bodyPr>
           <a:lstStyle/>
           <a:p>
             <a:r>
@@ -3783,7 +4643,9 @@
         </p:nvSpPr>
         <p:spPr/>
         <p:txBody>
-          <a:bodyPr/>
+          <a:bodyPr>
+            <a:normAutofit lnSpcReduction="10000"/>
+          </a:bodyPr>
           <a:lstStyle/>
           <a:p>
             <a:r>
@@ -3809,6 +4671,92 @@
               <a:rPr lang="en-US" dirty="0"/>
               <a:t>Most DBs are considered normalized at third-normal</a:t>
             </a:r>
+          </a:p>
+        </p:txBody>
+      </p:sp>
+      <p:sp>
+        <p:nvSpPr>
+          <p:cNvPr id="4" name="Date Placeholder 3">
+            <a:extLst>
+              <a:ext uri="{FF2B5EF4-FFF2-40B4-BE49-F238E27FC236}">
+                <a16:creationId xmlns:a16="http://schemas.microsoft.com/office/drawing/2014/main" id="{3100C156-61F1-7469-6ABF-F8CFDAC38FB7}"/>
+              </a:ext>
+            </a:extLst>
+          </p:cNvPr>
+          <p:cNvSpPr>
+            <a:spLocks noGrp="1"/>
+          </p:cNvSpPr>
+          <p:nvPr>
+            <p:ph type="dt" sz="half" idx="10"/>
+          </p:nvPr>
+        </p:nvSpPr>
+        <p:spPr/>
+        <p:txBody>
+          <a:bodyPr/>
+          <a:lstStyle/>
+          <a:p>
+            <a:fld id="{66E10B65-43C0-6A46-B457-DB4C2C8521E9}" type="datetime1">
+              <a:rPr lang="en-US" smtClean="0"/>
+              <a:t>10/8/26</a:t>
+            </a:fld>
+            <a:endParaRPr lang="en-US"/>
+          </a:p>
+        </p:txBody>
+      </p:sp>
+      <p:sp>
+        <p:nvSpPr>
+          <p:cNvPr id="5" name="Footer Placeholder 4">
+            <a:extLst>
+              <a:ext uri="{FF2B5EF4-FFF2-40B4-BE49-F238E27FC236}">
+                <a16:creationId xmlns:a16="http://schemas.microsoft.com/office/drawing/2014/main" id="{04DFB23D-E6B0-979A-9F34-6840F7569BCC}"/>
+              </a:ext>
+            </a:extLst>
+          </p:cNvPr>
+          <p:cNvSpPr>
+            <a:spLocks noGrp="1"/>
+          </p:cNvSpPr>
+          <p:nvPr>
+            <p:ph type="ftr" sz="quarter" idx="11"/>
+          </p:nvPr>
+        </p:nvSpPr>
+        <p:spPr/>
+        <p:txBody>
+          <a:bodyPr/>
+          <a:lstStyle/>
+          <a:p>
+            <a:r>
+              <a:rPr lang="en-US"/>
+              <a:t>© Steve Beaty and others as cited</a:t>
+            </a:r>
+          </a:p>
+        </p:txBody>
+      </p:sp>
+      <p:sp>
+        <p:nvSpPr>
+          <p:cNvPr id="6" name="Slide Number Placeholder 5">
+            <a:extLst>
+              <a:ext uri="{FF2B5EF4-FFF2-40B4-BE49-F238E27FC236}">
+                <a16:creationId xmlns:a16="http://schemas.microsoft.com/office/drawing/2014/main" id="{65F081D7-AC44-2A28-6F5B-39904C3114A6}"/>
+              </a:ext>
+            </a:extLst>
+          </p:cNvPr>
+          <p:cNvSpPr>
+            <a:spLocks noGrp="1"/>
+          </p:cNvSpPr>
+          <p:nvPr>
+            <p:ph type="sldNum" sz="quarter" idx="12"/>
+          </p:nvPr>
+        </p:nvSpPr>
+        <p:spPr/>
+        <p:txBody>
+          <a:bodyPr/>
+          <a:lstStyle/>
+          <a:p>
+            <a:fld id="{5CA8E750-09AF-F04A-AC61-93A8E70A6AD8}" type="slidenum">
+              <a:rPr lang="en-US" smtClean="0"/>
+              <a:t>17</a:t>
+            </a:fld>
+            <a:endParaRPr lang="en-US"/>
           </a:p>
         </p:txBody>
       </p:sp>
@@ -3824,12 +4772,12 @@
   </p:clrMapOvr>
   <mc:AlternateContent xmlns:mc="http://schemas.openxmlformats.org/markup-compatibility/2006" xmlns:p14="http://schemas.microsoft.com/office/powerpoint/2010/main">
     <mc:Choice Requires="p14">
-      <p:transition spd="slow" p14:dur="1200">
-        <p14:prism/>
+      <p:transition spd="slow" p14:dur="2000">
+        <p14:prism isContent="1"/>
       </p:transition>
     </mc:Choice>
     <mc:Fallback xmlns="">
-      <p:transition xmlns:p14="http://schemas.microsoft.com/office/powerpoint/2010/main" spd="slow">
+      <p:transition spd="slow">
         <p:fade/>
       </p:transition>
     </mc:Fallback>
@@ -3872,7 +4820,9 @@
         </p:nvSpPr>
         <p:spPr/>
         <p:txBody>
-          <a:bodyPr/>
+          <a:bodyPr>
+            <a:normAutofit fontScale="90000"/>
+          </a:bodyPr>
           <a:lstStyle/>
           <a:p>
             <a:r>
@@ -3900,7 +4850,9 @@
         </p:nvSpPr>
         <p:spPr/>
         <p:txBody>
-          <a:bodyPr/>
+          <a:bodyPr>
+            <a:normAutofit lnSpcReduction="10000"/>
+          </a:bodyPr>
           <a:lstStyle/>
           <a:p>
             <a:r>
@@ -3931,6 +4883,92 @@
           <a:p>
             <a:pPr lvl="1"/>
             <a:endParaRPr lang="en-US" dirty="0"/>
+          </a:p>
+        </p:txBody>
+      </p:sp>
+      <p:sp>
+        <p:nvSpPr>
+          <p:cNvPr id="4" name="Date Placeholder 3">
+            <a:extLst>
+              <a:ext uri="{FF2B5EF4-FFF2-40B4-BE49-F238E27FC236}">
+                <a16:creationId xmlns:a16="http://schemas.microsoft.com/office/drawing/2014/main" id="{547CE933-2DF7-E19F-224C-C6ED04206D1C}"/>
+              </a:ext>
+            </a:extLst>
+          </p:cNvPr>
+          <p:cNvSpPr>
+            <a:spLocks noGrp="1"/>
+          </p:cNvSpPr>
+          <p:nvPr>
+            <p:ph type="dt" sz="half" idx="10"/>
+          </p:nvPr>
+        </p:nvSpPr>
+        <p:spPr/>
+        <p:txBody>
+          <a:bodyPr/>
+          <a:lstStyle/>
+          <a:p>
+            <a:fld id="{46074B1F-9C9C-0448-985C-71B332DDB1D3}" type="datetime1">
+              <a:rPr lang="en-US" smtClean="0"/>
+              <a:t>10/8/26</a:t>
+            </a:fld>
+            <a:endParaRPr lang="en-US"/>
+          </a:p>
+        </p:txBody>
+      </p:sp>
+      <p:sp>
+        <p:nvSpPr>
+          <p:cNvPr id="5" name="Footer Placeholder 4">
+            <a:extLst>
+              <a:ext uri="{FF2B5EF4-FFF2-40B4-BE49-F238E27FC236}">
+                <a16:creationId xmlns:a16="http://schemas.microsoft.com/office/drawing/2014/main" id="{EDBC55E9-3F80-F64A-1E06-3C923B2AC5CF}"/>
+              </a:ext>
+            </a:extLst>
+          </p:cNvPr>
+          <p:cNvSpPr>
+            <a:spLocks noGrp="1"/>
+          </p:cNvSpPr>
+          <p:nvPr>
+            <p:ph type="ftr" sz="quarter" idx="11"/>
+          </p:nvPr>
+        </p:nvSpPr>
+        <p:spPr/>
+        <p:txBody>
+          <a:bodyPr/>
+          <a:lstStyle/>
+          <a:p>
+            <a:r>
+              <a:rPr lang="en-US"/>
+              <a:t>© Steve Beaty and others as cited</a:t>
+            </a:r>
+          </a:p>
+        </p:txBody>
+      </p:sp>
+      <p:sp>
+        <p:nvSpPr>
+          <p:cNvPr id="6" name="Slide Number Placeholder 5">
+            <a:extLst>
+              <a:ext uri="{FF2B5EF4-FFF2-40B4-BE49-F238E27FC236}">
+                <a16:creationId xmlns:a16="http://schemas.microsoft.com/office/drawing/2014/main" id="{1395C754-5BAE-984D-2572-645C56B50952}"/>
+              </a:ext>
+            </a:extLst>
+          </p:cNvPr>
+          <p:cNvSpPr>
+            <a:spLocks noGrp="1"/>
+          </p:cNvSpPr>
+          <p:nvPr>
+            <p:ph type="sldNum" sz="quarter" idx="12"/>
+          </p:nvPr>
+        </p:nvSpPr>
+        <p:spPr/>
+        <p:txBody>
+          <a:bodyPr/>
+          <a:lstStyle/>
+          <a:p>
+            <a:fld id="{5CA8E750-09AF-F04A-AC61-93A8E70A6AD8}" type="slidenum">
+              <a:rPr lang="en-US" smtClean="0"/>
+              <a:t>18</a:t>
+            </a:fld>
+            <a:endParaRPr lang="en-US"/>
           </a:p>
         </p:txBody>
       </p:sp>
@@ -3946,12 +4984,12 @@
   </p:clrMapOvr>
   <mc:AlternateContent xmlns:mc="http://schemas.openxmlformats.org/markup-compatibility/2006" xmlns:p14="http://schemas.microsoft.com/office/powerpoint/2010/main">
     <mc:Choice Requires="p14">
-      <p:transition spd="slow" p14:dur="1200">
-        <p14:prism/>
+      <p:transition spd="slow" p14:dur="2000">
+        <p14:prism isContent="1"/>
       </p:transition>
     </mc:Choice>
     <mc:Fallback xmlns="">
-      <p:transition xmlns:p14="http://schemas.microsoft.com/office/powerpoint/2010/main" spd="slow">
+      <p:transition spd="slow">
         <p:fade/>
       </p:transition>
     </mc:Fallback>
@@ -3994,7 +5032,9 @@
         </p:nvSpPr>
         <p:spPr/>
         <p:txBody>
-          <a:bodyPr/>
+          <a:bodyPr>
+            <a:normAutofit fontScale="90000"/>
+          </a:bodyPr>
           <a:lstStyle/>
           <a:p>
             <a:r>
@@ -4029,6 +5069,92 @@
               <a:rPr lang="en-US" dirty="0"/>
               <a:t>Relational databases have schema to define the tables and types for the columns in those tables</a:t>
             </a:r>
+          </a:p>
+        </p:txBody>
+      </p:sp>
+      <p:sp>
+        <p:nvSpPr>
+          <p:cNvPr id="4" name="Date Placeholder 3">
+            <a:extLst>
+              <a:ext uri="{FF2B5EF4-FFF2-40B4-BE49-F238E27FC236}">
+                <a16:creationId xmlns:a16="http://schemas.microsoft.com/office/drawing/2014/main" id="{F66BD7C4-73CA-E5FA-B34E-84B88B804217}"/>
+              </a:ext>
+            </a:extLst>
+          </p:cNvPr>
+          <p:cNvSpPr>
+            <a:spLocks noGrp="1"/>
+          </p:cNvSpPr>
+          <p:nvPr>
+            <p:ph type="dt" sz="half" idx="10"/>
+          </p:nvPr>
+        </p:nvSpPr>
+        <p:spPr/>
+        <p:txBody>
+          <a:bodyPr/>
+          <a:lstStyle/>
+          <a:p>
+            <a:fld id="{3F92349D-5ABA-404A-B407-A87CA4034549}" type="datetime1">
+              <a:rPr lang="en-US" smtClean="0"/>
+              <a:t>10/8/26</a:t>
+            </a:fld>
+            <a:endParaRPr lang="en-US"/>
+          </a:p>
+        </p:txBody>
+      </p:sp>
+      <p:sp>
+        <p:nvSpPr>
+          <p:cNvPr id="5" name="Footer Placeholder 4">
+            <a:extLst>
+              <a:ext uri="{FF2B5EF4-FFF2-40B4-BE49-F238E27FC236}">
+                <a16:creationId xmlns:a16="http://schemas.microsoft.com/office/drawing/2014/main" id="{35C1C3CC-A711-CEFD-C903-152832FABAD6}"/>
+              </a:ext>
+            </a:extLst>
+          </p:cNvPr>
+          <p:cNvSpPr>
+            <a:spLocks noGrp="1"/>
+          </p:cNvSpPr>
+          <p:nvPr>
+            <p:ph type="ftr" sz="quarter" idx="11"/>
+          </p:nvPr>
+        </p:nvSpPr>
+        <p:spPr/>
+        <p:txBody>
+          <a:bodyPr/>
+          <a:lstStyle/>
+          <a:p>
+            <a:r>
+              <a:rPr lang="en-US"/>
+              <a:t>© Steve Beaty and others as cited</a:t>
+            </a:r>
+          </a:p>
+        </p:txBody>
+      </p:sp>
+      <p:sp>
+        <p:nvSpPr>
+          <p:cNvPr id="6" name="Slide Number Placeholder 5">
+            <a:extLst>
+              <a:ext uri="{FF2B5EF4-FFF2-40B4-BE49-F238E27FC236}">
+                <a16:creationId xmlns:a16="http://schemas.microsoft.com/office/drawing/2014/main" id="{A02BDF54-5B92-27CC-C56E-063465D8BB0C}"/>
+              </a:ext>
+            </a:extLst>
+          </p:cNvPr>
+          <p:cNvSpPr>
+            <a:spLocks noGrp="1"/>
+          </p:cNvSpPr>
+          <p:nvPr>
+            <p:ph type="sldNum" sz="quarter" idx="12"/>
+          </p:nvPr>
+        </p:nvSpPr>
+        <p:spPr/>
+        <p:txBody>
+          <a:bodyPr/>
+          <a:lstStyle/>
+          <a:p>
+            <a:fld id="{5CA8E750-09AF-F04A-AC61-93A8E70A6AD8}" type="slidenum">
+              <a:rPr lang="en-US" smtClean="0"/>
+              <a:t>19</a:t>
+            </a:fld>
+            <a:endParaRPr lang="en-US"/>
           </a:p>
         </p:txBody>
       </p:sp>
@@ -4044,12 +5170,12 @@
   </p:clrMapOvr>
   <mc:AlternateContent xmlns:mc="http://schemas.openxmlformats.org/markup-compatibility/2006" xmlns:p14="http://schemas.microsoft.com/office/powerpoint/2010/main">
     <mc:Choice Requires="p14">
-      <p:transition spd="slow" p14:dur="1200">
-        <p14:prism/>
+      <p:transition spd="slow" p14:dur="2000">
+        <p14:prism isContent="1"/>
       </p:transition>
     </mc:Choice>
     <mc:Fallback xmlns="">
-      <p:transition xmlns:p14="http://schemas.microsoft.com/office/powerpoint/2010/main" spd="slow">
+      <p:transition spd="slow">
         <p:fade/>
       </p:transition>
     </mc:Fallback>
@@ -4092,7 +5218,9 @@
         </p:nvSpPr>
         <p:spPr/>
         <p:txBody>
-          <a:bodyPr/>
+          <a:bodyPr>
+            <a:normAutofit fontScale="90000"/>
+          </a:bodyPr>
           <a:lstStyle/>
           <a:p>
             <a:r>
@@ -4139,6 +5267,92 @@
               <a:rPr lang="en-US" dirty="0"/>
               <a:t>The functions are of course algorithms</a:t>
             </a:r>
+          </a:p>
+        </p:txBody>
+      </p:sp>
+      <p:sp>
+        <p:nvSpPr>
+          <p:cNvPr id="4" name="Date Placeholder 3">
+            <a:extLst>
+              <a:ext uri="{FF2B5EF4-FFF2-40B4-BE49-F238E27FC236}">
+                <a16:creationId xmlns:a16="http://schemas.microsoft.com/office/drawing/2014/main" id="{66A04C9E-5844-0CE8-A6DE-3F206FE4F64A}"/>
+              </a:ext>
+            </a:extLst>
+          </p:cNvPr>
+          <p:cNvSpPr>
+            <a:spLocks noGrp="1"/>
+          </p:cNvSpPr>
+          <p:nvPr>
+            <p:ph type="dt" sz="half" idx="10"/>
+          </p:nvPr>
+        </p:nvSpPr>
+        <p:spPr/>
+        <p:txBody>
+          <a:bodyPr/>
+          <a:lstStyle/>
+          <a:p>
+            <a:fld id="{4A4C4242-54ED-1941-8A03-886E02B64F3C}" type="datetime1">
+              <a:rPr lang="en-US" smtClean="0"/>
+              <a:t>10/8/26</a:t>
+            </a:fld>
+            <a:endParaRPr lang="en-US"/>
+          </a:p>
+        </p:txBody>
+      </p:sp>
+      <p:sp>
+        <p:nvSpPr>
+          <p:cNvPr id="5" name="Footer Placeholder 4">
+            <a:extLst>
+              <a:ext uri="{FF2B5EF4-FFF2-40B4-BE49-F238E27FC236}">
+                <a16:creationId xmlns:a16="http://schemas.microsoft.com/office/drawing/2014/main" id="{381117C3-A809-4E49-C19D-26D36BBFF8EB}"/>
+              </a:ext>
+            </a:extLst>
+          </p:cNvPr>
+          <p:cNvSpPr>
+            <a:spLocks noGrp="1"/>
+          </p:cNvSpPr>
+          <p:nvPr>
+            <p:ph type="ftr" sz="quarter" idx="11"/>
+          </p:nvPr>
+        </p:nvSpPr>
+        <p:spPr/>
+        <p:txBody>
+          <a:bodyPr/>
+          <a:lstStyle/>
+          <a:p>
+            <a:r>
+              <a:rPr lang="en-US"/>
+              <a:t>© Steve Beaty and others as cited</a:t>
+            </a:r>
+          </a:p>
+        </p:txBody>
+      </p:sp>
+      <p:sp>
+        <p:nvSpPr>
+          <p:cNvPr id="6" name="Slide Number Placeholder 5">
+            <a:extLst>
+              <a:ext uri="{FF2B5EF4-FFF2-40B4-BE49-F238E27FC236}">
+                <a16:creationId xmlns:a16="http://schemas.microsoft.com/office/drawing/2014/main" id="{9BEA07F8-D12F-700A-C918-C7079E5761C5}"/>
+              </a:ext>
+            </a:extLst>
+          </p:cNvPr>
+          <p:cNvSpPr>
+            <a:spLocks noGrp="1"/>
+          </p:cNvSpPr>
+          <p:nvPr>
+            <p:ph type="sldNum" sz="quarter" idx="12"/>
+          </p:nvPr>
+        </p:nvSpPr>
+        <p:spPr/>
+        <p:txBody>
+          <a:bodyPr/>
+          <a:lstStyle/>
+          <a:p>
+            <a:fld id="{5CA8E750-09AF-F04A-AC61-93A8E70A6AD8}" type="slidenum">
+              <a:rPr lang="en-US" smtClean="0"/>
+              <a:t>2</a:t>
+            </a:fld>
+            <a:endParaRPr lang="en-US"/>
           </a:p>
         </p:txBody>
       </p:sp>
@@ -4154,12 +5368,12 @@
   </p:clrMapOvr>
   <mc:AlternateContent xmlns:mc="http://schemas.openxmlformats.org/markup-compatibility/2006" xmlns:p14="http://schemas.microsoft.com/office/powerpoint/2010/main">
     <mc:Choice Requires="p14">
-      <p:transition spd="slow" p14:dur="1200">
-        <p14:prism/>
+      <p:transition spd="slow" p14:dur="2000">
+        <p14:prism isContent="1"/>
       </p:transition>
     </mc:Choice>
     <mc:Fallback xmlns="">
-      <p:transition xmlns:p14="http://schemas.microsoft.com/office/powerpoint/2010/main" spd="slow">
+      <p:transition spd="slow">
         <p:fade/>
       </p:transition>
     </mc:Fallback>
@@ -4202,7 +5416,9 @@
         </p:nvSpPr>
         <p:spPr/>
         <p:txBody>
-          <a:bodyPr/>
+          <a:bodyPr>
+            <a:normAutofit fontScale="90000"/>
+          </a:bodyPr>
           <a:lstStyle/>
           <a:p>
             <a:r>
@@ -4253,6 +5469,92 @@
               <a:rPr lang="en-US" dirty="0"/>
               <a:t>" datetime(6) NOT NULL);</a:t>
             </a:r>
+          </a:p>
+        </p:txBody>
+      </p:sp>
+      <p:sp>
+        <p:nvSpPr>
+          <p:cNvPr id="4" name="Date Placeholder 3">
+            <a:extLst>
+              <a:ext uri="{FF2B5EF4-FFF2-40B4-BE49-F238E27FC236}">
+                <a16:creationId xmlns:a16="http://schemas.microsoft.com/office/drawing/2014/main" id="{5D9EDEF9-E412-68D1-64D7-2D5117C05B08}"/>
+              </a:ext>
+            </a:extLst>
+          </p:cNvPr>
+          <p:cNvSpPr>
+            <a:spLocks noGrp="1"/>
+          </p:cNvSpPr>
+          <p:nvPr>
+            <p:ph type="dt" sz="half" idx="10"/>
+          </p:nvPr>
+        </p:nvSpPr>
+        <p:spPr/>
+        <p:txBody>
+          <a:bodyPr/>
+          <a:lstStyle/>
+          <a:p>
+            <a:fld id="{D1C94E0C-7F8B-BA45-8C13-490B61851DCF}" type="datetime1">
+              <a:rPr lang="en-US" smtClean="0"/>
+              <a:t>10/8/26</a:t>
+            </a:fld>
+            <a:endParaRPr lang="en-US"/>
+          </a:p>
+        </p:txBody>
+      </p:sp>
+      <p:sp>
+        <p:nvSpPr>
+          <p:cNvPr id="5" name="Footer Placeholder 4">
+            <a:extLst>
+              <a:ext uri="{FF2B5EF4-FFF2-40B4-BE49-F238E27FC236}">
+                <a16:creationId xmlns:a16="http://schemas.microsoft.com/office/drawing/2014/main" id="{374FF337-3CDF-69F1-C9F7-EADE2CD6DCB1}"/>
+              </a:ext>
+            </a:extLst>
+          </p:cNvPr>
+          <p:cNvSpPr>
+            <a:spLocks noGrp="1"/>
+          </p:cNvSpPr>
+          <p:nvPr>
+            <p:ph type="ftr" sz="quarter" idx="11"/>
+          </p:nvPr>
+        </p:nvSpPr>
+        <p:spPr/>
+        <p:txBody>
+          <a:bodyPr/>
+          <a:lstStyle/>
+          <a:p>
+            <a:r>
+              <a:rPr lang="en-US"/>
+              <a:t>© Steve Beaty and others as cited</a:t>
+            </a:r>
+          </a:p>
+        </p:txBody>
+      </p:sp>
+      <p:sp>
+        <p:nvSpPr>
+          <p:cNvPr id="6" name="Slide Number Placeholder 5">
+            <a:extLst>
+              <a:ext uri="{FF2B5EF4-FFF2-40B4-BE49-F238E27FC236}">
+                <a16:creationId xmlns:a16="http://schemas.microsoft.com/office/drawing/2014/main" id="{8B27D9D0-EC8B-32E2-8F06-8220A6B35F01}"/>
+              </a:ext>
+            </a:extLst>
+          </p:cNvPr>
+          <p:cNvSpPr>
+            <a:spLocks noGrp="1"/>
+          </p:cNvSpPr>
+          <p:nvPr>
+            <p:ph type="sldNum" sz="quarter" idx="12"/>
+          </p:nvPr>
+        </p:nvSpPr>
+        <p:spPr/>
+        <p:txBody>
+          <a:bodyPr/>
+          <a:lstStyle/>
+          <a:p>
+            <a:fld id="{5CA8E750-09AF-F04A-AC61-93A8E70A6AD8}" type="slidenum">
+              <a:rPr lang="en-US" smtClean="0"/>
+              <a:t>20</a:t>
+            </a:fld>
+            <a:endParaRPr lang="en-US"/>
           </a:p>
         </p:txBody>
       </p:sp>
@@ -4316,7 +5618,9 @@
         </p:nvSpPr>
         <p:spPr/>
         <p:txBody>
-          <a:bodyPr/>
+          <a:bodyPr>
+            <a:normAutofit fontScale="90000"/>
+          </a:bodyPr>
           <a:lstStyle/>
           <a:p>
             <a:r>
@@ -4344,7 +5648,9 @@
         </p:nvSpPr>
         <p:spPr/>
         <p:txBody>
-          <a:bodyPr/>
+          <a:bodyPr>
+            <a:normAutofit lnSpcReduction="10000"/>
+          </a:bodyPr>
           <a:lstStyle/>
           <a:p>
             <a:r>
@@ -4369,6 +5675,92 @@
               <a:rPr lang="en-US" dirty="0"/>
               <a:t>Built into most operating systems</a:t>
             </a:r>
+          </a:p>
+        </p:txBody>
+      </p:sp>
+      <p:sp>
+        <p:nvSpPr>
+          <p:cNvPr id="4" name="Date Placeholder 3">
+            <a:extLst>
+              <a:ext uri="{FF2B5EF4-FFF2-40B4-BE49-F238E27FC236}">
+                <a16:creationId xmlns:a16="http://schemas.microsoft.com/office/drawing/2014/main" id="{DE94FE3C-4220-7C5B-230D-0C27703D8274}"/>
+              </a:ext>
+            </a:extLst>
+          </p:cNvPr>
+          <p:cNvSpPr>
+            <a:spLocks noGrp="1"/>
+          </p:cNvSpPr>
+          <p:nvPr>
+            <p:ph type="dt" sz="half" idx="10"/>
+          </p:nvPr>
+        </p:nvSpPr>
+        <p:spPr/>
+        <p:txBody>
+          <a:bodyPr/>
+          <a:lstStyle/>
+          <a:p>
+            <a:fld id="{C1D102AA-C3EF-8243-991E-7D08B4552CF5}" type="datetime1">
+              <a:rPr lang="en-US" smtClean="0"/>
+              <a:t>10/8/26</a:t>
+            </a:fld>
+            <a:endParaRPr lang="en-US"/>
+          </a:p>
+        </p:txBody>
+      </p:sp>
+      <p:sp>
+        <p:nvSpPr>
+          <p:cNvPr id="5" name="Footer Placeholder 4">
+            <a:extLst>
+              <a:ext uri="{FF2B5EF4-FFF2-40B4-BE49-F238E27FC236}">
+                <a16:creationId xmlns:a16="http://schemas.microsoft.com/office/drawing/2014/main" id="{74C5E8DE-0BE8-6E25-6B2B-7A5138CCD95C}"/>
+              </a:ext>
+            </a:extLst>
+          </p:cNvPr>
+          <p:cNvSpPr>
+            <a:spLocks noGrp="1"/>
+          </p:cNvSpPr>
+          <p:nvPr>
+            <p:ph type="ftr" sz="quarter" idx="11"/>
+          </p:nvPr>
+        </p:nvSpPr>
+        <p:spPr/>
+        <p:txBody>
+          <a:bodyPr/>
+          <a:lstStyle/>
+          <a:p>
+            <a:r>
+              <a:rPr lang="en-US"/>
+              <a:t>© Steve Beaty and others as cited</a:t>
+            </a:r>
+          </a:p>
+        </p:txBody>
+      </p:sp>
+      <p:sp>
+        <p:nvSpPr>
+          <p:cNvPr id="6" name="Slide Number Placeholder 5">
+            <a:extLst>
+              <a:ext uri="{FF2B5EF4-FFF2-40B4-BE49-F238E27FC236}">
+                <a16:creationId xmlns:a16="http://schemas.microsoft.com/office/drawing/2014/main" id="{3BBC85AC-474C-6338-5149-6E124B4F2C5F}"/>
+              </a:ext>
+            </a:extLst>
+          </p:cNvPr>
+          <p:cNvSpPr>
+            <a:spLocks noGrp="1"/>
+          </p:cNvSpPr>
+          <p:nvPr>
+            <p:ph type="sldNum" sz="quarter" idx="12"/>
+          </p:nvPr>
+        </p:nvSpPr>
+        <p:spPr/>
+        <p:txBody>
+          <a:bodyPr/>
+          <a:lstStyle/>
+          <a:p>
+            <a:fld id="{5CA8E750-09AF-F04A-AC61-93A8E70A6AD8}" type="slidenum">
+              <a:rPr lang="en-US" smtClean="0"/>
+              <a:t>21</a:t>
+            </a:fld>
+            <a:endParaRPr lang="en-US"/>
           </a:p>
         </p:txBody>
       </p:sp>
@@ -4384,12 +5776,12 @@
   </p:clrMapOvr>
   <mc:AlternateContent xmlns:mc="http://schemas.openxmlformats.org/markup-compatibility/2006" xmlns:p14="http://schemas.microsoft.com/office/powerpoint/2010/main">
     <mc:Choice Requires="p14">
-      <p:transition spd="slow" p14:dur="1200">
-        <p14:prism/>
+      <p:transition spd="slow" p14:dur="2000">
+        <p14:prism isContent="1"/>
       </p:transition>
     </mc:Choice>
     <mc:Fallback xmlns="">
-      <p:transition xmlns:p14="http://schemas.microsoft.com/office/powerpoint/2010/main" spd="slow">
+      <p:transition spd="slow">
         <p:fade/>
       </p:transition>
     </mc:Fallback>
@@ -4432,7 +5824,9 @@
         </p:nvSpPr>
         <p:spPr/>
         <p:txBody>
-          <a:bodyPr/>
+          <a:bodyPr>
+            <a:normAutofit fontScale="90000"/>
+          </a:bodyPr>
           <a:lstStyle/>
           <a:p>
             <a:r>
@@ -4475,6 +5869,92 @@
               <a:rPr lang="en-US" dirty="0"/>
               <a:t>/development.sqlite3 .dump</a:t>
             </a:r>
+          </a:p>
+        </p:txBody>
+      </p:sp>
+      <p:sp>
+        <p:nvSpPr>
+          <p:cNvPr id="4" name="Date Placeholder 3">
+            <a:extLst>
+              <a:ext uri="{FF2B5EF4-FFF2-40B4-BE49-F238E27FC236}">
+                <a16:creationId xmlns:a16="http://schemas.microsoft.com/office/drawing/2014/main" id="{E5F342FA-E16E-D1B2-7FF7-5A092B3C204E}"/>
+              </a:ext>
+            </a:extLst>
+          </p:cNvPr>
+          <p:cNvSpPr>
+            <a:spLocks noGrp="1"/>
+          </p:cNvSpPr>
+          <p:nvPr>
+            <p:ph type="dt" sz="half" idx="10"/>
+          </p:nvPr>
+        </p:nvSpPr>
+        <p:spPr/>
+        <p:txBody>
+          <a:bodyPr/>
+          <a:lstStyle/>
+          <a:p>
+            <a:fld id="{5BAB0819-CEE1-024F-88FB-FFF8D19406AF}" type="datetime1">
+              <a:rPr lang="en-US" smtClean="0"/>
+              <a:t>10/8/26</a:t>
+            </a:fld>
+            <a:endParaRPr lang="en-US"/>
+          </a:p>
+        </p:txBody>
+      </p:sp>
+      <p:sp>
+        <p:nvSpPr>
+          <p:cNvPr id="5" name="Footer Placeholder 4">
+            <a:extLst>
+              <a:ext uri="{FF2B5EF4-FFF2-40B4-BE49-F238E27FC236}">
+                <a16:creationId xmlns:a16="http://schemas.microsoft.com/office/drawing/2014/main" id="{9839B563-1F20-BBBF-7FFD-451F067144F4}"/>
+              </a:ext>
+            </a:extLst>
+          </p:cNvPr>
+          <p:cNvSpPr>
+            <a:spLocks noGrp="1"/>
+          </p:cNvSpPr>
+          <p:nvPr>
+            <p:ph type="ftr" sz="quarter" idx="11"/>
+          </p:nvPr>
+        </p:nvSpPr>
+        <p:spPr/>
+        <p:txBody>
+          <a:bodyPr/>
+          <a:lstStyle/>
+          <a:p>
+            <a:r>
+              <a:rPr lang="en-US"/>
+              <a:t>© Steve Beaty and others as cited</a:t>
+            </a:r>
+          </a:p>
+        </p:txBody>
+      </p:sp>
+      <p:sp>
+        <p:nvSpPr>
+          <p:cNvPr id="6" name="Slide Number Placeholder 5">
+            <a:extLst>
+              <a:ext uri="{FF2B5EF4-FFF2-40B4-BE49-F238E27FC236}">
+                <a16:creationId xmlns:a16="http://schemas.microsoft.com/office/drawing/2014/main" id="{4F4C51E4-11D1-9061-439D-B8107BC63300}"/>
+              </a:ext>
+            </a:extLst>
+          </p:cNvPr>
+          <p:cNvSpPr>
+            <a:spLocks noGrp="1"/>
+          </p:cNvSpPr>
+          <p:nvPr>
+            <p:ph type="sldNum" sz="quarter" idx="12"/>
+          </p:nvPr>
+        </p:nvSpPr>
+        <p:spPr/>
+        <p:txBody>
+          <a:bodyPr/>
+          <a:lstStyle/>
+          <a:p>
+            <a:fld id="{5CA8E750-09AF-F04A-AC61-93A8E70A6AD8}" type="slidenum">
+              <a:rPr lang="en-US" smtClean="0"/>
+              <a:t>22</a:t>
+            </a:fld>
+            <a:endParaRPr lang="en-US"/>
           </a:p>
         </p:txBody>
       </p:sp>
@@ -4538,7 +6018,9 @@
         </p:nvSpPr>
         <p:spPr/>
         <p:txBody>
-          <a:bodyPr/>
+          <a:bodyPr>
+            <a:normAutofit fontScale="90000"/>
+          </a:bodyPr>
           <a:lstStyle/>
           <a:p>
             <a:r>
@@ -4576,6 +6058,92 @@
               <a:t>https://sqlitebrowser.org/</a:t>
             </a:r>
             <a:endParaRPr lang="en-US" dirty="0"/>
+          </a:p>
+        </p:txBody>
+      </p:sp>
+      <p:sp>
+        <p:nvSpPr>
+          <p:cNvPr id="3" name="Date Placeholder 2">
+            <a:extLst>
+              <a:ext uri="{FF2B5EF4-FFF2-40B4-BE49-F238E27FC236}">
+                <a16:creationId xmlns:a16="http://schemas.microsoft.com/office/drawing/2014/main" id="{8C403BDD-AB3B-04AF-7F44-558998B51077}"/>
+              </a:ext>
+            </a:extLst>
+          </p:cNvPr>
+          <p:cNvSpPr>
+            <a:spLocks noGrp="1"/>
+          </p:cNvSpPr>
+          <p:nvPr>
+            <p:ph type="dt" sz="half" idx="10"/>
+          </p:nvPr>
+        </p:nvSpPr>
+        <p:spPr/>
+        <p:txBody>
+          <a:bodyPr/>
+          <a:lstStyle/>
+          <a:p>
+            <a:fld id="{5476C6F4-F06D-104E-8494-AB3DA8A8771F}" type="datetime1">
+              <a:rPr lang="en-US" smtClean="0"/>
+              <a:t>10/8/26</a:t>
+            </a:fld>
+            <a:endParaRPr lang="en-US"/>
+          </a:p>
+        </p:txBody>
+      </p:sp>
+      <p:sp>
+        <p:nvSpPr>
+          <p:cNvPr id="5" name="Footer Placeholder 4">
+            <a:extLst>
+              <a:ext uri="{FF2B5EF4-FFF2-40B4-BE49-F238E27FC236}">
+                <a16:creationId xmlns:a16="http://schemas.microsoft.com/office/drawing/2014/main" id="{DE0FC7DB-B87A-2997-BDDA-6E32EFE576D0}"/>
+              </a:ext>
+            </a:extLst>
+          </p:cNvPr>
+          <p:cNvSpPr>
+            <a:spLocks noGrp="1"/>
+          </p:cNvSpPr>
+          <p:nvPr>
+            <p:ph type="ftr" sz="quarter" idx="11"/>
+          </p:nvPr>
+        </p:nvSpPr>
+        <p:spPr/>
+        <p:txBody>
+          <a:bodyPr/>
+          <a:lstStyle/>
+          <a:p>
+            <a:r>
+              <a:rPr lang="en-US"/>
+              <a:t>© Steve Beaty and others as cited</a:t>
+            </a:r>
+          </a:p>
+        </p:txBody>
+      </p:sp>
+      <p:sp>
+        <p:nvSpPr>
+          <p:cNvPr id="6" name="Slide Number Placeholder 5">
+            <a:extLst>
+              <a:ext uri="{FF2B5EF4-FFF2-40B4-BE49-F238E27FC236}">
+                <a16:creationId xmlns:a16="http://schemas.microsoft.com/office/drawing/2014/main" id="{B044D36B-800E-CAA4-3093-030861987B16}"/>
+              </a:ext>
+            </a:extLst>
+          </p:cNvPr>
+          <p:cNvSpPr>
+            <a:spLocks noGrp="1"/>
+          </p:cNvSpPr>
+          <p:nvPr>
+            <p:ph type="sldNum" sz="quarter" idx="12"/>
+          </p:nvPr>
+        </p:nvSpPr>
+        <p:spPr/>
+        <p:txBody>
+          <a:bodyPr/>
+          <a:lstStyle/>
+          <a:p>
+            <a:fld id="{5CA8E750-09AF-F04A-AC61-93A8E70A6AD8}" type="slidenum">
+              <a:rPr lang="en-US" smtClean="0"/>
+              <a:t>23</a:t>
+            </a:fld>
+            <a:endParaRPr lang="en-US"/>
           </a:p>
         </p:txBody>
       </p:sp>
@@ -4591,12 +6159,12 @@
   </p:clrMapOvr>
   <mc:AlternateContent xmlns:mc="http://schemas.openxmlformats.org/markup-compatibility/2006" xmlns:p14="http://schemas.microsoft.com/office/powerpoint/2010/main">
     <mc:Choice Requires="p14">
-      <p:transition spd="slow" p14:dur="1200">
-        <p14:prism/>
+      <p:transition spd="slow" p14:dur="2000">
+        <p14:prism isContent="1"/>
       </p:transition>
     </mc:Choice>
     <mc:Fallback xmlns="">
-      <p:transition xmlns:p14="http://schemas.microsoft.com/office/powerpoint/2010/main" spd="slow">
+      <p:transition spd="slow">
         <p:fade/>
       </p:transition>
     </mc:Fallback>
@@ -4639,7 +6207,9 @@
         </p:nvSpPr>
         <p:spPr/>
         <p:txBody>
-          <a:bodyPr/>
+          <a:bodyPr>
+            <a:normAutofit fontScale="90000"/>
+          </a:bodyPr>
           <a:lstStyle/>
           <a:p>
             <a:r>
@@ -4693,6 +6263,92 @@
               <a:rPr lang="en-US" dirty="0"/>
               <a:t>Rails’ default ORM is called Active Record</a:t>
             </a:r>
+          </a:p>
+        </p:txBody>
+      </p:sp>
+      <p:sp>
+        <p:nvSpPr>
+          <p:cNvPr id="4" name="Date Placeholder 3">
+            <a:extLst>
+              <a:ext uri="{FF2B5EF4-FFF2-40B4-BE49-F238E27FC236}">
+                <a16:creationId xmlns:a16="http://schemas.microsoft.com/office/drawing/2014/main" id="{69D01F23-B995-583F-A3D0-3E55AB31A0F2}"/>
+              </a:ext>
+            </a:extLst>
+          </p:cNvPr>
+          <p:cNvSpPr>
+            <a:spLocks noGrp="1"/>
+          </p:cNvSpPr>
+          <p:nvPr>
+            <p:ph type="dt" sz="half" idx="10"/>
+          </p:nvPr>
+        </p:nvSpPr>
+        <p:spPr/>
+        <p:txBody>
+          <a:bodyPr/>
+          <a:lstStyle/>
+          <a:p>
+            <a:fld id="{2841D8A3-CB4E-164E-ADBB-3C248FBBB961}" type="datetime1">
+              <a:rPr lang="en-US" smtClean="0"/>
+              <a:t>10/8/26</a:t>
+            </a:fld>
+            <a:endParaRPr lang="en-US"/>
+          </a:p>
+        </p:txBody>
+      </p:sp>
+      <p:sp>
+        <p:nvSpPr>
+          <p:cNvPr id="5" name="Footer Placeholder 4">
+            <a:extLst>
+              <a:ext uri="{FF2B5EF4-FFF2-40B4-BE49-F238E27FC236}">
+                <a16:creationId xmlns:a16="http://schemas.microsoft.com/office/drawing/2014/main" id="{79831860-4895-5956-8F0A-0DC7C6C355D8}"/>
+              </a:ext>
+            </a:extLst>
+          </p:cNvPr>
+          <p:cNvSpPr>
+            <a:spLocks noGrp="1"/>
+          </p:cNvSpPr>
+          <p:nvPr>
+            <p:ph type="ftr" sz="quarter" idx="11"/>
+          </p:nvPr>
+        </p:nvSpPr>
+        <p:spPr/>
+        <p:txBody>
+          <a:bodyPr/>
+          <a:lstStyle/>
+          <a:p>
+            <a:r>
+              <a:rPr lang="en-US"/>
+              <a:t>© Steve Beaty and others as cited</a:t>
+            </a:r>
+          </a:p>
+        </p:txBody>
+      </p:sp>
+      <p:sp>
+        <p:nvSpPr>
+          <p:cNvPr id="6" name="Slide Number Placeholder 5">
+            <a:extLst>
+              <a:ext uri="{FF2B5EF4-FFF2-40B4-BE49-F238E27FC236}">
+                <a16:creationId xmlns:a16="http://schemas.microsoft.com/office/drawing/2014/main" id="{1666FA59-5CEE-8471-D002-7B19B48F6858}"/>
+              </a:ext>
+            </a:extLst>
+          </p:cNvPr>
+          <p:cNvSpPr>
+            <a:spLocks noGrp="1"/>
+          </p:cNvSpPr>
+          <p:nvPr>
+            <p:ph type="sldNum" sz="quarter" idx="12"/>
+          </p:nvPr>
+        </p:nvSpPr>
+        <p:spPr/>
+        <p:txBody>
+          <a:bodyPr/>
+          <a:lstStyle/>
+          <a:p>
+            <a:fld id="{5CA8E750-09AF-F04A-AC61-93A8E70A6AD8}" type="slidenum">
+              <a:rPr lang="en-US" smtClean="0"/>
+              <a:t>24</a:t>
+            </a:fld>
+            <a:endParaRPr lang="en-US"/>
           </a:p>
         </p:txBody>
       </p:sp>
@@ -4708,12 +6364,12 @@
   </p:clrMapOvr>
   <mc:AlternateContent xmlns:mc="http://schemas.openxmlformats.org/markup-compatibility/2006" xmlns:p14="http://schemas.microsoft.com/office/powerpoint/2010/main">
     <mc:Choice Requires="p14">
-      <p:transition spd="slow" p14:dur="1200">
-        <p14:prism/>
+      <p:transition spd="slow" p14:dur="2000">
+        <p14:prism isContent="1"/>
       </p:transition>
     </mc:Choice>
     <mc:Fallback xmlns="">
-      <p:transition xmlns:p14="http://schemas.microsoft.com/office/powerpoint/2010/main" spd="slow">
+      <p:transition spd="slow">
         <p:fade/>
       </p:transition>
     </mc:Fallback>
@@ -4756,7 +6412,9 @@
         </p:nvSpPr>
         <p:spPr/>
         <p:txBody>
-          <a:bodyPr/>
+          <a:bodyPr>
+            <a:normAutofit fontScale="90000"/>
+          </a:bodyPr>
           <a:lstStyle/>
           <a:p>
             <a:r>
@@ -4789,7 +6447,7 @@
         </p:nvGraphicFramePr>
         <p:xfrm>
           <a:off x="609600" y="1600200"/>
-          <a:ext cx="10972800" cy="2286000"/>
+          <a:ext cx="10972800" cy="4525963"/>
         </p:xfrm>
         <a:graphic>
           <a:graphicData uri="http://schemas.openxmlformats.org/drawingml/2006/table">
@@ -4982,6 +6640,92 @@
           </a:graphicData>
         </a:graphic>
       </p:graphicFrame>
+      <p:sp>
+        <p:nvSpPr>
+          <p:cNvPr id="3" name="Date Placeholder 2">
+            <a:extLst>
+              <a:ext uri="{FF2B5EF4-FFF2-40B4-BE49-F238E27FC236}">
+                <a16:creationId xmlns:a16="http://schemas.microsoft.com/office/drawing/2014/main" id="{A61A2B7A-8F06-9D69-4C08-B6406DE03451}"/>
+              </a:ext>
+            </a:extLst>
+          </p:cNvPr>
+          <p:cNvSpPr>
+            <a:spLocks noGrp="1"/>
+          </p:cNvSpPr>
+          <p:nvPr>
+            <p:ph type="dt" sz="half" idx="10"/>
+          </p:nvPr>
+        </p:nvSpPr>
+        <p:spPr/>
+        <p:txBody>
+          <a:bodyPr/>
+          <a:lstStyle/>
+          <a:p>
+            <a:fld id="{50127699-CE66-884A-8195-C65725EA4A90}" type="datetime1">
+              <a:rPr lang="en-US" smtClean="0"/>
+              <a:t>10/8/26</a:t>
+            </a:fld>
+            <a:endParaRPr lang="en-US"/>
+          </a:p>
+        </p:txBody>
+      </p:sp>
+      <p:sp>
+        <p:nvSpPr>
+          <p:cNvPr id="5" name="Footer Placeholder 4">
+            <a:extLst>
+              <a:ext uri="{FF2B5EF4-FFF2-40B4-BE49-F238E27FC236}">
+                <a16:creationId xmlns:a16="http://schemas.microsoft.com/office/drawing/2014/main" id="{BE3062FD-B846-EFD8-FBC0-95C469E2C8E7}"/>
+              </a:ext>
+            </a:extLst>
+          </p:cNvPr>
+          <p:cNvSpPr>
+            <a:spLocks noGrp="1"/>
+          </p:cNvSpPr>
+          <p:nvPr>
+            <p:ph type="ftr" sz="quarter" idx="11"/>
+          </p:nvPr>
+        </p:nvSpPr>
+        <p:spPr/>
+        <p:txBody>
+          <a:bodyPr/>
+          <a:lstStyle/>
+          <a:p>
+            <a:r>
+              <a:rPr lang="en-US"/>
+              <a:t>© Steve Beaty and others as cited</a:t>
+            </a:r>
+          </a:p>
+        </p:txBody>
+      </p:sp>
+      <p:sp>
+        <p:nvSpPr>
+          <p:cNvPr id="6" name="Slide Number Placeholder 5">
+            <a:extLst>
+              <a:ext uri="{FF2B5EF4-FFF2-40B4-BE49-F238E27FC236}">
+                <a16:creationId xmlns:a16="http://schemas.microsoft.com/office/drawing/2014/main" id="{7DA0B538-EB1F-40F8-9074-3FF89576FEDA}"/>
+              </a:ext>
+            </a:extLst>
+          </p:cNvPr>
+          <p:cNvSpPr>
+            <a:spLocks noGrp="1"/>
+          </p:cNvSpPr>
+          <p:nvPr>
+            <p:ph type="sldNum" sz="quarter" idx="12"/>
+          </p:nvPr>
+        </p:nvSpPr>
+        <p:spPr/>
+        <p:txBody>
+          <a:bodyPr/>
+          <a:lstStyle/>
+          <a:p>
+            <a:fld id="{5CA8E750-09AF-F04A-AC61-93A8E70A6AD8}" type="slidenum">
+              <a:rPr lang="en-US" smtClean="0"/>
+              <a:t>25</a:t>
+            </a:fld>
+            <a:endParaRPr lang="en-US"/>
+          </a:p>
+        </p:txBody>
+      </p:sp>
     </p:spTree>
     <p:extLst>
       <p:ext uri="{BB962C8B-B14F-4D97-AF65-F5344CB8AC3E}">
@@ -4994,12 +6738,12 @@
   </p:clrMapOvr>
   <mc:AlternateContent xmlns:mc="http://schemas.openxmlformats.org/markup-compatibility/2006" xmlns:p14="http://schemas.microsoft.com/office/powerpoint/2010/main">
     <mc:Choice Requires="p14">
-      <p:transition spd="slow" p14:dur="1200">
-        <p14:prism/>
+      <p:transition spd="slow" p14:dur="2000">
+        <p14:prism isContent="1"/>
       </p:transition>
     </mc:Choice>
     <mc:Fallback xmlns="">
-      <p:transition xmlns:p14="http://schemas.microsoft.com/office/powerpoint/2010/main" spd="slow">
+      <p:transition spd="slow">
         <p:fade/>
       </p:transition>
     </mc:Fallback>
@@ -5042,7 +6786,9 @@
         </p:nvSpPr>
         <p:spPr/>
         <p:txBody>
-          <a:bodyPr/>
+          <a:bodyPr>
+            <a:normAutofit fontScale="90000"/>
+          </a:bodyPr>
           <a:lstStyle/>
           <a:p>
             <a:r>
@@ -5413,6 +7159,92 @@
           </a:graphicData>
         </a:graphic>
       </p:graphicFrame>
+      <p:sp>
+        <p:nvSpPr>
+          <p:cNvPr id="3" name="Date Placeholder 2">
+            <a:extLst>
+              <a:ext uri="{FF2B5EF4-FFF2-40B4-BE49-F238E27FC236}">
+                <a16:creationId xmlns:a16="http://schemas.microsoft.com/office/drawing/2014/main" id="{1E31D417-4421-E6B6-E8BD-445A8FCD81D1}"/>
+              </a:ext>
+            </a:extLst>
+          </p:cNvPr>
+          <p:cNvSpPr>
+            <a:spLocks noGrp="1"/>
+          </p:cNvSpPr>
+          <p:nvPr>
+            <p:ph type="dt" sz="half" idx="10"/>
+          </p:nvPr>
+        </p:nvSpPr>
+        <p:spPr/>
+        <p:txBody>
+          <a:bodyPr/>
+          <a:lstStyle/>
+          <a:p>
+            <a:fld id="{5E5E10B5-3C1E-FF4A-81E4-26D765DB64F1}" type="datetime1">
+              <a:rPr lang="en-US" smtClean="0"/>
+              <a:t>10/8/26</a:t>
+            </a:fld>
+            <a:endParaRPr lang="en-US"/>
+          </a:p>
+        </p:txBody>
+      </p:sp>
+      <p:sp>
+        <p:nvSpPr>
+          <p:cNvPr id="6" name="Footer Placeholder 5">
+            <a:extLst>
+              <a:ext uri="{FF2B5EF4-FFF2-40B4-BE49-F238E27FC236}">
+                <a16:creationId xmlns:a16="http://schemas.microsoft.com/office/drawing/2014/main" id="{886D0189-55F2-2577-C3E7-7F6AD2BBE6A3}"/>
+              </a:ext>
+            </a:extLst>
+          </p:cNvPr>
+          <p:cNvSpPr>
+            <a:spLocks noGrp="1"/>
+          </p:cNvSpPr>
+          <p:nvPr>
+            <p:ph type="ftr" sz="quarter" idx="11"/>
+          </p:nvPr>
+        </p:nvSpPr>
+        <p:spPr/>
+        <p:txBody>
+          <a:bodyPr/>
+          <a:lstStyle/>
+          <a:p>
+            <a:r>
+              <a:rPr lang="en-US"/>
+              <a:t>© Steve Beaty and others as cited</a:t>
+            </a:r>
+          </a:p>
+        </p:txBody>
+      </p:sp>
+      <p:sp>
+        <p:nvSpPr>
+          <p:cNvPr id="7" name="Slide Number Placeholder 6">
+            <a:extLst>
+              <a:ext uri="{FF2B5EF4-FFF2-40B4-BE49-F238E27FC236}">
+                <a16:creationId xmlns:a16="http://schemas.microsoft.com/office/drawing/2014/main" id="{33276BEF-6F53-8FB7-D6AE-974DD6F0DFC6}"/>
+              </a:ext>
+            </a:extLst>
+          </p:cNvPr>
+          <p:cNvSpPr>
+            <a:spLocks noGrp="1"/>
+          </p:cNvSpPr>
+          <p:nvPr>
+            <p:ph type="sldNum" sz="quarter" idx="12"/>
+          </p:nvPr>
+        </p:nvSpPr>
+        <p:spPr/>
+        <p:txBody>
+          <a:bodyPr/>
+          <a:lstStyle/>
+          <a:p>
+            <a:fld id="{5CA8E750-09AF-F04A-AC61-93A8E70A6AD8}" type="slidenum">
+              <a:rPr lang="en-US" smtClean="0"/>
+              <a:t>26</a:t>
+            </a:fld>
+            <a:endParaRPr lang="en-US"/>
+          </a:p>
+        </p:txBody>
+      </p:sp>
     </p:spTree>
     <p:extLst>
       <p:ext uri="{BB962C8B-B14F-4D97-AF65-F5344CB8AC3E}">
@@ -5425,12 +7257,12 @@
   </p:clrMapOvr>
   <mc:AlternateContent xmlns:mc="http://schemas.openxmlformats.org/markup-compatibility/2006" xmlns:p14="http://schemas.microsoft.com/office/powerpoint/2010/main">
     <mc:Choice Requires="p14">
-      <p:transition spd="slow" p14:dur="1200">
-        <p14:prism/>
+      <p:transition spd="slow" p14:dur="2000">
+        <p14:prism isContent="1"/>
       </p:transition>
     </mc:Choice>
     <mc:Fallback xmlns="">
-      <p:transition xmlns:p14="http://schemas.microsoft.com/office/powerpoint/2010/main" spd="slow">
+      <p:transition spd="slow">
         <p:fade/>
       </p:transition>
     </mc:Fallback>
@@ -5473,7 +7305,9 @@
         </p:nvSpPr>
         <p:spPr/>
         <p:txBody>
-          <a:bodyPr/>
+          <a:bodyPr>
+            <a:normAutofit fontScale="90000"/>
+          </a:bodyPr>
           <a:lstStyle/>
           <a:p>
             <a:r>
@@ -5502,7 +7336,7 @@
         <p:spPr/>
         <p:txBody>
           <a:bodyPr>
-            <a:normAutofit lnSpcReduction="10000"/>
+            <a:normAutofit fontScale="92500" lnSpcReduction="20000"/>
           </a:bodyPr>
           <a:lstStyle/>
           <a:p>
@@ -5569,7 +7403,7 @@
         <p:spPr/>
         <p:txBody>
           <a:bodyPr>
-            <a:normAutofit lnSpcReduction="10000"/>
+            <a:normAutofit fontScale="92500" lnSpcReduction="20000"/>
           </a:bodyPr>
           <a:lstStyle/>
           <a:p>
@@ -5608,6 +7442,92 @@
               <a:rPr lang="en-US" dirty="0"/>
               <a:t>timestamp</a:t>
             </a:r>
+          </a:p>
+        </p:txBody>
+      </p:sp>
+      <p:sp>
+        <p:nvSpPr>
+          <p:cNvPr id="5" name="Date Placeholder 4">
+            <a:extLst>
+              <a:ext uri="{FF2B5EF4-FFF2-40B4-BE49-F238E27FC236}">
+                <a16:creationId xmlns:a16="http://schemas.microsoft.com/office/drawing/2014/main" id="{0535F8F9-383F-E569-9FA0-20037343C36A}"/>
+              </a:ext>
+            </a:extLst>
+          </p:cNvPr>
+          <p:cNvSpPr>
+            <a:spLocks noGrp="1"/>
+          </p:cNvSpPr>
+          <p:nvPr>
+            <p:ph type="dt" sz="half" idx="10"/>
+          </p:nvPr>
+        </p:nvSpPr>
+        <p:spPr/>
+        <p:txBody>
+          <a:bodyPr/>
+          <a:lstStyle/>
+          <a:p>
+            <a:fld id="{00A49AA5-DD4B-784E-8696-492943BDAEA1}" type="datetime1">
+              <a:rPr lang="en-US" smtClean="0"/>
+              <a:t>10/8/26</a:t>
+            </a:fld>
+            <a:endParaRPr lang="en-US"/>
+          </a:p>
+        </p:txBody>
+      </p:sp>
+      <p:sp>
+        <p:nvSpPr>
+          <p:cNvPr id="6" name="Footer Placeholder 5">
+            <a:extLst>
+              <a:ext uri="{FF2B5EF4-FFF2-40B4-BE49-F238E27FC236}">
+                <a16:creationId xmlns:a16="http://schemas.microsoft.com/office/drawing/2014/main" id="{B2016AB5-AE90-6B14-00EB-F4B546B44A45}"/>
+              </a:ext>
+            </a:extLst>
+          </p:cNvPr>
+          <p:cNvSpPr>
+            <a:spLocks noGrp="1"/>
+          </p:cNvSpPr>
+          <p:nvPr>
+            <p:ph type="ftr" sz="quarter" idx="11"/>
+          </p:nvPr>
+        </p:nvSpPr>
+        <p:spPr/>
+        <p:txBody>
+          <a:bodyPr/>
+          <a:lstStyle/>
+          <a:p>
+            <a:r>
+              <a:rPr lang="en-US"/>
+              <a:t>© Steve Beaty and others as cited</a:t>
+            </a:r>
+          </a:p>
+        </p:txBody>
+      </p:sp>
+      <p:sp>
+        <p:nvSpPr>
+          <p:cNvPr id="7" name="Slide Number Placeholder 6">
+            <a:extLst>
+              <a:ext uri="{FF2B5EF4-FFF2-40B4-BE49-F238E27FC236}">
+                <a16:creationId xmlns:a16="http://schemas.microsoft.com/office/drawing/2014/main" id="{FD2B42CF-7E4D-9255-7E4B-6FADFAE1F562}"/>
+              </a:ext>
+            </a:extLst>
+          </p:cNvPr>
+          <p:cNvSpPr>
+            <a:spLocks noGrp="1"/>
+          </p:cNvSpPr>
+          <p:nvPr>
+            <p:ph type="sldNum" sz="quarter" idx="12"/>
+          </p:nvPr>
+        </p:nvSpPr>
+        <p:spPr/>
+        <p:txBody>
+          <a:bodyPr/>
+          <a:lstStyle/>
+          <a:p>
+            <a:fld id="{5CA8E750-09AF-F04A-AC61-93A8E70A6AD8}" type="slidenum">
+              <a:rPr lang="en-US" smtClean="0"/>
+              <a:t>27</a:t>
+            </a:fld>
+            <a:endParaRPr lang="en-US"/>
           </a:p>
         </p:txBody>
       </p:sp>
@@ -5623,12 +7543,12 @@
   </p:clrMapOvr>
   <mc:AlternateContent xmlns:mc="http://schemas.openxmlformats.org/markup-compatibility/2006" xmlns:p14="http://schemas.microsoft.com/office/powerpoint/2010/main">
     <mc:Choice Requires="p14">
-      <p:transition spd="slow" p14:dur="1200">
-        <p14:prism/>
+      <p:transition spd="slow" p14:dur="2000">
+        <p14:prism isContent="1"/>
       </p:transition>
     </mc:Choice>
     <mc:Fallback xmlns="">
-      <p:transition xmlns:p14="http://schemas.microsoft.com/office/powerpoint/2010/main" spd="slow">
+      <p:transition spd="slow">
         <p:fade/>
       </p:transition>
     </mc:Fallback>
@@ -5671,7 +7591,9 @@
         </p:nvSpPr>
         <p:spPr/>
         <p:txBody>
-          <a:bodyPr/>
+          <a:bodyPr>
+            <a:normAutofit fontScale="90000"/>
+          </a:bodyPr>
           <a:lstStyle/>
           <a:p>
             <a:r>
@@ -5700,7 +7622,7 @@
         <p:spPr/>
         <p:txBody>
           <a:bodyPr>
-            <a:normAutofit lnSpcReduction="10000"/>
+            <a:normAutofit fontScale="92500" lnSpcReduction="20000"/>
           </a:bodyPr>
           <a:lstStyle/>
           <a:p>
@@ -5785,7 +7707,7 @@
         <p:spPr/>
         <p:txBody>
           <a:bodyPr>
-            <a:normAutofit lnSpcReduction="10000"/>
+            <a:normAutofit fontScale="92500" lnSpcReduction="20000"/>
           </a:bodyPr>
           <a:lstStyle/>
           <a:p>
@@ -5832,6 +7754,92 @@
           </a:p>
           <a:p>
             <a:endParaRPr lang="en-US" dirty="0"/>
+          </a:p>
+        </p:txBody>
+      </p:sp>
+      <p:sp>
+        <p:nvSpPr>
+          <p:cNvPr id="5" name="Date Placeholder 4">
+            <a:extLst>
+              <a:ext uri="{FF2B5EF4-FFF2-40B4-BE49-F238E27FC236}">
+                <a16:creationId xmlns:a16="http://schemas.microsoft.com/office/drawing/2014/main" id="{08D6EB9F-5EC3-2E57-AA7B-91CC4826C9A9}"/>
+              </a:ext>
+            </a:extLst>
+          </p:cNvPr>
+          <p:cNvSpPr>
+            <a:spLocks noGrp="1"/>
+          </p:cNvSpPr>
+          <p:nvPr>
+            <p:ph type="dt" sz="half" idx="10"/>
+          </p:nvPr>
+        </p:nvSpPr>
+        <p:spPr/>
+        <p:txBody>
+          <a:bodyPr/>
+          <a:lstStyle/>
+          <a:p>
+            <a:fld id="{AC681EE1-E21C-284F-8A8B-3FAB56CEC1CF}" type="datetime1">
+              <a:rPr lang="en-US" smtClean="0"/>
+              <a:t>10/8/26</a:t>
+            </a:fld>
+            <a:endParaRPr lang="en-US"/>
+          </a:p>
+        </p:txBody>
+      </p:sp>
+      <p:sp>
+        <p:nvSpPr>
+          <p:cNvPr id="6" name="Footer Placeholder 5">
+            <a:extLst>
+              <a:ext uri="{FF2B5EF4-FFF2-40B4-BE49-F238E27FC236}">
+                <a16:creationId xmlns:a16="http://schemas.microsoft.com/office/drawing/2014/main" id="{FE668B41-8727-7A6D-63E0-0E1F5C1C95D5}"/>
+              </a:ext>
+            </a:extLst>
+          </p:cNvPr>
+          <p:cNvSpPr>
+            <a:spLocks noGrp="1"/>
+          </p:cNvSpPr>
+          <p:nvPr>
+            <p:ph type="ftr" sz="quarter" idx="11"/>
+          </p:nvPr>
+        </p:nvSpPr>
+        <p:spPr/>
+        <p:txBody>
+          <a:bodyPr/>
+          <a:lstStyle/>
+          <a:p>
+            <a:r>
+              <a:rPr lang="en-US"/>
+              <a:t>© Steve Beaty and others as cited</a:t>
+            </a:r>
+          </a:p>
+        </p:txBody>
+      </p:sp>
+      <p:sp>
+        <p:nvSpPr>
+          <p:cNvPr id="7" name="Slide Number Placeholder 6">
+            <a:extLst>
+              <a:ext uri="{FF2B5EF4-FFF2-40B4-BE49-F238E27FC236}">
+                <a16:creationId xmlns:a16="http://schemas.microsoft.com/office/drawing/2014/main" id="{6860C0DE-9820-0C00-38BF-A054A14EED1E}"/>
+              </a:ext>
+            </a:extLst>
+          </p:cNvPr>
+          <p:cNvSpPr>
+            <a:spLocks noGrp="1"/>
+          </p:cNvSpPr>
+          <p:nvPr>
+            <p:ph type="sldNum" sz="quarter" idx="12"/>
+          </p:nvPr>
+        </p:nvSpPr>
+        <p:spPr/>
+        <p:txBody>
+          <a:bodyPr/>
+          <a:lstStyle/>
+          <a:p>
+            <a:fld id="{5CA8E750-09AF-F04A-AC61-93A8E70A6AD8}" type="slidenum">
+              <a:rPr lang="en-US" smtClean="0"/>
+              <a:t>28</a:t>
+            </a:fld>
+            <a:endParaRPr lang="en-US"/>
           </a:p>
         </p:txBody>
       </p:sp>
@@ -5847,12 +7855,12 @@
   </p:clrMapOvr>
   <mc:AlternateContent xmlns:mc="http://schemas.openxmlformats.org/markup-compatibility/2006" xmlns:p14="http://schemas.microsoft.com/office/powerpoint/2010/main">
     <mc:Choice Requires="p14">
-      <p:transition spd="slow" p14:dur="1200">
-        <p14:prism/>
+      <p:transition spd="slow" p14:dur="2000">
+        <p14:prism isContent="1"/>
       </p:transition>
     </mc:Choice>
     <mc:Fallback xmlns="">
-      <p:transition xmlns:p14="http://schemas.microsoft.com/office/powerpoint/2010/main" spd="slow">
+      <p:transition spd="slow">
         <p:fade/>
       </p:transition>
     </mc:Fallback>
@@ -5895,7 +7903,9 @@
         </p:nvSpPr>
         <p:spPr/>
         <p:txBody>
-          <a:bodyPr/>
+          <a:bodyPr>
+            <a:normAutofit fontScale="90000"/>
+          </a:bodyPr>
           <a:lstStyle/>
           <a:p>
             <a:r>
@@ -5942,6 +7952,92 @@
               <a:rPr lang="en-US" dirty="0"/>
               <a:t>There are many generators</a:t>
             </a:r>
+          </a:p>
+        </p:txBody>
+      </p:sp>
+      <p:sp>
+        <p:nvSpPr>
+          <p:cNvPr id="4" name="Date Placeholder 3">
+            <a:extLst>
+              <a:ext uri="{FF2B5EF4-FFF2-40B4-BE49-F238E27FC236}">
+                <a16:creationId xmlns:a16="http://schemas.microsoft.com/office/drawing/2014/main" id="{060388D4-B1D6-6219-1318-1A80EEE3BE43}"/>
+              </a:ext>
+            </a:extLst>
+          </p:cNvPr>
+          <p:cNvSpPr>
+            <a:spLocks noGrp="1"/>
+          </p:cNvSpPr>
+          <p:nvPr>
+            <p:ph type="dt" sz="half" idx="10"/>
+          </p:nvPr>
+        </p:nvSpPr>
+        <p:spPr/>
+        <p:txBody>
+          <a:bodyPr/>
+          <a:lstStyle/>
+          <a:p>
+            <a:fld id="{C6211B5D-B2FF-BE45-B69A-38DA01B8672D}" type="datetime1">
+              <a:rPr lang="en-US" smtClean="0"/>
+              <a:t>10/8/26</a:t>
+            </a:fld>
+            <a:endParaRPr lang="en-US"/>
+          </a:p>
+        </p:txBody>
+      </p:sp>
+      <p:sp>
+        <p:nvSpPr>
+          <p:cNvPr id="5" name="Footer Placeholder 4">
+            <a:extLst>
+              <a:ext uri="{FF2B5EF4-FFF2-40B4-BE49-F238E27FC236}">
+                <a16:creationId xmlns:a16="http://schemas.microsoft.com/office/drawing/2014/main" id="{0FD9D6C1-C442-76A9-C8BC-0BB9854F4E35}"/>
+              </a:ext>
+            </a:extLst>
+          </p:cNvPr>
+          <p:cNvSpPr>
+            <a:spLocks noGrp="1"/>
+          </p:cNvSpPr>
+          <p:nvPr>
+            <p:ph type="ftr" sz="quarter" idx="11"/>
+          </p:nvPr>
+        </p:nvSpPr>
+        <p:spPr/>
+        <p:txBody>
+          <a:bodyPr/>
+          <a:lstStyle/>
+          <a:p>
+            <a:r>
+              <a:rPr lang="en-US"/>
+              <a:t>© Steve Beaty and others as cited</a:t>
+            </a:r>
+          </a:p>
+        </p:txBody>
+      </p:sp>
+      <p:sp>
+        <p:nvSpPr>
+          <p:cNvPr id="6" name="Slide Number Placeholder 5">
+            <a:extLst>
+              <a:ext uri="{FF2B5EF4-FFF2-40B4-BE49-F238E27FC236}">
+                <a16:creationId xmlns:a16="http://schemas.microsoft.com/office/drawing/2014/main" id="{DE6E23B2-4D1E-BF50-563F-2FF80D4AF93F}"/>
+              </a:ext>
+            </a:extLst>
+          </p:cNvPr>
+          <p:cNvSpPr>
+            <a:spLocks noGrp="1"/>
+          </p:cNvSpPr>
+          <p:nvPr>
+            <p:ph type="sldNum" sz="quarter" idx="12"/>
+          </p:nvPr>
+        </p:nvSpPr>
+        <p:spPr/>
+        <p:txBody>
+          <a:bodyPr/>
+          <a:lstStyle/>
+          <a:p>
+            <a:fld id="{5CA8E750-09AF-F04A-AC61-93A8E70A6AD8}" type="slidenum">
+              <a:rPr lang="en-US" smtClean="0"/>
+              <a:t>29</a:t>
+            </a:fld>
+            <a:endParaRPr lang="en-US"/>
           </a:p>
         </p:txBody>
       </p:sp>
@@ -5957,12 +8053,12 @@
   </p:clrMapOvr>
   <mc:AlternateContent xmlns:mc="http://schemas.openxmlformats.org/markup-compatibility/2006" xmlns:p14="http://schemas.microsoft.com/office/powerpoint/2010/main">
     <mc:Choice Requires="p14">
-      <p:transition spd="slow" p14:dur="1200">
-        <p14:prism/>
+      <p:transition spd="slow" p14:dur="2000">
+        <p14:prism isContent="1"/>
       </p:transition>
     </mc:Choice>
     <mc:Fallback xmlns="">
-      <p:transition xmlns:p14="http://schemas.microsoft.com/office/powerpoint/2010/main" spd="slow">
+      <p:transition spd="slow">
         <p:fade/>
       </p:transition>
     </mc:Fallback>
@@ -6057,6 +8153,92 @@
           </a:p>
         </p:txBody>
       </p:sp>
+      <p:sp>
+        <p:nvSpPr>
+          <p:cNvPr id="4" name="Date Placeholder 3">
+            <a:extLst>
+              <a:ext uri="{FF2B5EF4-FFF2-40B4-BE49-F238E27FC236}">
+                <a16:creationId xmlns:a16="http://schemas.microsoft.com/office/drawing/2014/main" id="{5966FD3A-584B-8B3B-266B-FDE9171B83F6}"/>
+              </a:ext>
+            </a:extLst>
+          </p:cNvPr>
+          <p:cNvSpPr>
+            <a:spLocks noGrp="1"/>
+          </p:cNvSpPr>
+          <p:nvPr>
+            <p:ph type="dt" sz="half" idx="10"/>
+          </p:nvPr>
+        </p:nvSpPr>
+        <p:spPr/>
+        <p:txBody>
+          <a:bodyPr/>
+          <a:lstStyle/>
+          <a:p>
+            <a:fld id="{2E5FE035-A24A-544C-AEC9-456E8E5B32F8}" type="datetime1">
+              <a:rPr lang="en-US" smtClean="0"/>
+              <a:t>10/8/26</a:t>
+            </a:fld>
+            <a:endParaRPr lang="en-US"/>
+          </a:p>
+        </p:txBody>
+      </p:sp>
+      <p:sp>
+        <p:nvSpPr>
+          <p:cNvPr id="5" name="Footer Placeholder 4">
+            <a:extLst>
+              <a:ext uri="{FF2B5EF4-FFF2-40B4-BE49-F238E27FC236}">
+                <a16:creationId xmlns:a16="http://schemas.microsoft.com/office/drawing/2014/main" id="{B318EF53-8F5D-5A16-8C1F-86E9AD2D80CB}"/>
+              </a:ext>
+            </a:extLst>
+          </p:cNvPr>
+          <p:cNvSpPr>
+            <a:spLocks noGrp="1"/>
+          </p:cNvSpPr>
+          <p:nvPr>
+            <p:ph type="ftr" sz="quarter" idx="11"/>
+          </p:nvPr>
+        </p:nvSpPr>
+        <p:spPr/>
+        <p:txBody>
+          <a:bodyPr/>
+          <a:lstStyle/>
+          <a:p>
+            <a:r>
+              <a:rPr lang="en-US"/>
+              <a:t>© Steve Beaty and others as cited</a:t>
+            </a:r>
+          </a:p>
+        </p:txBody>
+      </p:sp>
+      <p:sp>
+        <p:nvSpPr>
+          <p:cNvPr id="6" name="Slide Number Placeholder 5">
+            <a:extLst>
+              <a:ext uri="{FF2B5EF4-FFF2-40B4-BE49-F238E27FC236}">
+                <a16:creationId xmlns:a16="http://schemas.microsoft.com/office/drawing/2014/main" id="{0CD8962A-E1D8-0871-6797-E3B9527FE1F8}"/>
+              </a:ext>
+            </a:extLst>
+          </p:cNvPr>
+          <p:cNvSpPr>
+            <a:spLocks noGrp="1"/>
+          </p:cNvSpPr>
+          <p:nvPr>
+            <p:ph type="sldNum" sz="quarter" idx="12"/>
+          </p:nvPr>
+        </p:nvSpPr>
+        <p:spPr/>
+        <p:txBody>
+          <a:bodyPr/>
+          <a:lstStyle/>
+          <a:p>
+            <a:fld id="{5CA8E750-09AF-F04A-AC61-93A8E70A6AD8}" type="slidenum">
+              <a:rPr lang="en-US" smtClean="0"/>
+              <a:t>3</a:t>
+            </a:fld>
+            <a:endParaRPr lang="en-US"/>
+          </a:p>
+        </p:txBody>
+      </p:sp>
     </p:spTree>
     <p:extLst>
       <p:ext uri="{BB962C8B-B14F-4D97-AF65-F5344CB8AC3E}">
@@ -6069,12 +8251,12 @@
   </p:clrMapOvr>
   <mc:AlternateContent xmlns:mc="http://schemas.openxmlformats.org/markup-compatibility/2006" xmlns:p14="http://schemas.microsoft.com/office/powerpoint/2010/main">
     <mc:Choice Requires="p14">
-      <p:transition spd="slow" p14:dur="1200">
-        <p14:prism/>
+      <p:transition spd="slow" p14:dur="2000">
+        <p14:prism isContent="1"/>
       </p:transition>
     </mc:Choice>
     <mc:Fallback xmlns="">
-      <p:transition xmlns:p14="http://schemas.microsoft.com/office/powerpoint/2010/main" spd="slow">
+      <p:transition spd="slow">
         <p:fade/>
       </p:transition>
     </mc:Fallback>
@@ -6117,7 +8299,9 @@
         </p:nvSpPr>
         <p:spPr/>
         <p:txBody>
-          <a:bodyPr/>
+          <a:bodyPr>
+            <a:normAutofit fontScale="90000"/>
+          </a:bodyPr>
           <a:lstStyle/>
           <a:p>
             <a:r>
@@ -6146,7 +8330,7 @@
         <p:spPr/>
         <p:txBody>
           <a:bodyPr>
-            <a:normAutofit fontScale="92500" lnSpcReduction="20000"/>
+            <a:normAutofit fontScale="85000" lnSpcReduction="20000"/>
           </a:bodyPr>
           <a:lstStyle/>
           <a:p>
@@ -6223,7 +8407,7 @@
         <p:spPr/>
         <p:txBody>
           <a:bodyPr>
-            <a:normAutofit fontScale="92500" lnSpcReduction="20000"/>
+            <a:normAutofit fontScale="85000" lnSpcReduction="20000"/>
           </a:bodyPr>
           <a:lstStyle/>
           <a:p>
@@ -6275,6 +8459,92 @@
               <a:rPr lang="en-US" dirty="0"/>
               <a:t>task</a:t>
             </a:r>
+          </a:p>
+        </p:txBody>
+      </p:sp>
+      <p:sp>
+        <p:nvSpPr>
+          <p:cNvPr id="5" name="Date Placeholder 4">
+            <a:extLst>
+              <a:ext uri="{FF2B5EF4-FFF2-40B4-BE49-F238E27FC236}">
+                <a16:creationId xmlns:a16="http://schemas.microsoft.com/office/drawing/2014/main" id="{C58201A7-A229-BCBD-AFC6-3E18A1F24C35}"/>
+              </a:ext>
+            </a:extLst>
+          </p:cNvPr>
+          <p:cNvSpPr>
+            <a:spLocks noGrp="1"/>
+          </p:cNvSpPr>
+          <p:nvPr>
+            <p:ph type="dt" sz="half" idx="10"/>
+          </p:nvPr>
+        </p:nvSpPr>
+        <p:spPr/>
+        <p:txBody>
+          <a:bodyPr/>
+          <a:lstStyle/>
+          <a:p>
+            <a:fld id="{5418A254-8785-FB4F-B284-BA3DCDCDA237}" type="datetime1">
+              <a:rPr lang="en-US" smtClean="0"/>
+              <a:t>10/8/26</a:t>
+            </a:fld>
+            <a:endParaRPr lang="en-US"/>
+          </a:p>
+        </p:txBody>
+      </p:sp>
+      <p:sp>
+        <p:nvSpPr>
+          <p:cNvPr id="6" name="Footer Placeholder 5">
+            <a:extLst>
+              <a:ext uri="{FF2B5EF4-FFF2-40B4-BE49-F238E27FC236}">
+                <a16:creationId xmlns:a16="http://schemas.microsoft.com/office/drawing/2014/main" id="{7452D101-0EE3-4B50-ABD0-E9BA98B23400}"/>
+              </a:ext>
+            </a:extLst>
+          </p:cNvPr>
+          <p:cNvSpPr>
+            <a:spLocks noGrp="1"/>
+          </p:cNvSpPr>
+          <p:nvPr>
+            <p:ph type="ftr" sz="quarter" idx="11"/>
+          </p:nvPr>
+        </p:nvSpPr>
+        <p:spPr/>
+        <p:txBody>
+          <a:bodyPr/>
+          <a:lstStyle/>
+          <a:p>
+            <a:r>
+              <a:rPr lang="en-US"/>
+              <a:t>© Steve Beaty and others as cited</a:t>
+            </a:r>
+          </a:p>
+        </p:txBody>
+      </p:sp>
+      <p:sp>
+        <p:nvSpPr>
+          <p:cNvPr id="7" name="Slide Number Placeholder 6">
+            <a:extLst>
+              <a:ext uri="{FF2B5EF4-FFF2-40B4-BE49-F238E27FC236}">
+                <a16:creationId xmlns:a16="http://schemas.microsoft.com/office/drawing/2014/main" id="{35E54DEC-5769-412C-59DF-2E7FF098BA60}"/>
+              </a:ext>
+            </a:extLst>
+          </p:cNvPr>
+          <p:cNvSpPr>
+            <a:spLocks noGrp="1"/>
+          </p:cNvSpPr>
+          <p:nvPr>
+            <p:ph type="sldNum" sz="quarter" idx="12"/>
+          </p:nvPr>
+        </p:nvSpPr>
+        <p:spPr/>
+        <p:txBody>
+          <a:bodyPr/>
+          <a:lstStyle/>
+          <a:p>
+            <a:fld id="{5CA8E750-09AF-F04A-AC61-93A8E70A6AD8}" type="slidenum">
+              <a:rPr lang="en-US" smtClean="0"/>
+              <a:t>30</a:t>
+            </a:fld>
+            <a:endParaRPr lang="en-US"/>
           </a:p>
         </p:txBody>
       </p:sp>
@@ -6290,12 +8560,12 @@
   </p:clrMapOvr>
   <mc:AlternateContent xmlns:mc="http://schemas.openxmlformats.org/markup-compatibility/2006" xmlns:p14="http://schemas.microsoft.com/office/powerpoint/2010/main">
     <mc:Choice Requires="p14">
-      <p:transition spd="slow" p14:dur="1200">
-        <p14:prism/>
+      <p:transition spd="slow" p14:dur="2000">
+        <p14:prism isContent="1"/>
       </p:transition>
     </mc:Choice>
     <mc:Fallback xmlns="">
-      <p:transition xmlns:p14="http://schemas.microsoft.com/office/powerpoint/2010/main" spd="slow">
+      <p:transition spd="slow">
         <p:fade/>
       </p:transition>
     </mc:Fallback>
@@ -6338,7 +8608,9 @@
         </p:nvSpPr>
         <p:spPr/>
         <p:txBody>
-          <a:bodyPr/>
+          <a:bodyPr>
+            <a:normAutofit fontScale="90000"/>
+          </a:bodyPr>
           <a:lstStyle/>
           <a:p>
             <a:r>
@@ -6379,6 +8651,92 @@
               <a:rPr lang="en-US" dirty="0"/>
               <a:t>We can create, modify, and delete tables via migrations</a:t>
             </a:r>
+          </a:p>
+        </p:txBody>
+      </p:sp>
+      <p:sp>
+        <p:nvSpPr>
+          <p:cNvPr id="2" name="Date Placeholder 1">
+            <a:extLst>
+              <a:ext uri="{FF2B5EF4-FFF2-40B4-BE49-F238E27FC236}">
+                <a16:creationId xmlns:a16="http://schemas.microsoft.com/office/drawing/2014/main" id="{319A1D3A-39AD-CC54-9383-C49F75846C09}"/>
+              </a:ext>
+            </a:extLst>
+          </p:cNvPr>
+          <p:cNvSpPr>
+            <a:spLocks noGrp="1"/>
+          </p:cNvSpPr>
+          <p:nvPr>
+            <p:ph type="dt" sz="half" idx="10"/>
+          </p:nvPr>
+        </p:nvSpPr>
+        <p:spPr/>
+        <p:txBody>
+          <a:bodyPr/>
+          <a:lstStyle/>
+          <a:p>
+            <a:fld id="{2BB6FE4F-BFED-5440-B01A-48F7C5739C6D}" type="datetime1">
+              <a:rPr lang="en-US" smtClean="0"/>
+              <a:t>10/8/26</a:t>
+            </a:fld>
+            <a:endParaRPr lang="en-US"/>
+          </a:p>
+        </p:txBody>
+      </p:sp>
+      <p:sp>
+        <p:nvSpPr>
+          <p:cNvPr id="3" name="Footer Placeholder 2">
+            <a:extLst>
+              <a:ext uri="{FF2B5EF4-FFF2-40B4-BE49-F238E27FC236}">
+                <a16:creationId xmlns:a16="http://schemas.microsoft.com/office/drawing/2014/main" id="{A2DCC8A7-019E-7EDD-A9E0-185B5A8F4666}"/>
+              </a:ext>
+            </a:extLst>
+          </p:cNvPr>
+          <p:cNvSpPr>
+            <a:spLocks noGrp="1"/>
+          </p:cNvSpPr>
+          <p:nvPr>
+            <p:ph type="ftr" sz="quarter" idx="11"/>
+          </p:nvPr>
+        </p:nvSpPr>
+        <p:spPr/>
+        <p:txBody>
+          <a:bodyPr/>
+          <a:lstStyle/>
+          <a:p>
+            <a:r>
+              <a:rPr lang="en-US"/>
+              <a:t>© Steve Beaty and others as cited</a:t>
+            </a:r>
+          </a:p>
+        </p:txBody>
+      </p:sp>
+      <p:sp>
+        <p:nvSpPr>
+          <p:cNvPr id="4" name="Slide Number Placeholder 3">
+            <a:extLst>
+              <a:ext uri="{FF2B5EF4-FFF2-40B4-BE49-F238E27FC236}">
+                <a16:creationId xmlns:a16="http://schemas.microsoft.com/office/drawing/2014/main" id="{0190EDD3-1FFA-7BB6-367B-EADB9FC9FA31}"/>
+              </a:ext>
+            </a:extLst>
+          </p:cNvPr>
+          <p:cNvSpPr>
+            <a:spLocks noGrp="1"/>
+          </p:cNvSpPr>
+          <p:nvPr>
+            <p:ph type="sldNum" sz="quarter" idx="12"/>
+          </p:nvPr>
+        </p:nvSpPr>
+        <p:spPr/>
+        <p:txBody>
+          <a:bodyPr/>
+          <a:lstStyle/>
+          <a:p>
+            <a:fld id="{5CA8E750-09AF-F04A-AC61-93A8E70A6AD8}" type="slidenum">
+              <a:rPr lang="en-US" smtClean="0"/>
+              <a:t>31</a:t>
+            </a:fld>
+            <a:endParaRPr lang="en-US"/>
           </a:p>
         </p:txBody>
       </p:sp>
@@ -6394,12 +8752,12 @@
   </p:clrMapOvr>
   <mc:AlternateContent xmlns:mc="http://schemas.openxmlformats.org/markup-compatibility/2006" xmlns:p14="http://schemas.microsoft.com/office/powerpoint/2010/main">
     <mc:Choice Requires="p14">
-      <p:transition spd="slow" p14:dur="1200">
-        <p14:prism/>
+      <p:transition spd="slow" p14:dur="2000">
+        <p14:prism isContent="1"/>
       </p:transition>
     </mc:Choice>
     <mc:Fallback xmlns="">
-      <p:transition xmlns:p14="http://schemas.microsoft.com/office/powerpoint/2010/main" spd="slow">
+      <p:transition spd="slow">
         <p:fade/>
       </p:transition>
     </mc:Fallback>
@@ -6442,7 +8800,9 @@
         </p:nvSpPr>
         <p:spPr/>
         <p:txBody>
-          <a:bodyPr/>
+          <a:bodyPr>
+            <a:normAutofit fontScale="90000"/>
+          </a:bodyPr>
           <a:lstStyle/>
           <a:p>
             <a:r>
@@ -6499,6 +8859,92 @@
               <a:rPr lang="en-US" dirty="0"/>
               <a:t>Migrations have a timestamp of YYYYMMDDHHMMSS</a:t>
             </a:r>
+          </a:p>
+        </p:txBody>
+      </p:sp>
+      <p:sp>
+        <p:nvSpPr>
+          <p:cNvPr id="4" name="Date Placeholder 3">
+            <a:extLst>
+              <a:ext uri="{FF2B5EF4-FFF2-40B4-BE49-F238E27FC236}">
+                <a16:creationId xmlns:a16="http://schemas.microsoft.com/office/drawing/2014/main" id="{78220949-C30E-D8F7-EF61-30B61C22A4A9}"/>
+              </a:ext>
+            </a:extLst>
+          </p:cNvPr>
+          <p:cNvSpPr>
+            <a:spLocks noGrp="1"/>
+          </p:cNvSpPr>
+          <p:nvPr>
+            <p:ph type="dt" sz="half" idx="10"/>
+          </p:nvPr>
+        </p:nvSpPr>
+        <p:spPr/>
+        <p:txBody>
+          <a:bodyPr/>
+          <a:lstStyle/>
+          <a:p>
+            <a:fld id="{AEAD5367-C4CF-DA47-BD2F-C5E5987551C7}" type="datetime1">
+              <a:rPr lang="en-US" smtClean="0"/>
+              <a:t>10/8/26</a:t>
+            </a:fld>
+            <a:endParaRPr lang="en-US"/>
+          </a:p>
+        </p:txBody>
+      </p:sp>
+      <p:sp>
+        <p:nvSpPr>
+          <p:cNvPr id="5" name="Footer Placeholder 4">
+            <a:extLst>
+              <a:ext uri="{FF2B5EF4-FFF2-40B4-BE49-F238E27FC236}">
+                <a16:creationId xmlns:a16="http://schemas.microsoft.com/office/drawing/2014/main" id="{30BC3CB3-C466-E4B9-8E6E-6C2E3D84BAC4}"/>
+              </a:ext>
+            </a:extLst>
+          </p:cNvPr>
+          <p:cNvSpPr>
+            <a:spLocks noGrp="1"/>
+          </p:cNvSpPr>
+          <p:nvPr>
+            <p:ph type="ftr" sz="quarter" idx="11"/>
+          </p:nvPr>
+        </p:nvSpPr>
+        <p:spPr/>
+        <p:txBody>
+          <a:bodyPr/>
+          <a:lstStyle/>
+          <a:p>
+            <a:r>
+              <a:rPr lang="en-US"/>
+              <a:t>© Steve Beaty and others as cited</a:t>
+            </a:r>
+          </a:p>
+        </p:txBody>
+      </p:sp>
+      <p:sp>
+        <p:nvSpPr>
+          <p:cNvPr id="6" name="Slide Number Placeholder 5">
+            <a:extLst>
+              <a:ext uri="{FF2B5EF4-FFF2-40B4-BE49-F238E27FC236}">
+                <a16:creationId xmlns:a16="http://schemas.microsoft.com/office/drawing/2014/main" id="{1BA3EBE5-D954-52C8-C270-E1544BFC463C}"/>
+              </a:ext>
+            </a:extLst>
+          </p:cNvPr>
+          <p:cNvSpPr>
+            <a:spLocks noGrp="1"/>
+          </p:cNvSpPr>
+          <p:nvPr>
+            <p:ph type="sldNum" sz="quarter" idx="12"/>
+          </p:nvPr>
+        </p:nvSpPr>
+        <p:spPr/>
+        <p:txBody>
+          <a:bodyPr/>
+          <a:lstStyle/>
+          <a:p>
+            <a:fld id="{5CA8E750-09AF-F04A-AC61-93A8E70A6AD8}" type="slidenum">
+              <a:rPr lang="en-US" smtClean="0"/>
+              <a:t>32</a:t>
+            </a:fld>
+            <a:endParaRPr lang="en-US"/>
           </a:p>
         </p:txBody>
       </p:sp>
@@ -6514,12 +8960,12 @@
   </p:clrMapOvr>
   <mc:AlternateContent xmlns:mc="http://schemas.openxmlformats.org/markup-compatibility/2006" xmlns:p14="http://schemas.microsoft.com/office/powerpoint/2010/main">
     <mc:Choice Requires="p14">
-      <p:transition spd="slow" p14:dur="1200">
-        <p14:prism/>
+      <p:transition spd="slow" p14:dur="2000">
+        <p14:prism isContent="1"/>
       </p:transition>
     </mc:Choice>
     <mc:Fallback xmlns="">
-      <p:transition xmlns:p14="http://schemas.microsoft.com/office/powerpoint/2010/main" spd="slow">
+      <p:transition spd="slow">
         <p:fade/>
       </p:transition>
     </mc:Fallback>
@@ -6562,7 +9008,9 @@
         </p:nvSpPr>
         <p:spPr/>
         <p:txBody>
-          <a:bodyPr/>
+          <a:bodyPr>
+            <a:normAutofit fontScale="90000"/>
+          </a:bodyPr>
           <a:lstStyle/>
           <a:p>
             <a:r>
@@ -6591,7 +9039,7 @@
         <p:spPr/>
         <p:txBody>
           <a:bodyPr>
-            <a:normAutofit/>
+            <a:normAutofit lnSpcReduction="10000"/>
           </a:bodyPr>
           <a:lstStyle/>
           <a:p>
@@ -6710,6 +9158,92 @@
           </a:p>
           <a:p>
             <a:endParaRPr lang="en-US" dirty="0"/>
+          </a:p>
+        </p:txBody>
+      </p:sp>
+      <p:sp>
+        <p:nvSpPr>
+          <p:cNvPr id="4" name="Date Placeholder 3">
+            <a:extLst>
+              <a:ext uri="{FF2B5EF4-FFF2-40B4-BE49-F238E27FC236}">
+                <a16:creationId xmlns:a16="http://schemas.microsoft.com/office/drawing/2014/main" id="{8A385831-DF92-29B3-23CE-46785916BFF3}"/>
+              </a:ext>
+            </a:extLst>
+          </p:cNvPr>
+          <p:cNvSpPr>
+            <a:spLocks noGrp="1"/>
+          </p:cNvSpPr>
+          <p:nvPr>
+            <p:ph type="dt" sz="half" idx="10"/>
+          </p:nvPr>
+        </p:nvSpPr>
+        <p:spPr/>
+        <p:txBody>
+          <a:bodyPr/>
+          <a:lstStyle/>
+          <a:p>
+            <a:fld id="{17F6B6DD-23C2-9D4E-9F52-82FAB42A4914}" type="datetime1">
+              <a:rPr lang="en-US" smtClean="0"/>
+              <a:t>10/8/26</a:t>
+            </a:fld>
+            <a:endParaRPr lang="en-US"/>
+          </a:p>
+        </p:txBody>
+      </p:sp>
+      <p:sp>
+        <p:nvSpPr>
+          <p:cNvPr id="5" name="Footer Placeholder 4">
+            <a:extLst>
+              <a:ext uri="{FF2B5EF4-FFF2-40B4-BE49-F238E27FC236}">
+                <a16:creationId xmlns:a16="http://schemas.microsoft.com/office/drawing/2014/main" id="{1314735B-9F1F-5637-4A8B-E8CD85F1EA0C}"/>
+              </a:ext>
+            </a:extLst>
+          </p:cNvPr>
+          <p:cNvSpPr>
+            <a:spLocks noGrp="1"/>
+          </p:cNvSpPr>
+          <p:nvPr>
+            <p:ph type="ftr" sz="quarter" idx="11"/>
+          </p:nvPr>
+        </p:nvSpPr>
+        <p:spPr/>
+        <p:txBody>
+          <a:bodyPr/>
+          <a:lstStyle/>
+          <a:p>
+            <a:r>
+              <a:rPr lang="en-US"/>
+              <a:t>© Steve Beaty and others as cited</a:t>
+            </a:r>
+          </a:p>
+        </p:txBody>
+      </p:sp>
+      <p:sp>
+        <p:nvSpPr>
+          <p:cNvPr id="6" name="Slide Number Placeholder 5">
+            <a:extLst>
+              <a:ext uri="{FF2B5EF4-FFF2-40B4-BE49-F238E27FC236}">
+                <a16:creationId xmlns:a16="http://schemas.microsoft.com/office/drawing/2014/main" id="{583AA3A6-93ED-D187-0E62-230AD97998FC}"/>
+              </a:ext>
+            </a:extLst>
+          </p:cNvPr>
+          <p:cNvSpPr>
+            <a:spLocks noGrp="1"/>
+          </p:cNvSpPr>
+          <p:nvPr>
+            <p:ph type="sldNum" sz="quarter" idx="12"/>
+          </p:nvPr>
+        </p:nvSpPr>
+        <p:spPr/>
+        <p:txBody>
+          <a:bodyPr/>
+          <a:lstStyle/>
+          <a:p>
+            <a:fld id="{5CA8E750-09AF-F04A-AC61-93A8E70A6AD8}" type="slidenum">
+              <a:rPr lang="en-US" smtClean="0"/>
+              <a:t>33</a:t>
+            </a:fld>
+            <a:endParaRPr lang="en-US"/>
           </a:p>
         </p:txBody>
       </p:sp>
@@ -6773,7 +9307,9 @@
         </p:nvSpPr>
         <p:spPr/>
         <p:txBody>
-          <a:bodyPr/>
+          <a:bodyPr>
+            <a:normAutofit fontScale="90000"/>
+          </a:bodyPr>
           <a:lstStyle/>
           <a:p>
             <a:r>
@@ -6802,7 +9338,7 @@
         <p:spPr/>
         <p:txBody>
           <a:bodyPr>
-            <a:normAutofit/>
+            <a:normAutofit fontScale="92500"/>
           </a:bodyPr>
           <a:lstStyle/>
           <a:p>
@@ -6934,6 +9470,92 @@
           </a:p>
           <a:p>
             <a:endParaRPr lang="en-US" dirty="0"/>
+          </a:p>
+        </p:txBody>
+      </p:sp>
+      <p:sp>
+        <p:nvSpPr>
+          <p:cNvPr id="4" name="Date Placeholder 3">
+            <a:extLst>
+              <a:ext uri="{FF2B5EF4-FFF2-40B4-BE49-F238E27FC236}">
+                <a16:creationId xmlns:a16="http://schemas.microsoft.com/office/drawing/2014/main" id="{F16FE982-F57F-7CD8-4F47-B46D936EC1F3}"/>
+              </a:ext>
+            </a:extLst>
+          </p:cNvPr>
+          <p:cNvSpPr>
+            <a:spLocks noGrp="1"/>
+          </p:cNvSpPr>
+          <p:nvPr>
+            <p:ph type="dt" sz="half" idx="10"/>
+          </p:nvPr>
+        </p:nvSpPr>
+        <p:spPr/>
+        <p:txBody>
+          <a:bodyPr/>
+          <a:lstStyle/>
+          <a:p>
+            <a:fld id="{89C986B6-F87F-B940-A7C7-33D490842647}" type="datetime1">
+              <a:rPr lang="en-US" smtClean="0"/>
+              <a:t>10/8/26</a:t>
+            </a:fld>
+            <a:endParaRPr lang="en-US"/>
+          </a:p>
+        </p:txBody>
+      </p:sp>
+      <p:sp>
+        <p:nvSpPr>
+          <p:cNvPr id="5" name="Footer Placeholder 4">
+            <a:extLst>
+              <a:ext uri="{FF2B5EF4-FFF2-40B4-BE49-F238E27FC236}">
+                <a16:creationId xmlns:a16="http://schemas.microsoft.com/office/drawing/2014/main" id="{7C52EA50-F520-35A7-A3C8-0A676B32303E}"/>
+              </a:ext>
+            </a:extLst>
+          </p:cNvPr>
+          <p:cNvSpPr>
+            <a:spLocks noGrp="1"/>
+          </p:cNvSpPr>
+          <p:nvPr>
+            <p:ph type="ftr" sz="quarter" idx="11"/>
+          </p:nvPr>
+        </p:nvSpPr>
+        <p:spPr/>
+        <p:txBody>
+          <a:bodyPr/>
+          <a:lstStyle/>
+          <a:p>
+            <a:r>
+              <a:rPr lang="en-US"/>
+              <a:t>© Steve Beaty and others as cited</a:t>
+            </a:r>
+          </a:p>
+        </p:txBody>
+      </p:sp>
+      <p:sp>
+        <p:nvSpPr>
+          <p:cNvPr id="6" name="Slide Number Placeholder 5">
+            <a:extLst>
+              <a:ext uri="{FF2B5EF4-FFF2-40B4-BE49-F238E27FC236}">
+                <a16:creationId xmlns:a16="http://schemas.microsoft.com/office/drawing/2014/main" id="{9A5C456F-ED09-FD95-E13D-859A5A6E9754}"/>
+              </a:ext>
+            </a:extLst>
+          </p:cNvPr>
+          <p:cNvSpPr>
+            <a:spLocks noGrp="1"/>
+          </p:cNvSpPr>
+          <p:nvPr>
+            <p:ph type="sldNum" sz="quarter" idx="12"/>
+          </p:nvPr>
+        </p:nvSpPr>
+        <p:spPr/>
+        <p:txBody>
+          <a:bodyPr/>
+          <a:lstStyle/>
+          <a:p>
+            <a:fld id="{5CA8E750-09AF-F04A-AC61-93A8E70A6AD8}" type="slidenum">
+              <a:rPr lang="en-US" smtClean="0"/>
+              <a:t>34</a:t>
+            </a:fld>
+            <a:endParaRPr lang="en-US"/>
           </a:p>
         </p:txBody>
       </p:sp>
@@ -6947,6 +9569,18 @@
   <p:clrMapOvr>
     <a:masterClrMapping/>
   </p:clrMapOvr>
+  <mc:AlternateContent xmlns:mc="http://schemas.openxmlformats.org/markup-compatibility/2006" xmlns:p14="http://schemas.microsoft.com/office/powerpoint/2010/main">
+    <mc:Choice Requires="p14">
+      <p:transition spd="slow" p14:dur="2000">
+        <p14:prism isContent="1"/>
+      </p:transition>
+    </mc:Choice>
+    <mc:Fallback xmlns="">
+      <p:transition spd="slow">
+        <p:fade/>
+      </p:transition>
+    </mc:Fallback>
+  </mc:AlternateContent>
 </p:sld>
 </file>
 
@@ -6985,7 +9619,9 @@
         </p:nvSpPr>
         <p:spPr/>
         <p:txBody>
-          <a:bodyPr/>
+          <a:bodyPr>
+            <a:normAutofit fontScale="90000"/>
+          </a:bodyPr>
           <a:lstStyle/>
           <a:p>
             <a:r>
@@ -7014,7 +9650,7 @@
         <p:spPr/>
         <p:txBody>
           <a:bodyPr>
-            <a:normAutofit fontScale="92500" lnSpcReduction="10000"/>
+            <a:normAutofit fontScale="92500" lnSpcReduction="20000"/>
           </a:bodyPr>
           <a:lstStyle/>
           <a:p>
@@ -7064,6 +9700,92 @@
               <a:rPr lang="en-US" dirty="0"/>
               <a:t>A person has many friends (hopefully) and each has many other friends</a:t>
             </a:r>
+          </a:p>
+        </p:txBody>
+      </p:sp>
+      <p:sp>
+        <p:nvSpPr>
+          <p:cNvPr id="3" name="Date Placeholder 2">
+            <a:extLst>
+              <a:ext uri="{FF2B5EF4-FFF2-40B4-BE49-F238E27FC236}">
+                <a16:creationId xmlns:a16="http://schemas.microsoft.com/office/drawing/2014/main" id="{87B9DB30-FDC2-2846-078F-42F5BC1B5842}"/>
+              </a:ext>
+            </a:extLst>
+          </p:cNvPr>
+          <p:cNvSpPr>
+            <a:spLocks noGrp="1"/>
+          </p:cNvSpPr>
+          <p:nvPr>
+            <p:ph type="dt" sz="half" idx="10"/>
+          </p:nvPr>
+        </p:nvSpPr>
+        <p:spPr/>
+        <p:txBody>
+          <a:bodyPr/>
+          <a:lstStyle/>
+          <a:p>
+            <a:fld id="{037B160D-AC73-4B45-AE2A-1736FAE52CAE}" type="datetime1">
+              <a:rPr lang="en-US" smtClean="0"/>
+              <a:t>10/8/26</a:t>
+            </a:fld>
+            <a:endParaRPr lang="en-US"/>
+          </a:p>
+        </p:txBody>
+      </p:sp>
+      <p:sp>
+        <p:nvSpPr>
+          <p:cNvPr id="5" name="Footer Placeholder 4">
+            <a:extLst>
+              <a:ext uri="{FF2B5EF4-FFF2-40B4-BE49-F238E27FC236}">
+                <a16:creationId xmlns:a16="http://schemas.microsoft.com/office/drawing/2014/main" id="{CACEF84E-FD95-CD78-49EA-F35BC09E7F0F}"/>
+              </a:ext>
+            </a:extLst>
+          </p:cNvPr>
+          <p:cNvSpPr>
+            <a:spLocks noGrp="1"/>
+          </p:cNvSpPr>
+          <p:nvPr>
+            <p:ph type="ftr" sz="quarter" idx="11"/>
+          </p:nvPr>
+        </p:nvSpPr>
+        <p:spPr/>
+        <p:txBody>
+          <a:bodyPr/>
+          <a:lstStyle/>
+          <a:p>
+            <a:r>
+              <a:rPr lang="en-US"/>
+              <a:t>© Steve Beaty and others as cited</a:t>
+            </a:r>
+          </a:p>
+        </p:txBody>
+      </p:sp>
+      <p:sp>
+        <p:nvSpPr>
+          <p:cNvPr id="6" name="Slide Number Placeholder 5">
+            <a:extLst>
+              <a:ext uri="{FF2B5EF4-FFF2-40B4-BE49-F238E27FC236}">
+                <a16:creationId xmlns:a16="http://schemas.microsoft.com/office/drawing/2014/main" id="{C90013DC-7981-F22E-AE40-ED5AB12DC058}"/>
+              </a:ext>
+            </a:extLst>
+          </p:cNvPr>
+          <p:cNvSpPr>
+            <a:spLocks noGrp="1"/>
+          </p:cNvSpPr>
+          <p:nvPr>
+            <p:ph type="sldNum" sz="quarter" idx="12"/>
+          </p:nvPr>
+        </p:nvSpPr>
+        <p:spPr/>
+        <p:txBody>
+          <a:bodyPr/>
+          <a:lstStyle/>
+          <a:p>
+            <a:fld id="{5CA8E750-09AF-F04A-AC61-93A8E70A6AD8}" type="slidenum">
+              <a:rPr lang="en-US" smtClean="0"/>
+              <a:t>35</a:t>
+            </a:fld>
+            <a:endParaRPr lang="en-US"/>
           </a:p>
         </p:txBody>
       </p:sp>
@@ -7079,12 +9801,12 @@
   </p:clrMapOvr>
   <mc:AlternateContent xmlns:mc="http://schemas.openxmlformats.org/markup-compatibility/2006" xmlns:p14="http://schemas.microsoft.com/office/powerpoint/2010/main">
     <mc:Choice Requires="p14">
-      <p:transition spd="slow" p14:dur="1200">
-        <p14:prism/>
+      <p:transition spd="slow" p14:dur="2000">
+        <p14:prism isContent="1"/>
       </p:transition>
     </mc:Choice>
     <mc:Fallback xmlns="">
-      <p:transition xmlns:p14="http://schemas.microsoft.com/office/powerpoint/2010/main" spd="slow">
+      <p:transition spd="slow">
         <p:fade/>
       </p:transition>
     </mc:Fallback>
@@ -7127,7 +9849,9 @@
         </p:nvSpPr>
         <p:spPr/>
         <p:txBody>
-          <a:bodyPr/>
+          <a:bodyPr>
+            <a:normAutofit fontScale="90000"/>
+          </a:bodyPr>
           <a:lstStyle/>
           <a:p>
             <a:r>
@@ -7156,7 +9880,7 @@
         <p:spPr/>
         <p:txBody>
           <a:bodyPr>
-            <a:normAutofit fontScale="85000" lnSpcReduction="20000"/>
+            <a:normAutofit fontScale="77500" lnSpcReduction="20000"/>
           </a:bodyPr>
           <a:lstStyle/>
           <a:p>
@@ -7313,6 +10037,92 @@
           </a:p>
           <a:p>
             <a:endParaRPr lang="en-US" dirty="0"/>
+          </a:p>
+        </p:txBody>
+      </p:sp>
+      <p:sp>
+        <p:nvSpPr>
+          <p:cNvPr id="4" name="Date Placeholder 3">
+            <a:extLst>
+              <a:ext uri="{FF2B5EF4-FFF2-40B4-BE49-F238E27FC236}">
+                <a16:creationId xmlns:a16="http://schemas.microsoft.com/office/drawing/2014/main" id="{B71BF378-E8ED-B5DA-5FD5-5F3F4B8110C3}"/>
+              </a:ext>
+            </a:extLst>
+          </p:cNvPr>
+          <p:cNvSpPr>
+            <a:spLocks noGrp="1"/>
+          </p:cNvSpPr>
+          <p:nvPr>
+            <p:ph type="dt" sz="half" idx="10"/>
+          </p:nvPr>
+        </p:nvSpPr>
+        <p:spPr/>
+        <p:txBody>
+          <a:bodyPr/>
+          <a:lstStyle/>
+          <a:p>
+            <a:fld id="{61ECE1A9-1927-E24A-A493-BE2525A11D3B}" type="datetime1">
+              <a:rPr lang="en-US" smtClean="0"/>
+              <a:t>10/8/26</a:t>
+            </a:fld>
+            <a:endParaRPr lang="en-US"/>
+          </a:p>
+        </p:txBody>
+      </p:sp>
+      <p:sp>
+        <p:nvSpPr>
+          <p:cNvPr id="5" name="Footer Placeholder 4">
+            <a:extLst>
+              <a:ext uri="{FF2B5EF4-FFF2-40B4-BE49-F238E27FC236}">
+                <a16:creationId xmlns:a16="http://schemas.microsoft.com/office/drawing/2014/main" id="{4CE3B232-9601-0F9E-07BE-BD1CA746F9A4}"/>
+              </a:ext>
+            </a:extLst>
+          </p:cNvPr>
+          <p:cNvSpPr>
+            <a:spLocks noGrp="1"/>
+          </p:cNvSpPr>
+          <p:nvPr>
+            <p:ph type="ftr" sz="quarter" idx="11"/>
+          </p:nvPr>
+        </p:nvSpPr>
+        <p:spPr/>
+        <p:txBody>
+          <a:bodyPr/>
+          <a:lstStyle/>
+          <a:p>
+            <a:r>
+              <a:rPr lang="en-US"/>
+              <a:t>© Steve Beaty and others as cited</a:t>
+            </a:r>
+          </a:p>
+        </p:txBody>
+      </p:sp>
+      <p:sp>
+        <p:nvSpPr>
+          <p:cNvPr id="6" name="Slide Number Placeholder 5">
+            <a:extLst>
+              <a:ext uri="{FF2B5EF4-FFF2-40B4-BE49-F238E27FC236}">
+                <a16:creationId xmlns:a16="http://schemas.microsoft.com/office/drawing/2014/main" id="{C12F25E5-C576-E991-2F74-9FDD7E909438}"/>
+              </a:ext>
+            </a:extLst>
+          </p:cNvPr>
+          <p:cNvSpPr>
+            <a:spLocks noGrp="1"/>
+          </p:cNvSpPr>
+          <p:nvPr>
+            <p:ph type="sldNum" sz="quarter" idx="12"/>
+          </p:nvPr>
+        </p:nvSpPr>
+        <p:spPr/>
+        <p:txBody>
+          <a:bodyPr/>
+          <a:lstStyle/>
+          <a:p>
+            <a:fld id="{5CA8E750-09AF-F04A-AC61-93A8E70A6AD8}" type="slidenum">
+              <a:rPr lang="en-US" smtClean="0"/>
+              <a:t>36</a:t>
+            </a:fld>
+            <a:endParaRPr lang="en-US"/>
           </a:p>
         </p:txBody>
       </p:sp>
@@ -7376,7 +10186,9 @@
         </p:nvSpPr>
         <p:spPr/>
         <p:txBody>
-          <a:bodyPr/>
+          <a:bodyPr>
+            <a:normAutofit fontScale="90000"/>
+          </a:bodyPr>
           <a:lstStyle/>
           <a:p>
             <a:r>
@@ -7405,7 +10217,7 @@
         <p:spPr/>
         <p:txBody>
           <a:bodyPr>
-            <a:normAutofit fontScale="92500"/>
+            <a:normAutofit fontScale="92500" lnSpcReduction="20000"/>
           </a:bodyPr>
           <a:lstStyle/>
           <a:p>
@@ -7463,6 +10275,92 @@
               <a:rPr lang="en-US" dirty="0"/>
               <a:t>Not automatically generated, we must create</a:t>
             </a:r>
+          </a:p>
+        </p:txBody>
+      </p:sp>
+      <p:sp>
+        <p:nvSpPr>
+          <p:cNvPr id="3" name="Date Placeholder 2">
+            <a:extLst>
+              <a:ext uri="{FF2B5EF4-FFF2-40B4-BE49-F238E27FC236}">
+                <a16:creationId xmlns:a16="http://schemas.microsoft.com/office/drawing/2014/main" id="{3B3956B2-7918-2C25-2D80-C6CA66656728}"/>
+              </a:ext>
+            </a:extLst>
+          </p:cNvPr>
+          <p:cNvSpPr>
+            <a:spLocks noGrp="1"/>
+          </p:cNvSpPr>
+          <p:nvPr>
+            <p:ph type="dt" sz="half" idx="10"/>
+          </p:nvPr>
+        </p:nvSpPr>
+        <p:spPr/>
+        <p:txBody>
+          <a:bodyPr/>
+          <a:lstStyle/>
+          <a:p>
+            <a:fld id="{1B71C4ED-5D0E-5C44-B923-FA3DD1838E13}" type="datetime1">
+              <a:rPr lang="en-US" smtClean="0"/>
+              <a:t>10/8/26</a:t>
+            </a:fld>
+            <a:endParaRPr lang="en-US"/>
+          </a:p>
+        </p:txBody>
+      </p:sp>
+      <p:sp>
+        <p:nvSpPr>
+          <p:cNvPr id="5" name="Footer Placeholder 4">
+            <a:extLst>
+              <a:ext uri="{FF2B5EF4-FFF2-40B4-BE49-F238E27FC236}">
+                <a16:creationId xmlns:a16="http://schemas.microsoft.com/office/drawing/2014/main" id="{D0069F2F-B0C3-0E2F-A9DC-52BE716D4D98}"/>
+              </a:ext>
+            </a:extLst>
+          </p:cNvPr>
+          <p:cNvSpPr>
+            <a:spLocks noGrp="1"/>
+          </p:cNvSpPr>
+          <p:nvPr>
+            <p:ph type="ftr" sz="quarter" idx="11"/>
+          </p:nvPr>
+        </p:nvSpPr>
+        <p:spPr/>
+        <p:txBody>
+          <a:bodyPr/>
+          <a:lstStyle/>
+          <a:p>
+            <a:r>
+              <a:rPr lang="en-US"/>
+              <a:t>© Steve Beaty and others as cited</a:t>
+            </a:r>
+          </a:p>
+        </p:txBody>
+      </p:sp>
+      <p:sp>
+        <p:nvSpPr>
+          <p:cNvPr id="6" name="Slide Number Placeholder 5">
+            <a:extLst>
+              <a:ext uri="{FF2B5EF4-FFF2-40B4-BE49-F238E27FC236}">
+                <a16:creationId xmlns:a16="http://schemas.microsoft.com/office/drawing/2014/main" id="{CD3BD187-DCEE-FC5B-A71D-435B76C3CD19}"/>
+              </a:ext>
+            </a:extLst>
+          </p:cNvPr>
+          <p:cNvSpPr>
+            <a:spLocks noGrp="1"/>
+          </p:cNvSpPr>
+          <p:nvPr>
+            <p:ph type="sldNum" sz="quarter" idx="12"/>
+          </p:nvPr>
+        </p:nvSpPr>
+        <p:spPr/>
+        <p:txBody>
+          <a:bodyPr/>
+          <a:lstStyle/>
+          <a:p>
+            <a:fld id="{5CA8E750-09AF-F04A-AC61-93A8E70A6AD8}" type="slidenum">
+              <a:rPr lang="en-US" smtClean="0"/>
+              <a:t>37</a:t>
+            </a:fld>
+            <a:endParaRPr lang="en-US"/>
           </a:p>
         </p:txBody>
       </p:sp>
@@ -7478,12 +10376,12 @@
   </p:clrMapOvr>
   <mc:AlternateContent xmlns:mc="http://schemas.openxmlformats.org/markup-compatibility/2006" xmlns:p14="http://schemas.microsoft.com/office/powerpoint/2010/main">
     <mc:Choice Requires="p14">
-      <p:transition spd="slow" p14:dur="1200">
-        <p14:prism/>
+      <p:transition spd="slow" p14:dur="2000">
+        <p14:prism isContent="1"/>
       </p:transition>
     </mc:Choice>
     <mc:Fallback xmlns="">
-      <p:transition xmlns:p14="http://schemas.microsoft.com/office/powerpoint/2010/main" spd="slow">
+      <p:transition spd="slow">
         <p:fade/>
       </p:transition>
     </mc:Fallback>
@@ -7526,7 +10424,9 @@
         </p:nvSpPr>
         <p:spPr/>
         <p:txBody>
-          <a:bodyPr/>
+          <a:bodyPr>
+            <a:normAutofit fontScale="90000"/>
+          </a:bodyPr>
           <a:lstStyle/>
           <a:p>
             <a:r>
@@ -7575,6 +10475,92 @@
               <a:rPr lang="en-US" dirty="0"/>
               <a:t>Unique requires only one reference</a:t>
             </a:r>
+          </a:p>
+        </p:txBody>
+      </p:sp>
+      <p:sp>
+        <p:nvSpPr>
+          <p:cNvPr id="4" name="Date Placeholder 3">
+            <a:extLst>
+              <a:ext uri="{FF2B5EF4-FFF2-40B4-BE49-F238E27FC236}">
+                <a16:creationId xmlns:a16="http://schemas.microsoft.com/office/drawing/2014/main" id="{0F18EBE5-A411-B15B-EA39-F8D2F831E173}"/>
+              </a:ext>
+            </a:extLst>
+          </p:cNvPr>
+          <p:cNvSpPr>
+            <a:spLocks noGrp="1"/>
+          </p:cNvSpPr>
+          <p:nvPr>
+            <p:ph type="dt" sz="half" idx="10"/>
+          </p:nvPr>
+        </p:nvSpPr>
+        <p:spPr/>
+        <p:txBody>
+          <a:bodyPr/>
+          <a:lstStyle/>
+          <a:p>
+            <a:fld id="{355D4820-FEA8-7C48-82CB-8C83049F9692}" type="datetime1">
+              <a:rPr lang="en-US" smtClean="0"/>
+              <a:t>10/8/26</a:t>
+            </a:fld>
+            <a:endParaRPr lang="en-US"/>
+          </a:p>
+        </p:txBody>
+      </p:sp>
+      <p:sp>
+        <p:nvSpPr>
+          <p:cNvPr id="5" name="Footer Placeholder 4">
+            <a:extLst>
+              <a:ext uri="{FF2B5EF4-FFF2-40B4-BE49-F238E27FC236}">
+                <a16:creationId xmlns:a16="http://schemas.microsoft.com/office/drawing/2014/main" id="{B961F178-4968-8AEE-FC96-88B724FAA5C5}"/>
+              </a:ext>
+            </a:extLst>
+          </p:cNvPr>
+          <p:cNvSpPr>
+            <a:spLocks noGrp="1"/>
+          </p:cNvSpPr>
+          <p:nvPr>
+            <p:ph type="ftr" sz="quarter" idx="11"/>
+          </p:nvPr>
+        </p:nvSpPr>
+        <p:spPr/>
+        <p:txBody>
+          <a:bodyPr/>
+          <a:lstStyle/>
+          <a:p>
+            <a:r>
+              <a:rPr lang="en-US"/>
+              <a:t>© Steve Beaty and others as cited</a:t>
+            </a:r>
+          </a:p>
+        </p:txBody>
+      </p:sp>
+      <p:sp>
+        <p:nvSpPr>
+          <p:cNvPr id="6" name="Slide Number Placeholder 5">
+            <a:extLst>
+              <a:ext uri="{FF2B5EF4-FFF2-40B4-BE49-F238E27FC236}">
+                <a16:creationId xmlns:a16="http://schemas.microsoft.com/office/drawing/2014/main" id="{32A29AAB-DD9E-5373-6A57-EA75C59B31D0}"/>
+              </a:ext>
+            </a:extLst>
+          </p:cNvPr>
+          <p:cNvSpPr>
+            <a:spLocks noGrp="1"/>
+          </p:cNvSpPr>
+          <p:nvPr>
+            <p:ph type="sldNum" sz="quarter" idx="12"/>
+          </p:nvPr>
+        </p:nvSpPr>
+        <p:spPr/>
+        <p:txBody>
+          <a:bodyPr/>
+          <a:lstStyle/>
+          <a:p>
+            <a:fld id="{5CA8E750-09AF-F04A-AC61-93A8E70A6AD8}" type="slidenum">
+              <a:rPr lang="en-US" smtClean="0"/>
+              <a:t>38</a:t>
+            </a:fld>
+            <a:endParaRPr lang="en-US"/>
           </a:p>
         </p:txBody>
       </p:sp>
@@ -7590,12 +10576,12 @@
   </p:clrMapOvr>
   <mc:AlternateContent xmlns:mc="http://schemas.openxmlformats.org/markup-compatibility/2006" xmlns:p14="http://schemas.microsoft.com/office/powerpoint/2010/main">
     <mc:Choice Requires="p14">
-      <p:transition spd="slow" p14:dur="1200">
-        <p14:prism/>
+      <p:transition spd="slow" p14:dur="2000">
+        <p14:prism isContent="1"/>
       </p:transition>
     </mc:Choice>
     <mc:Fallback xmlns="">
-      <p:transition xmlns:p14="http://schemas.microsoft.com/office/powerpoint/2010/main" spd="slow">
+      <p:transition spd="slow">
         <p:fade/>
       </p:transition>
     </mc:Fallback>
@@ -7638,7 +10624,9 @@
         </p:nvSpPr>
         <p:spPr/>
         <p:txBody>
-          <a:bodyPr/>
+          <a:bodyPr>
+            <a:normAutofit fontScale="90000"/>
+          </a:bodyPr>
           <a:lstStyle/>
           <a:p>
             <a:r>
@@ -7673,6 +10661,92 @@
               <a:rPr lang="en-US" dirty="0"/>
               <a:t>An advisor has many students, a student has one advisor</a:t>
             </a:r>
+          </a:p>
+        </p:txBody>
+      </p:sp>
+      <p:sp>
+        <p:nvSpPr>
+          <p:cNvPr id="4" name="Date Placeholder 3">
+            <a:extLst>
+              <a:ext uri="{FF2B5EF4-FFF2-40B4-BE49-F238E27FC236}">
+                <a16:creationId xmlns:a16="http://schemas.microsoft.com/office/drawing/2014/main" id="{FDBC8DE6-CE74-CDD3-97FF-EC77AC07BF00}"/>
+              </a:ext>
+            </a:extLst>
+          </p:cNvPr>
+          <p:cNvSpPr>
+            <a:spLocks noGrp="1"/>
+          </p:cNvSpPr>
+          <p:nvPr>
+            <p:ph type="dt" sz="half" idx="10"/>
+          </p:nvPr>
+        </p:nvSpPr>
+        <p:spPr/>
+        <p:txBody>
+          <a:bodyPr/>
+          <a:lstStyle/>
+          <a:p>
+            <a:fld id="{C5E972AA-1FC1-D74C-B331-45BDD4AC73E4}" type="datetime1">
+              <a:rPr lang="en-US" smtClean="0"/>
+              <a:t>10/8/26</a:t>
+            </a:fld>
+            <a:endParaRPr lang="en-US"/>
+          </a:p>
+        </p:txBody>
+      </p:sp>
+      <p:sp>
+        <p:nvSpPr>
+          <p:cNvPr id="5" name="Footer Placeholder 4">
+            <a:extLst>
+              <a:ext uri="{FF2B5EF4-FFF2-40B4-BE49-F238E27FC236}">
+                <a16:creationId xmlns:a16="http://schemas.microsoft.com/office/drawing/2014/main" id="{5E27CEA5-FD14-414F-5298-AD1ADC739D9E}"/>
+              </a:ext>
+            </a:extLst>
+          </p:cNvPr>
+          <p:cNvSpPr>
+            <a:spLocks noGrp="1"/>
+          </p:cNvSpPr>
+          <p:nvPr>
+            <p:ph type="ftr" sz="quarter" idx="11"/>
+          </p:nvPr>
+        </p:nvSpPr>
+        <p:spPr/>
+        <p:txBody>
+          <a:bodyPr/>
+          <a:lstStyle/>
+          <a:p>
+            <a:r>
+              <a:rPr lang="en-US"/>
+              <a:t>© Steve Beaty and others as cited</a:t>
+            </a:r>
+          </a:p>
+        </p:txBody>
+      </p:sp>
+      <p:sp>
+        <p:nvSpPr>
+          <p:cNvPr id="6" name="Slide Number Placeholder 5">
+            <a:extLst>
+              <a:ext uri="{FF2B5EF4-FFF2-40B4-BE49-F238E27FC236}">
+                <a16:creationId xmlns:a16="http://schemas.microsoft.com/office/drawing/2014/main" id="{C3166298-3122-02EA-B0BF-572BFB2AAB1B}"/>
+              </a:ext>
+            </a:extLst>
+          </p:cNvPr>
+          <p:cNvSpPr>
+            <a:spLocks noGrp="1"/>
+          </p:cNvSpPr>
+          <p:nvPr>
+            <p:ph type="sldNum" sz="quarter" idx="12"/>
+          </p:nvPr>
+        </p:nvSpPr>
+        <p:spPr/>
+        <p:txBody>
+          <a:bodyPr/>
+          <a:lstStyle/>
+          <a:p>
+            <a:fld id="{5CA8E750-09AF-F04A-AC61-93A8E70A6AD8}" type="slidenum">
+              <a:rPr lang="en-US" smtClean="0"/>
+              <a:t>39</a:t>
+            </a:fld>
+            <a:endParaRPr lang="en-US"/>
           </a:p>
         </p:txBody>
       </p:sp>
@@ -7688,12 +10762,12 @@
   </p:clrMapOvr>
   <mc:AlternateContent xmlns:mc="http://schemas.openxmlformats.org/markup-compatibility/2006" xmlns:p14="http://schemas.microsoft.com/office/powerpoint/2010/main">
     <mc:Choice Requires="p14">
-      <p:transition spd="slow" p14:dur="1200">
-        <p14:prism/>
+      <p:transition spd="slow" p14:dur="2000">
+        <p14:prism isContent="1"/>
       </p:transition>
     </mc:Choice>
     <mc:Fallback xmlns="">
-      <p:transition xmlns:p14="http://schemas.microsoft.com/office/powerpoint/2010/main" spd="slow">
+      <p:transition spd="slow">
         <p:fade/>
       </p:transition>
     </mc:Fallback>
@@ -7736,7 +10810,9 @@
         </p:nvSpPr>
         <p:spPr/>
         <p:txBody>
-          <a:bodyPr/>
+          <a:bodyPr>
+            <a:normAutofit fontScale="90000"/>
+          </a:bodyPr>
           <a:lstStyle/>
           <a:p>
             <a:r>
@@ -7813,6 +10889,92 @@
               <a:rPr lang="en-US" dirty="0"/>
               <a:t>Model is first</a:t>
             </a:r>
+          </a:p>
+        </p:txBody>
+      </p:sp>
+      <p:sp>
+        <p:nvSpPr>
+          <p:cNvPr id="4" name="Date Placeholder 3">
+            <a:extLst>
+              <a:ext uri="{FF2B5EF4-FFF2-40B4-BE49-F238E27FC236}">
+                <a16:creationId xmlns:a16="http://schemas.microsoft.com/office/drawing/2014/main" id="{99245AB9-DF69-84BC-CE13-AC0CF490E879}"/>
+              </a:ext>
+            </a:extLst>
+          </p:cNvPr>
+          <p:cNvSpPr>
+            <a:spLocks noGrp="1"/>
+          </p:cNvSpPr>
+          <p:nvPr>
+            <p:ph type="dt" sz="half" idx="10"/>
+          </p:nvPr>
+        </p:nvSpPr>
+        <p:spPr/>
+        <p:txBody>
+          <a:bodyPr/>
+          <a:lstStyle/>
+          <a:p>
+            <a:fld id="{00855A99-8B1B-AF4B-8470-DAACAD6E40B7}" type="datetime1">
+              <a:rPr lang="en-US" smtClean="0"/>
+              <a:t>10/8/26</a:t>
+            </a:fld>
+            <a:endParaRPr lang="en-US"/>
+          </a:p>
+        </p:txBody>
+      </p:sp>
+      <p:sp>
+        <p:nvSpPr>
+          <p:cNvPr id="5" name="Footer Placeholder 4">
+            <a:extLst>
+              <a:ext uri="{FF2B5EF4-FFF2-40B4-BE49-F238E27FC236}">
+                <a16:creationId xmlns:a16="http://schemas.microsoft.com/office/drawing/2014/main" id="{42460C6E-003D-5C12-79A8-75F3AE2EAD15}"/>
+              </a:ext>
+            </a:extLst>
+          </p:cNvPr>
+          <p:cNvSpPr>
+            <a:spLocks noGrp="1"/>
+          </p:cNvSpPr>
+          <p:nvPr>
+            <p:ph type="ftr" sz="quarter" idx="11"/>
+          </p:nvPr>
+        </p:nvSpPr>
+        <p:spPr/>
+        <p:txBody>
+          <a:bodyPr/>
+          <a:lstStyle/>
+          <a:p>
+            <a:r>
+              <a:rPr lang="en-US"/>
+              <a:t>© Steve Beaty and others as cited</a:t>
+            </a:r>
+          </a:p>
+        </p:txBody>
+      </p:sp>
+      <p:sp>
+        <p:nvSpPr>
+          <p:cNvPr id="6" name="Slide Number Placeholder 5">
+            <a:extLst>
+              <a:ext uri="{FF2B5EF4-FFF2-40B4-BE49-F238E27FC236}">
+                <a16:creationId xmlns:a16="http://schemas.microsoft.com/office/drawing/2014/main" id="{9144182D-B5F0-34B2-8DDB-736AF00DE975}"/>
+              </a:ext>
+            </a:extLst>
+          </p:cNvPr>
+          <p:cNvSpPr>
+            <a:spLocks noGrp="1"/>
+          </p:cNvSpPr>
+          <p:nvPr>
+            <p:ph type="sldNum" sz="quarter" idx="12"/>
+          </p:nvPr>
+        </p:nvSpPr>
+        <p:spPr/>
+        <p:txBody>
+          <a:bodyPr/>
+          <a:lstStyle/>
+          <a:p>
+            <a:fld id="{5CA8E750-09AF-F04A-AC61-93A8E70A6AD8}" type="slidenum">
+              <a:rPr lang="en-US" smtClean="0"/>
+              <a:t>4</a:t>
+            </a:fld>
+            <a:endParaRPr lang="en-US"/>
           </a:p>
         </p:txBody>
       </p:sp>
@@ -7828,12 +10990,12 @@
   </p:clrMapOvr>
   <mc:AlternateContent xmlns:mc="http://schemas.openxmlformats.org/markup-compatibility/2006" xmlns:p14="http://schemas.microsoft.com/office/powerpoint/2010/main">
     <mc:Choice Requires="p14">
-      <p:transition spd="slow" p14:dur="1200">
-        <p14:prism/>
+      <p:transition spd="slow" p14:dur="2000">
+        <p14:prism isContent="1"/>
       </p:transition>
     </mc:Choice>
     <mc:Fallback xmlns="">
-      <p:transition xmlns:p14="http://schemas.microsoft.com/office/powerpoint/2010/main" spd="slow">
+      <p:transition spd="slow">
         <p:fade/>
       </p:transition>
     </mc:Fallback>
@@ -7876,7 +11038,9 @@
         </p:nvSpPr>
         <p:spPr/>
         <p:txBody>
-          <a:bodyPr/>
+          <a:bodyPr>
+            <a:normAutofit fontScale="90000"/>
+          </a:bodyPr>
           <a:lstStyle/>
           <a:p>
             <a:r>
@@ -7992,6 +11156,92 @@
           </a:p>
           <a:p>
             <a:endParaRPr lang="en-US" dirty="0"/>
+          </a:p>
+        </p:txBody>
+      </p:sp>
+      <p:sp>
+        <p:nvSpPr>
+          <p:cNvPr id="2" name="Date Placeholder 1">
+            <a:extLst>
+              <a:ext uri="{FF2B5EF4-FFF2-40B4-BE49-F238E27FC236}">
+                <a16:creationId xmlns:a16="http://schemas.microsoft.com/office/drawing/2014/main" id="{77E27803-6399-3BB0-80DF-A17AE7B5A5C9}"/>
+              </a:ext>
+            </a:extLst>
+          </p:cNvPr>
+          <p:cNvSpPr>
+            <a:spLocks noGrp="1"/>
+          </p:cNvSpPr>
+          <p:nvPr>
+            <p:ph type="dt" sz="half" idx="10"/>
+          </p:nvPr>
+        </p:nvSpPr>
+        <p:spPr/>
+        <p:txBody>
+          <a:bodyPr/>
+          <a:lstStyle/>
+          <a:p>
+            <a:fld id="{95596B26-D26B-9F42-8CBE-2081020A8FDA}" type="datetime1">
+              <a:rPr lang="en-US" smtClean="0"/>
+              <a:t>10/8/26</a:t>
+            </a:fld>
+            <a:endParaRPr lang="en-US"/>
+          </a:p>
+        </p:txBody>
+      </p:sp>
+      <p:sp>
+        <p:nvSpPr>
+          <p:cNvPr id="5" name="Footer Placeholder 4">
+            <a:extLst>
+              <a:ext uri="{FF2B5EF4-FFF2-40B4-BE49-F238E27FC236}">
+                <a16:creationId xmlns:a16="http://schemas.microsoft.com/office/drawing/2014/main" id="{B6C3E391-D1A2-EF81-6E4D-D78032EB9D9E}"/>
+              </a:ext>
+            </a:extLst>
+          </p:cNvPr>
+          <p:cNvSpPr>
+            <a:spLocks noGrp="1"/>
+          </p:cNvSpPr>
+          <p:nvPr>
+            <p:ph type="ftr" sz="quarter" idx="11"/>
+          </p:nvPr>
+        </p:nvSpPr>
+        <p:spPr/>
+        <p:txBody>
+          <a:bodyPr/>
+          <a:lstStyle/>
+          <a:p>
+            <a:r>
+              <a:rPr lang="en-US"/>
+              <a:t>© Steve Beaty and others as cited</a:t>
+            </a:r>
+          </a:p>
+        </p:txBody>
+      </p:sp>
+      <p:sp>
+        <p:nvSpPr>
+          <p:cNvPr id="6" name="Slide Number Placeholder 5">
+            <a:extLst>
+              <a:ext uri="{FF2B5EF4-FFF2-40B4-BE49-F238E27FC236}">
+                <a16:creationId xmlns:a16="http://schemas.microsoft.com/office/drawing/2014/main" id="{010DB211-CB67-661D-AA12-9958E19C4C53}"/>
+              </a:ext>
+            </a:extLst>
+          </p:cNvPr>
+          <p:cNvSpPr>
+            <a:spLocks noGrp="1"/>
+          </p:cNvSpPr>
+          <p:nvPr>
+            <p:ph type="sldNum" sz="quarter" idx="12"/>
+          </p:nvPr>
+        </p:nvSpPr>
+        <p:spPr/>
+        <p:txBody>
+          <a:bodyPr/>
+          <a:lstStyle/>
+          <a:p>
+            <a:fld id="{5CA8E750-09AF-F04A-AC61-93A8E70A6AD8}" type="slidenum">
+              <a:rPr lang="en-US" smtClean="0"/>
+              <a:t>40</a:t>
+            </a:fld>
+            <a:endParaRPr lang="en-US"/>
           </a:p>
         </p:txBody>
       </p:sp>
@@ -8055,7 +11305,9 @@
         </p:nvSpPr>
         <p:spPr/>
         <p:txBody>
-          <a:bodyPr/>
+          <a:bodyPr>
+            <a:normAutofit fontScale="90000"/>
+          </a:bodyPr>
           <a:lstStyle/>
           <a:p>
             <a:r>
@@ -8083,7 +11335,9 @@
         </p:nvSpPr>
         <p:spPr/>
         <p:txBody>
-          <a:bodyPr/>
+          <a:bodyPr>
+            <a:normAutofit fontScale="92500"/>
+          </a:bodyPr>
           <a:lstStyle/>
           <a:p>
             <a:r>
@@ -8108,6 +11362,92 @@
               <a:rPr lang="en-US" dirty="0"/>
               <a:t>Two approaches</a:t>
             </a:r>
+          </a:p>
+        </p:txBody>
+      </p:sp>
+      <p:sp>
+        <p:nvSpPr>
+          <p:cNvPr id="3" name="Date Placeholder 2">
+            <a:extLst>
+              <a:ext uri="{FF2B5EF4-FFF2-40B4-BE49-F238E27FC236}">
+                <a16:creationId xmlns:a16="http://schemas.microsoft.com/office/drawing/2014/main" id="{90DBDB79-8009-69A2-9C51-1BE0E7743F33}"/>
+              </a:ext>
+            </a:extLst>
+          </p:cNvPr>
+          <p:cNvSpPr>
+            <a:spLocks noGrp="1"/>
+          </p:cNvSpPr>
+          <p:nvPr>
+            <p:ph type="dt" sz="half" idx="10"/>
+          </p:nvPr>
+        </p:nvSpPr>
+        <p:spPr/>
+        <p:txBody>
+          <a:bodyPr/>
+          <a:lstStyle/>
+          <a:p>
+            <a:fld id="{0E885B70-D4F8-954F-AD2C-DC100996A169}" type="datetime1">
+              <a:rPr lang="en-US" smtClean="0"/>
+              <a:t>10/8/26</a:t>
+            </a:fld>
+            <a:endParaRPr lang="en-US"/>
+          </a:p>
+        </p:txBody>
+      </p:sp>
+      <p:sp>
+        <p:nvSpPr>
+          <p:cNvPr id="5" name="Footer Placeholder 4">
+            <a:extLst>
+              <a:ext uri="{FF2B5EF4-FFF2-40B4-BE49-F238E27FC236}">
+                <a16:creationId xmlns:a16="http://schemas.microsoft.com/office/drawing/2014/main" id="{A4573D79-E605-15F7-A7CA-2729BF234803}"/>
+              </a:ext>
+            </a:extLst>
+          </p:cNvPr>
+          <p:cNvSpPr>
+            <a:spLocks noGrp="1"/>
+          </p:cNvSpPr>
+          <p:nvPr>
+            <p:ph type="ftr" sz="quarter" idx="11"/>
+          </p:nvPr>
+        </p:nvSpPr>
+        <p:spPr/>
+        <p:txBody>
+          <a:bodyPr/>
+          <a:lstStyle/>
+          <a:p>
+            <a:r>
+              <a:rPr lang="en-US"/>
+              <a:t>© Steve Beaty and others as cited</a:t>
+            </a:r>
+          </a:p>
+        </p:txBody>
+      </p:sp>
+      <p:sp>
+        <p:nvSpPr>
+          <p:cNvPr id="6" name="Slide Number Placeholder 5">
+            <a:extLst>
+              <a:ext uri="{FF2B5EF4-FFF2-40B4-BE49-F238E27FC236}">
+                <a16:creationId xmlns:a16="http://schemas.microsoft.com/office/drawing/2014/main" id="{3636C1A7-5A0B-654C-2975-15CE398C33D2}"/>
+              </a:ext>
+            </a:extLst>
+          </p:cNvPr>
+          <p:cNvSpPr>
+            <a:spLocks noGrp="1"/>
+          </p:cNvSpPr>
+          <p:nvPr>
+            <p:ph type="sldNum" sz="quarter" idx="12"/>
+          </p:nvPr>
+        </p:nvSpPr>
+        <p:spPr/>
+        <p:txBody>
+          <a:bodyPr/>
+          <a:lstStyle/>
+          <a:p>
+            <a:fld id="{5CA8E750-09AF-F04A-AC61-93A8E70A6AD8}" type="slidenum">
+              <a:rPr lang="en-US" smtClean="0"/>
+              <a:t>41</a:t>
+            </a:fld>
+            <a:endParaRPr lang="en-US"/>
           </a:p>
         </p:txBody>
       </p:sp>
@@ -8123,12 +11463,12 @@
   </p:clrMapOvr>
   <mc:AlternateContent xmlns:mc="http://schemas.openxmlformats.org/markup-compatibility/2006" xmlns:p14="http://schemas.microsoft.com/office/powerpoint/2010/main">
     <mc:Choice Requires="p14">
-      <p:transition spd="slow" p14:dur="1200">
-        <p14:prism/>
+      <p:transition spd="slow" p14:dur="2000">
+        <p14:prism isContent="1"/>
       </p:transition>
     </mc:Choice>
     <mc:Fallback xmlns="">
-      <p:transition xmlns:p14="http://schemas.microsoft.com/office/powerpoint/2010/main" spd="slow">
+      <p:transition spd="slow">
         <p:fade/>
       </p:transition>
     </mc:Fallback>
@@ -8171,7 +11511,9 @@
         </p:nvSpPr>
         <p:spPr/>
         <p:txBody>
-          <a:bodyPr/>
+          <a:bodyPr>
+            <a:normAutofit fontScale="90000"/>
+          </a:bodyPr>
           <a:lstStyle/>
           <a:p>
             <a:r>
@@ -8218,6 +11560,92 @@
               <a:rPr lang="en-US" dirty="0"/>
               <a:t>E.g.: student have many sections and sections have many students</a:t>
             </a:r>
+          </a:p>
+        </p:txBody>
+      </p:sp>
+      <p:sp>
+        <p:nvSpPr>
+          <p:cNvPr id="4" name="Date Placeholder 3">
+            <a:extLst>
+              <a:ext uri="{FF2B5EF4-FFF2-40B4-BE49-F238E27FC236}">
+                <a16:creationId xmlns:a16="http://schemas.microsoft.com/office/drawing/2014/main" id="{648358E6-369D-5A97-8228-59C8498FA518}"/>
+              </a:ext>
+            </a:extLst>
+          </p:cNvPr>
+          <p:cNvSpPr>
+            <a:spLocks noGrp="1"/>
+          </p:cNvSpPr>
+          <p:nvPr>
+            <p:ph type="dt" sz="half" idx="10"/>
+          </p:nvPr>
+        </p:nvSpPr>
+        <p:spPr/>
+        <p:txBody>
+          <a:bodyPr/>
+          <a:lstStyle/>
+          <a:p>
+            <a:fld id="{3FE29E29-3BA4-DE40-B7B8-800049BE39DF}" type="datetime1">
+              <a:rPr lang="en-US" smtClean="0"/>
+              <a:t>10/8/26</a:t>
+            </a:fld>
+            <a:endParaRPr lang="en-US"/>
+          </a:p>
+        </p:txBody>
+      </p:sp>
+      <p:sp>
+        <p:nvSpPr>
+          <p:cNvPr id="5" name="Footer Placeholder 4">
+            <a:extLst>
+              <a:ext uri="{FF2B5EF4-FFF2-40B4-BE49-F238E27FC236}">
+                <a16:creationId xmlns:a16="http://schemas.microsoft.com/office/drawing/2014/main" id="{C5077629-F5DE-2742-3A12-9E283DFFE9AA}"/>
+              </a:ext>
+            </a:extLst>
+          </p:cNvPr>
+          <p:cNvSpPr>
+            <a:spLocks noGrp="1"/>
+          </p:cNvSpPr>
+          <p:nvPr>
+            <p:ph type="ftr" sz="quarter" idx="11"/>
+          </p:nvPr>
+        </p:nvSpPr>
+        <p:spPr/>
+        <p:txBody>
+          <a:bodyPr/>
+          <a:lstStyle/>
+          <a:p>
+            <a:r>
+              <a:rPr lang="en-US"/>
+              <a:t>© Steve Beaty and others as cited</a:t>
+            </a:r>
+          </a:p>
+        </p:txBody>
+      </p:sp>
+      <p:sp>
+        <p:nvSpPr>
+          <p:cNvPr id="6" name="Slide Number Placeholder 5">
+            <a:extLst>
+              <a:ext uri="{FF2B5EF4-FFF2-40B4-BE49-F238E27FC236}">
+                <a16:creationId xmlns:a16="http://schemas.microsoft.com/office/drawing/2014/main" id="{A0B7C741-F335-72B6-AFA7-9D8DEB880701}"/>
+              </a:ext>
+            </a:extLst>
+          </p:cNvPr>
+          <p:cNvSpPr>
+            <a:spLocks noGrp="1"/>
+          </p:cNvSpPr>
+          <p:nvPr>
+            <p:ph type="sldNum" sz="quarter" idx="12"/>
+          </p:nvPr>
+        </p:nvSpPr>
+        <p:spPr/>
+        <p:txBody>
+          <a:bodyPr/>
+          <a:lstStyle/>
+          <a:p>
+            <a:fld id="{5CA8E750-09AF-F04A-AC61-93A8E70A6AD8}" type="slidenum">
+              <a:rPr lang="en-US" smtClean="0"/>
+              <a:t>42</a:t>
+            </a:fld>
+            <a:endParaRPr lang="en-US"/>
           </a:p>
         </p:txBody>
       </p:sp>
@@ -8233,12 +11661,12 @@
   </p:clrMapOvr>
   <mc:AlternateContent xmlns:mc="http://schemas.openxmlformats.org/markup-compatibility/2006" xmlns:p14="http://schemas.microsoft.com/office/powerpoint/2010/main">
     <mc:Choice Requires="p14">
-      <p:transition spd="slow" p14:dur="1200">
-        <p14:prism/>
+      <p:transition spd="slow" p14:dur="2000">
+        <p14:prism isContent="1"/>
       </p:transition>
     </mc:Choice>
     <mc:Fallback xmlns="">
-      <p:transition xmlns:p14="http://schemas.microsoft.com/office/powerpoint/2010/main" spd="slow">
+      <p:transition spd="slow">
         <p:fade/>
       </p:transition>
     </mc:Fallback>
@@ -8281,7 +11709,9 @@
         </p:nvSpPr>
         <p:spPr/>
         <p:txBody>
-          <a:bodyPr/>
+          <a:bodyPr>
+            <a:normAutofit fontScale="90000"/>
+          </a:bodyPr>
           <a:lstStyle/>
           <a:p>
             <a:r>
@@ -8395,6 +11825,92 @@
                 <a:srgbClr val="FF0000"/>
               </a:solidFill>
             </a:endParaRPr>
+          </a:p>
+        </p:txBody>
+      </p:sp>
+      <p:sp>
+        <p:nvSpPr>
+          <p:cNvPr id="4" name="Date Placeholder 3">
+            <a:extLst>
+              <a:ext uri="{FF2B5EF4-FFF2-40B4-BE49-F238E27FC236}">
+                <a16:creationId xmlns:a16="http://schemas.microsoft.com/office/drawing/2014/main" id="{AF73A516-5085-7E89-1C6D-500E504D6D95}"/>
+              </a:ext>
+            </a:extLst>
+          </p:cNvPr>
+          <p:cNvSpPr>
+            <a:spLocks noGrp="1"/>
+          </p:cNvSpPr>
+          <p:nvPr>
+            <p:ph type="dt" sz="half" idx="10"/>
+          </p:nvPr>
+        </p:nvSpPr>
+        <p:spPr/>
+        <p:txBody>
+          <a:bodyPr/>
+          <a:lstStyle/>
+          <a:p>
+            <a:fld id="{13F14436-FE4B-F747-BDFA-37B3C13EF74F}" type="datetime1">
+              <a:rPr lang="en-US" smtClean="0"/>
+              <a:t>10/8/26</a:t>
+            </a:fld>
+            <a:endParaRPr lang="en-US"/>
+          </a:p>
+        </p:txBody>
+      </p:sp>
+      <p:sp>
+        <p:nvSpPr>
+          <p:cNvPr id="5" name="Footer Placeholder 4">
+            <a:extLst>
+              <a:ext uri="{FF2B5EF4-FFF2-40B4-BE49-F238E27FC236}">
+                <a16:creationId xmlns:a16="http://schemas.microsoft.com/office/drawing/2014/main" id="{B187930E-84FA-2291-4294-97F6FC27D89F}"/>
+              </a:ext>
+            </a:extLst>
+          </p:cNvPr>
+          <p:cNvSpPr>
+            <a:spLocks noGrp="1"/>
+          </p:cNvSpPr>
+          <p:nvPr>
+            <p:ph type="ftr" sz="quarter" idx="11"/>
+          </p:nvPr>
+        </p:nvSpPr>
+        <p:spPr/>
+        <p:txBody>
+          <a:bodyPr/>
+          <a:lstStyle/>
+          <a:p>
+            <a:r>
+              <a:rPr lang="en-US"/>
+              <a:t>© Steve Beaty and others as cited</a:t>
+            </a:r>
+          </a:p>
+        </p:txBody>
+      </p:sp>
+      <p:sp>
+        <p:nvSpPr>
+          <p:cNvPr id="6" name="Slide Number Placeholder 5">
+            <a:extLst>
+              <a:ext uri="{FF2B5EF4-FFF2-40B4-BE49-F238E27FC236}">
+                <a16:creationId xmlns:a16="http://schemas.microsoft.com/office/drawing/2014/main" id="{1D8F79AA-5BE4-25EF-AD2B-B60D73E41523}"/>
+              </a:ext>
+            </a:extLst>
+          </p:cNvPr>
+          <p:cNvSpPr>
+            <a:spLocks noGrp="1"/>
+          </p:cNvSpPr>
+          <p:nvPr>
+            <p:ph type="sldNum" sz="quarter" idx="12"/>
+          </p:nvPr>
+        </p:nvSpPr>
+        <p:spPr/>
+        <p:txBody>
+          <a:bodyPr/>
+          <a:lstStyle/>
+          <a:p>
+            <a:fld id="{5CA8E750-09AF-F04A-AC61-93A8E70A6AD8}" type="slidenum">
+              <a:rPr lang="en-US" smtClean="0"/>
+              <a:t>43</a:t>
+            </a:fld>
+            <a:endParaRPr lang="en-US"/>
           </a:p>
         </p:txBody>
       </p:sp>
@@ -8489,7 +12005,7 @@
         <p:spPr/>
         <p:txBody>
           <a:bodyPr>
-            <a:normAutofit fontScale="92500" lnSpcReduction="20000"/>
+            <a:normAutofit fontScale="85000" lnSpcReduction="20000"/>
           </a:bodyPr>
           <a:lstStyle/>
           <a:p>
@@ -8612,6 +12128,92 @@
           </a:p>
           <a:p>
             <a:endParaRPr lang="en-US" dirty="0"/>
+          </a:p>
+        </p:txBody>
+      </p:sp>
+      <p:sp>
+        <p:nvSpPr>
+          <p:cNvPr id="4" name="Date Placeholder 3">
+            <a:extLst>
+              <a:ext uri="{FF2B5EF4-FFF2-40B4-BE49-F238E27FC236}">
+                <a16:creationId xmlns:a16="http://schemas.microsoft.com/office/drawing/2014/main" id="{980322EE-5CDD-68B6-ED8D-478D6B2DB436}"/>
+              </a:ext>
+            </a:extLst>
+          </p:cNvPr>
+          <p:cNvSpPr>
+            <a:spLocks noGrp="1"/>
+          </p:cNvSpPr>
+          <p:nvPr>
+            <p:ph type="dt" sz="half" idx="10"/>
+          </p:nvPr>
+        </p:nvSpPr>
+        <p:spPr/>
+        <p:txBody>
+          <a:bodyPr/>
+          <a:lstStyle/>
+          <a:p>
+            <a:fld id="{2D21DE7A-4B2C-FD4A-976C-AFEA23D56D34}" type="datetime1">
+              <a:rPr lang="en-US" smtClean="0"/>
+              <a:t>10/8/26</a:t>
+            </a:fld>
+            <a:endParaRPr lang="en-US"/>
+          </a:p>
+        </p:txBody>
+      </p:sp>
+      <p:sp>
+        <p:nvSpPr>
+          <p:cNvPr id="5" name="Footer Placeholder 4">
+            <a:extLst>
+              <a:ext uri="{FF2B5EF4-FFF2-40B4-BE49-F238E27FC236}">
+                <a16:creationId xmlns:a16="http://schemas.microsoft.com/office/drawing/2014/main" id="{2B92C4A8-DB4A-0AEF-507C-35AD4ABB97BC}"/>
+              </a:ext>
+            </a:extLst>
+          </p:cNvPr>
+          <p:cNvSpPr>
+            <a:spLocks noGrp="1"/>
+          </p:cNvSpPr>
+          <p:nvPr>
+            <p:ph type="ftr" sz="quarter" idx="11"/>
+          </p:nvPr>
+        </p:nvSpPr>
+        <p:spPr/>
+        <p:txBody>
+          <a:bodyPr/>
+          <a:lstStyle/>
+          <a:p>
+            <a:r>
+              <a:rPr lang="en-US"/>
+              <a:t>© Steve Beaty and others as cited</a:t>
+            </a:r>
+          </a:p>
+        </p:txBody>
+      </p:sp>
+      <p:sp>
+        <p:nvSpPr>
+          <p:cNvPr id="6" name="Slide Number Placeholder 5">
+            <a:extLst>
+              <a:ext uri="{FF2B5EF4-FFF2-40B4-BE49-F238E27FC236}">
+                <a16:creationId xmlns:a16="http://schemas.microsoft.com/office/drawing/2014/main" id="{0A9BD3E0-49E7-4F45-1006-F1E9BF64A501}"/>
+              </a:ext>
+            </a:extLst>
+          </p:cNvPr>
+          <p:cNvSpPr>
+            <a:spLocks noGrp="1"/>
+          </p:cNvSpPr>
+          <p:nvPr>
+            <p:ph type="sldNum" sz="quarter" idx="12"/>
+          </p:nvPr>
+        </p:nvSpPr>
+        <p:spPr/>
+        <p:txBody>
+          <a:bodyPr/>
+          <a:lstStyle/>
+          <a:p>
+            <a:fld id="{5CA8E750-09AF-F04A-AC61-93A8E70A6AD8}" type="slidenum">
+              <a:rPr lang="en-US" smtClean="0"/>
+              <a:t>44</a:t>
+            </a:fld>
+            <a:endParaRPr lang="en-US"/>
           </a:p>
         </p:txBody>
       </p:sp>
@@ -8625,6 +12227,18 @@
   <p:clrMapOvr>
     <a:masterClrMapping/>
   </p:clrMapOvr>
+  <mc:AlternateContent xmlns:mc="http://schemas.openxmlformats.org/markup-compatibility/2006" xmlns:p14="http://schemas.microsoft.com/office/powerpoint/2010/main">
+    <mc:Choice Requires="p14">
+      <p:transition spd="slow" p14:dur="2000">
+        <p14:prism isContent="1"/>
+      </p:transition>
+    </mc:Choice>
+    <mc:Fallback xmlns="">
+      <p:transition spd="slow">
+        <p:fade/>
+      </p:transition>
+    </mc:Fallback>
+  </mc:AlternateContent>
 </p:sld>
 </file>
 
@@ -8663,7 +12277,9 @@
         </p:nvSpPr>
         <p:spPr/>
         <p:txBody>
-          <a:bodyPr/>
+          <a:bodyPr>
+            <a:normAutofit fontScale="90000"/>
+          </a:bodyPr>
           <a:lstStyle/>
           <a:p>
             <a:r>
@@ -8724,6 +12340,92 @@
               <a:rPr lang="en-US" dirty="0"/>
               <a:t>It must be name very specifically</a:t>
             </a:r>
+          </a:p>
+        </p:txBody>
+      </p:sp>
+      <p:sp>
+        <p:nvSpPr>
+          <p:cNvPr id="3" name="Date Placeholder 2">
+            <a:extLst>
+              <a:ext uri="{FF2B5EF4-FFF2-40B4-BE49-F238E27FC236}">
+                <a16:creationId xmlns:a16="http://schemas.microsoft.com/office/drawing/2014/main" id="{D5A62B3C-88F7-5916-9EBC-BAC40AF7FBB3}"/>
+              </a:ext>
+            </a:extLst>
+          </p:cNvPr>
+          <p:cNvSpPr>
+            <a:spLocks noGrp="1"/>
+          </p:cNvSpPr>
+          <p:nvPr>
+            <p:ph type="dt" sz="half" idx="10"/>
+          </p:nvPr>
+        </p:nvSpPr>
+        <p:spPr/>
+        <p:txBody>
+          <a:bodyPr/>
+          <a:lstStyle/>
+          <a:p>
+            <a:fld id="{AE704379-D739-1041-9D38-F283F5B17B9E}" type="datetime1">
+              <a:rPr lang="en-US" smtClean="0"/>
+              <a:t>10/8/26</a:t>
+            </a:fld>
+            <a:endParaRPr lang="en-US"/>
+          </a:p>
+        </p:txBody>
+      </p:sp>
+      <p:sp>
+        <p:nvSpPr>
+          <p:cNvPr id="5" name="Footer Placeholder 4">
+            <a:extLst>
+              <a:ext uri="{FF2B5EF4-FFF2-40B4-BE49-F238E27FC236}">
+                <a16:creationId xmlns:a16="http://schemas.microsoft.com/office/drawing/2014/main" id="{E4F7354A-CF19-814D-68CD-D65D7A6A5F1D}"/>
+              </a:ext>
+            </a:extLst>
+          </p:cNvPr>
+          <p:cNvSpPr>
+            <a:spLocks noGrp="1"/>
+          </p:cNvSpPr>
+          <p:nvPr>
+            <p:ph type="ftr" sz="quarter" idx="11"/>
+          </p:nvPr>
+        </p:nvSpPr>
+        <p:spPr/>
+        <p:txBody>
+          <a:bodyPr/>
+          <a:lstStyle/>
+          <a:p>
+            <a:r>
+              <a:rPr lang="en-US"/>
+              <a:t>© Steve Beaty and others as cited</a:t>
+            </a:r>
+          </a:p>
+        </p:txBody>
+      </p:sp>
+      <p:sp>
+        <p:nvSpPr>
+          <p:cNvPr id="6" name="Slide Number Placeholder 5">
+            <a:extLst>
+              <a:ext uri="{FF2B5EF4-FFF2-40B4-BE49-F238E27FC236}">
+                <a16:creationId xmlns:a16="http://schemas.microsoft.com/office/drawing/2014/main" id="{F6259E82-6860-51E1-1653-F241595C12D0}"/>
+              </a:ext>
+            </a:extLst>
+          </p:cNvPr>
+          <p:cNvSpPr>
+            <a:spLocks noGrp="1"/>
+          </p:cNvSpPr>
+          <p:nvPr>
+            <p:ph type="sldNum" sz="quarter" idx="12"/>
+          </p:nvPr>
+        </p:nvSpPr>
+        <p:spPr/>
+        <p:txBody>
+          <a:bodyPr/>
+          <a:lstStyle/>
+          <a:p>
+            <a:fld id="{5CA8E750-09AF-F04A-AC61-93A8E70A6AD8}" type="slidenum">
+              <a:rPr lang="en-US" smtClean="0"/>
+              <a:t>45</a:t>
+            </a:fld>
+            <a:endParaRPr lang="en-US"/>
           </a:p>
         </p:txBody>
       </p:sp>
@@ -8739,12 +12441,12 @@
   </p:clrMapOvr>
   <mc:AlternateContent xmlns:mc="http://schemas.openxmlformats.org/markup-compatibility/2006" xmlns:p14="http://schemas.microsoft.com/office/powerpoint/2010/main">
     <mc:Choice Requires="p14">
-      <p:transition spd="slow" p14:dur="1200">
-        <p14:prism/>
+      <p:transition spd="slow" p14:dur="2000">
+        <p14:prism isContent="1"/>
       </p:transition>
     </mc:Choice>
     <mc:Fallback xmlns="">
-      <p:transition xmlns:p14="http://schemas.microsoft.com/office/powerpoint/2010/main" spd="slow">
+      <p:transition spd="slow">
         <p:fade/>
       </p:transition>
     </mc:Fallback>
@@ -8787,7 +12489,9 @@
         </p:nvSpPr>
         <p:spPr/>
         <p:txBody>
-          <a:bodyPr/>
+          <a:bodyPr>
+            <a:normAutofit fontScale="90000"/>
+          </a:bodyPr>
           <a:lstStyle/>
           <a:p>
             <a:r>
@@ -8822,6 +12526,92 @@
               <a:rPr lang="en-US" dirty="0"/>
               <a:t>The junction table we create must be named after the two tables we are referencing, in lexicographical order</a:t>
             </a:r>
+          </a:p>
+        </p:txBody>
+      </p:sp>
+      <p:sp>
+        <p:nvSpPr>
+          <p:cNvPr id="4" name="Date Placeholder 3">
+            <a:extLst>
+              <a:ext uri="{FF2B5EF4-FFF2-40B4-BE49-F238E27FC236}">
+                <a16:creationId xmlns:a16="http://schemas.microsoft.com/office/drawing/2014/main" id="{BB3B0A32-7846-6AB6-0269-89BBDBA51D07}"/>
+              </a:ext>
+            </a:extLst>
+          </p:cNvPr>
+          <p:cNvSpPr>
+            <a:spLocks noGrp="1"/>
+          </p:cNvSpPr>
+          <p:nvPr>
+            <p:ph type="dt" sz="half" idx="10"/>
+          </p:nvPr>
+        </p:nvSpPr>
+        <p:spPr/>
+        <p:txBody>
+          <a:bodyPr/>
+          <a:lstStyle/>
+          <a:p>
+            <a:fld id="{E29E3261-4AA7-D740-8B2A-20437958D403}" type="datetime1">
+              <a:rPr lang="en-US" smtClean="0"/>
+              <a:t>10/8/26</a:t>
+            </a:fld>
+            <a:endParaRPr lang="en-US"/>
+          </a:p>
+        </p:txBody>
+      </p:sp>
+      <p:sp>
+        <p:nvSpPr>
+          <p:cNvPr id="5" name="Footer Placeholder 4">
+            <a:extLst>
+              <a:ext uri="{FF2B5EF4-FFF2-40B4-BE49-F238E27FC236}">
+                <a16:creationId xmlns:a16="http://schemas.microsoft.com/office/drawing/2014/main" id="{C6827846-9E35-F66C-ED25-824B408B8502}"/>
+              </a:ext>
+            </a:extLst>
+          </p:cNvPr>
+          <p:cNvSpPr>
+            <a:spLocks noGrp="1"/>
+          </p:cNvSpPr>
+          <p:nvPr>
+            <p:ph type="ftr" sz="quarter" idx="11"/>
+          </p:nvPr>
+        </p:nvSpPr>
+        <p:spPr/>
+        <p:txBody>
+          <a:bodyPr/>
+          <a:lstStyle/>
+          <a:p>
+            <a:r>
+              <a:rPr lang="en-US"/>
+              <a:t>© Steve Beaty and others as cited</a:t>
+            </a:r>
+          </a:p>
+        </p:txBody>
+      </p:sp>
+      <p:sp>
+        <p:nvSpPr>
+          <p:cNvPr id="6" name="Slide Number Placeholder 5">
+            <a:extLst>
+              <a:ext uri="{FF2B5EF4-FFF2-40B4-BE49-F238E27FC236}">
+                <a16:creationId xmlns:a16="http://schemas.microsoft.com/office/drawing/2014/main" id="{0E166C4E-3168-5800-248B-CC957A2EA489}"/>
+              </a:ext>
+            </a:extLst>
+          </p:cNvPr>
+          <p:cNvSpPr>
+            <a:spLocks noGrp="1"/>
+          </p:cNvSpPr>
+          <p:nvPr>
+            <p:ph type="sldNum" sz="quarter" idx="12"/>
+          </p:nvPr>
+        </p:nvSpPr>
+        <p:spPr/>
+        <p:txBody>
+          <a:bodyPr/>
+          <a:lstStyle/>
+          <a:p>
+            <a:fld id="{5CA8E750-09AF-F04A-AC61-93A8E70A6AD8}" type="slidenum">
+              <a:rPr lang="en-US" smtClean="0"/>
+              <a:t>46</a:t>
+            </a:fld>
+            <a:endParaRPr lang="en-US"/>
           </a:p>
         </p:txBody>
       </p:sp>
@@ -8837,12 +12627,12 @@
   </p:clrMapOvr>
   <mc:AlternateContent xmlns:mc="http://schemas.openxmlformats.org/markup-compatibility/2006" xmlns:p14="http://schemas.microsoft.com/office/powerpoint/2010/main">
     <mc:Choice Requires="p14">
-      <p:transition spd="slow" p14:dur="1200">
-        <p14:prism/>
+      <p:transition spd="slow" p14:dur="2000">
+        <p14:prism isContent="1"/>
       </p:transition>
     </mc:Choice>
     <mc:Fallback xmlns="">
-      <p:transition xmlns:p14="http://schemas.microsoft.com/office/powerpoint/2010/main" spd="slow">
+      <p:transition spd="slow">
         <p:fade/>
       </p:transition>
     </mc:Fallback>
@@ -8885,7 +12675,9 @@
         </p:nvSpPr>
         <p:spPr/>
         <p:txBody>
-          <a:bodyPr/>
+          <a:bodyPr>
+            <a:normAutofit fontScale="90000"/>
+          </a:bodyPr>
           <a:lstStyle/>
           <a:p>
             <a:r>
@@ -9028,6 +12820,92 @@
           </a:p>
           <a:p>
             <a:endParaRPr lang="en-US" dirty="0"/>
+          </a:p>
+        </p:txBody>
+      </p:sp>
+      <p:sp>
+        <p:nvSpPr>
+          <p:cNvPr id="3" name="Date Placeholder 2">
+            <a:extLst>
+              <a:ext uri="{FF2B5EF4-FFF2-40B4-BE49-F238E27FC236}">
+                <a16:creationId xmlns:a16="http://schemas.microsoft.com/office/drawing/2014/main" id="{360C5B96-559D-8D14-0C79-733B789C9C4D}"/>
+              </a:ext>
+            </a:extLst>
+          </p:cNvPr>
+          <p:cNvSpPr>
+            <a:spLocks noGrp="1"/>
+          </p:cNvSpPr>
+          <p:nvPr>
+            <p:ph type="dt" sz="half" idx="10"/>
+          </p:nvPr>
+        </p:nvSpPr>
+        <p:spPr/>
+        <p:txBody>
+          <a:bodyPr/>
+          <a:lstStyle/>
+          <a:p>
+            <a:fld id="{27F1F906-026D-9442-9E04-438B67D768BF}" type="datetime1">
+              <a:rPr lang="en-US" smtClean="0"/>
+              <a:t>10/8/26</a:t>
+            </a:fld>
+            <a:endParaRPr lang="en-US"/>
+          </a:p>
+        </p:txBody>
+      </p:sp>
+      <p:sp>
+        <p:nvSpPr>
+          <p:cNvPr id="5" name="Footer Placeholder 4">
+            <a:extLst>
+              <a:ext uri="{FF2B5EF4-FFF2-40B4-BE49-F238E27FC236}">
+                <a16:creationId xmlns:a16="http://schemas.microsoft.com/office/drawing/2014/main" id="{C8496FB3-6B81-969B-330C-5C0EB4A7A4B9}"/>
+              </a:ext>
+            </a:extLst>
+          </p:cNvPr>
+          <p:cNvSpPr>
+            <a:spLocks noGrp="1"/>
+          </p:cNvSpPr>
+          <p:nvPr>
+            <p:ph type="ftr" sz="quarter" idx="11"/>
+          </p:nvPr>
+        </p:nvSpPr>
+        <p:spPr/>
+        <p:txBody>
+          <a:bodyPr/>
+          <a:lstStyle/>
+          <a:p>
+            <a:r>
+              <a:rPr lang="en-US"/>
+              <a:t>© Steve Beaty and others as cited</a:t>
+            </a:r>
+          </a:p>
+        </p:txBody>
+      </p:sp>
+      <p:sp>
+        <p:nvSpPr>
+          <p:cNvPr id="6" name="Slide Number Placeholder 5">
+            <a:extLst>
+              <a:ext uri="{FF2B5EF4-FFF2-40B4-BE49-F238E27FC236}">
+                <a16:creationId xmlns:a16="http://schemas.microsoft.com/office/drawing/2014/main" id="{AFF5C614-A687-3355-491D-53D3A7C31D38}"/>
+              </a:ext>
+            </a:extLst>
+          </p:cNvPr>
+          <p:cNvSpPr>
+            <a:spLocks noGrp="1"/>
+          </p:cNvSpPr>
+          <p:nvPr>
+            <p:ph type="sldNum" sz="quarter" idx="12"/>
+          </p:nvPr>
+        </p:nvSpPr>
+        <p:spPr/>
+        <p:txBody>
+          <a:bodyPr/>
+          <a:lstStyle/>
+          <a:p>
+            <a:fld id="{5CA8E750-09AF-F04A-AC61-93A8E70A6AD8}" type="slidenum">
+              <a:rPr lang="en-US" smtClean="0"/>
+              <a:t>47</a:t>
+            </a:fld>
+            <a:endParaRPr lang="en-US"/>
           </a:p>
         </p:txBody>
       </p:sp>
@@ -9091,7 +12969,9 @@
         </p:nvSpPr>
         <p:spPr/>
         <p:txBody>
-          <a:bodyPr/>
+          <a:bodyPr>
+            <a:normAutofit fontScale="90000"/>
+          </a:bodyPr>
           <a:lstStyle/>
           <a:p>
             <a:r>
@@ -9124,7 +13004,7 @@
         </p:nvGraphicFramePr>
         <p:xfrm>
           <a:off x="609600" y="1600200"/>
-          <a:ext cx="10972800" cy="1371600"/>
+          <a:ext cx="10972800" cy="4525963"/>
         </p:xfrm>
         <a:graphic>
           <a:graphicData uri="http://schemas.openxmlformats.org/drawingml/2006/table">
@@ -9549,6 +13429,92 @@
           </a:graphicData>
         </a:graphic>
       </p:graphicFrame>
+      <p:sp>
+        <p:nvSpPr>
+          <p:cNvPr id="3" name="Date Placeholder 2">
+            <a:extLst>
+              <a:ext uri="{FF2B5EF4-FFF2-40B4-BE49-F238E27FC236}">
+                <a16:creationId xmlns:a16="http://schemas.microsoft.com/office/drawing/2014/main" id="{E3DDDD16-21E2-8ABE-EFE3-8F9E958E4336}"/>
+              </a:ext>
+            </a:extLst>
+          </p:cNvPr>
+          <p:cNvSpPr>
+            <a:spLocks noGrp="1"/>
+          </p:cNvSpPr>
+          <p:nvPr>
+            <p:ph type="dt" sz="half" idx="10"/>
+          </p:nvPr>
+        </p:nvSpPr>
+        <p:spPr/>
+        <p:txBody>
+          <a:bodyPr/>
+          <a:lstStyle/>
+          <a:p>
+            <a:fld id="{F0FB8629-CB46-3747-89E5-8E8C0FA2AD8D}" type="datetime1">
+              <a:rPr lang="en-US" smtClean="0"/>
+              <a:t>10/8/26</a:t>
+            </a:fld>
+            <a:endParaRPr lang="en-US"/>
+          </a:p>
+        </p:txBody>
+      </p:sp>
+      <p:sp>
+        <p:nvSpPr>
+          <p:cNvPr id="5" name="Footer Placeholder 4">
+            <a:extLst>
+              <a:ext uri="{FF2B5EF4-FFF2-40B4-BE49-F238E27FC236}">
+                <a16:creationId xmlns:a16="http://schemas.microsoft.com/office/drawing/2014/main" id="{BB8BC28A-EFE0-85D6-3F90-93022FB89134}"/>
+              </a:ext>
+            </a:extLst>
+          </p:cNvPr>
+          <p:cNvSpPr>
+            <a:spLocks noGrp="1"/>
+          </p:cNvSpPr>
+          <p:nvPr>
+            <p:ph type="ftr" sz="quarter" idx="11"/>
+          </p:nvPr>
+        </p:nvSpPr>
+        <p:spPr/>
+        <p:txBody>
+          <a:bodyPr/>
+          <a:lstStyle/>
+          <a:p>
+            <a:r>
+              <a:rPr lang="en-US"/>
+              <a:t>© Steve Beaty and others as cited</a:t>
+            </a:r>
+          </a:p>
+        </p:txBody>
+      </p:sp>
+      <p:sp>
+        <p:nvSpPr>
+          <p:cNvPr id="8" name="Slide Number Placeholder 7">
+            <a:extLst>
+              <a:ext uri="{FF2B5EF4-FFF2-40B4-BE49-F238E27FC236}">
+                <a16:creationId xmlns:a16="http://schemas.microsoft.com/office/drawing/2014/main" id="{7CC6FB7E-B616-9236-21F3-343BD62081B9}"/>
+              </a:ext>
+            </a:extLst>
+          </p:cNvPr>
+          <p:cNvSpPr>
+            <a:spLocks noGrp="1"/>
+          </p:cNvSpPr>
+          <p:nvPr>
+            <p:ph type="sldNum" sz="quarter" idx="12"/>
+          </p:nvPr>
+        </p:nvSpPr>
+        <p:spPr/>
+        <p:txBody>
+          <a:bodyPr/>
+          <a:lstStyle/>
+          <a:p>
+            <a:fld id="{5CA8E750-09AF-F04A-AC61-93A8E70A6AD8}" type="slidenum">
+              <a:rPr lang="en-US" smtClean="0"/>
+              <a:t>48</a:t>
+            </a:fld>
+            <a:endParaRPr lang="en-US"/>
+          </a:p>
+        </p:txBody>
+      </p:sp>
     </p:spTree>
     <p:extLst>
       <p:ext uri="{BB962C8B-B14F-4D97-AF65-F5344CB8AC3E}">
@@ -9559,6 +13525,18 @@
   <p:clrMapOvr>
     <a:masterClrMapping/>
   </p:clrMapOvr>
+  <mc:AlternateContent xmlns:mc="http://schemas.openxmlformats.org/markup-compatibility/2006" xmlns:p14="http://schemas.microsoft.com/office/powerpoint/2010/main">
+    <mc:Choice Requires="p14">
+      <p:transition spd="slow" p14:dur="2000">
+        <p14:prism isContent="1"/>
+      </p:transition>
+    </mc:Choice>
+    <mc:Fallback xmlns="">
+      <p:transition spd="slow">
+        <p:fade/>
+      </p:transition>
+    </mc:Fallback>
+  </mc:AlternateContent>
 </p:sld>
 </file>
 
@@ -9597,7 +13575,9 @@
         </p:nvSpPr>
         <p:spPr/>
         <p:txBody>
-          <a:bodyPr/>
+          <a:bodyPr>
+            <a:normAutofit fontScale="90000"/>
+          </a:bodyPr>
           <a:lstStyle/>
           <a:p>
             <a:r>
@@ -9626,7 +13606,7 @@
         <p:spPr/>
         <p:txBody>
           <a:bodyPr>
-            <a:normAutofit lnSpcReduction="10000"/>
+            <a:normAutofit fontScale="92500" lnSpcReduction="10000"/>
           </a:bodyPr>
           <a:lstStyle/>
           <a:p>
@@ -9634,6 +13614,92 @@
               <a:rPr lang="en-US" dirty="0"/>
               <a:t>Write a test for the change you want to make. This could be new code or a modification to existing code. You should be able to write the test before the code as you know what the code should do. Indeed, if you can’t write the test, how can you be sure the result of your code is correct?</a:t>
             </a:r>
+          </a:p>
+        </p:txBody>
+      </p:sp>
+      <p:sp>
+        <p:nvSpPr>
+          <p:cNvPr id="3" name="Date Placeholder 2">
+            <a:extLst>
+              <a:ext uri="{FF2B5EF4-FFF2-40B4-BE49-F238E27FC236}">
+                <a16:creationId xmlns:a16="http://schemas.microsoft.com/office/drawing/2014/main" id="{532E0BB2-9711-DAEB-7080-40F98D627952}"/>
+              </a:ext>
+            </a:extLst>
+          </p:cNvPr>
+          <p:cNvSpPr>
+            <a:spLocks noGrp="1"/>
+          </p:cNvSpPr>
+          <p:nvPr>
+            <p:ph type="dt" sz="half" idx="10"/>
+          </p:nvPr>
+        </p:nvSpPr>
+        <p:spPr/>
+        <p:txBody>
+          <a:bodyPr/>
+          <a:lstStyle/>
+          <a:p>
+            <a:fld id="{92167243-1390-B740-8E51-6445A628FB72}" type="datetime1">
+              <a:rPr lang="en-US" smtClean="0"/>
+              <a:t>10/8/26</a:t>
+            </a:fld>
+            <a:endParaRPr lang="en-US"/>
+          </a:p>
+        </p:txBody>
+      </p:sp>
+      <p:sp>
+        <p:nvSpPr>
+          <p:cNvPr id="5" name="Footer Placeholder 4">
+            <a:extLst>
+              <a:ext uri="{FF2B5EF4-FFF2-40B4-BE49-F238E27FC236}">
+                <a16:creationId xmlns:a16="http://schemas.microsoft.com/office/drawing/2014/main" id="{1BE278A2-88C8-A4D1-DF35-681B01DBB6C0}"/>
+              </a:ext>
+            </a:extLst>
+          </p:cNvPr>
+          <p:cNvSpPr>
+            <a:spLocks noGrp="1"/>
+          </p:cNvSpPr>
+          <p:nvPr>
+            <p:ph type="ftr" sz="quarter" idx="11"/>
+          </p:nvPr>
+        </p:nvSpPr>
+        <p:spPr/>
+        <p:txBody>
+          <a:bodyPr/>
+          <a:lstStyle/>
+          <a:p>
+            <a:r>
+              <a:rPr lang="en-US"/>
+              <a:t>© Steve Beaty and others as cited</a:t>
+            </a:r>
+          </a:p>
+        </p:txBody>
+      </p:sp>
+      <p:sp>
+        <p:nvSpPr>
+          <p:cNvPr id="6" name="Slide Number Placeholder 5">
+            <a:extLst>
+              <a:ext uri="{FF2B5EF4-FFF2-40B4-BE49-F238E27FC236}">
+                <a16:creationId xmlns:a16="http://schemas.microsoft.com/office/drawing/2014/main" id="{28640EE0-F60D-A8C4-9C6F-7FC61D8B9891}"/>
+              </a:ext>
+            </a:extLst>
+          </p:cNvPr>
+          <p:cNvSpPr>
+            <a:spLocks noGrp="1"/>
+          </p:cNvSpPr>
+          <p:nvPr>
+            <p:ph type="sldNum" sz="quarter" idx="12"/>
+          </p:nvPr>
+        </p:nvSpPr>
+        <p:spPr/>
+        <p:txBody>
+          <a:bodyPr/>
+          <a:lstStyle/>
+          <a:p>
+            <a:fld id="{5CA8E750-09AF-F04A-AC61-93A8E70A6AD8}" type="slidenum">
+              <a:rPr lang="en-US" smtClean="0"/>
+              <a:t>49</a:t>
+            </a:fld>
+            <a:endParaRPr lang="en-US"/>
           </a:p>
         </p:txBody>
       </p:sp>
@@ -9649,12 +13715,12 @@
   </p:clrMapOvr>
   <mc:AlternateContent xmlns:mc="http://schemas.openxmlformats.org/markup-compatibility/2006" xmlns:p14="http://schemas.microsoft.com/office/powerpoint/2010/main">
     <mc:Choice Requires="p14">
-      <p:transition spd="slow" p14:dur="1200">
-        <p14:prism/>
+      <p:transition spd="slow" p14:dur="2000">
+        <p14:prism isContent="1"/>
       </p:transition>
     </mc:Choice>
     <mc:Fallback xmlns="">
-      <p:transition xmlns:p14="http://schemas.microsoft.com/office/powerpoint/2010/main" spd="slow">
+      <p:transition spd="slow">
         <p:fade/>
       </p:transition>
     </mc:Fallback>
@@ -9697,7 +13763,9 @@
         </p:nvSpPr>
         <p:spPr/>
         <p:txBody>
-          <a:bodyPr/>
+          <a:bodyPr>
+            <a:normAutofit fontScale="90000"/>
+          </a:bodyPr>
           <a:lstStyle/>
           <a:p>
             <a:r>
@@ -9739,6 +13807,92 @@
               <a:rPr lang="en-US" dirty="0"/>
               <a:t>What the data are, what they look like, how they can be manipulated</a:t>
             </a:r>
+          </a:p>
+        </p:txBody>
+      </p:sp>
+      <p:sp>
+        <p:nvSpPr>
+          <p:cNvPr id="4" name="Date Placeholder 3">
+            <a:extLst>
+              <a:ext uri="{FF2B5EF4-FFF2-40B4-BE49-F238E27FC236}">
+                <a16:creationId xmlns:a16="http://schemas.microsoft.com/office/drawing/2014/main" id="{50DB1AD7-30A9-F369-13CF-6CAFDEE026B6}"/>
+              </a:ext>
+            </a:extLst>
+          </p:cNvPr>
+          <p:cNvSpPr>
+            <a:spLocks noGrp="1"/>
+          </p:cNvSpPr>
+          <p:nvPr>
+            <p:ph type="dt" sz="half" idx="10"/>
+          </p:nvPr>
+        </p:nvSpPr>
+        <p:spPr/>
+        <p:txBody>
+          <a:bodyPr/>
+          <a:lstStyle/>
+          <a:p>
+            <a:fld id="{94D72D7D-4237-304F-B412-51CC9D406DFF}" type="datetime1">
+              <a:rPr lang="en-US" smtClean="0"/>
+              <a:t>10/8/26</a:t>
+            </a:fld>
+            <a:endParaRPr lang="en-US"/>
+          </a:p>
+        </p:txBody>
+      </p:sp>
+      <p:sp>
+        <p:nvSpPr>
+          <p:cNvPr id="5" name="Footer Placeholder 4">
+            <a:extLst>
+              <a:ext uri="{FF2B5EF4-FFF2-40B4-BE49-F238E27FC236}">
+                <a16:creationId xmlns:a16="http://schemas.microsoft.com/office/drawing/2014/main" id="{B4B7AC34-B84F-34F1-EA2A-89CC40E56200}"/>
+              </a:ext>
+            </a:extLst>
+          </p:cNvPr>
+          <p:cNvSpPr>
+            <a:spLocks noGrp="1"/>
+          </p:cNvSpPr>
+          <p:nvPr>
+            <p:ph type="ftr" sz="quarter" idx="11"/>
+          </p:nvPr>
+        </p:nvSpPr>
+        <p:spPr/>
+        <p:txBody>
+          <a:bodyPr/>
+          <a:lstStyle/>
+          <a:p>
+            <a:r>
+              <a:rPr lang="en-US"/>
+              <a:t>© Steve Beaty and others as cited</a:t>
+            </a:r>
+          </a:p>
+        </p:txBody>
+      </p:sp>
+      <p:sp>
+        <p:nvSpPr>
+          <p:cNvPr id="6" name="Slide Number Placeholder 5">
+            <a:extLst>
+              <a:ext uri="{FF2B5EF4-FFF2-40B4-BE49-F238E27FC236}">
+                <a16:creationId xmlns:a16="http://schemas.microsoft.com/office/drawing/2014/main" id="{34331EFF-5C21-5AA0-F33B-158DC7969430}"/>
+              </a:ext>
+            </a:extLst>
+          </p:cNvPr>
+          <p:cNvSpPr>
+            <a:spLocks noGrp="1"/>
+          </p:cNvSpPr>
+          <p:nvPr>
+            <p:ph type="sldNum" sz="quarter" idx="12"/>
+          </p:nvPr>
+        </p:nvSpPr>
+        <p:spPr/>
+        <p:txBody>
+          <a:bodyPr/>
+          <a:lstStyle/>
+          <a:p>
+            <a:fld id="{5CA8E750-09AF-F04A-AC61-93A8E70A6AD8}" type="slidenum">
+              <a:rPr lang="en-US" smtClean="0"/>
+              <a:t>5</a:t>
+            </a:fld>
+            <a:endParaRPr lang="en-US"/>
           </a:p>
         </p:txBody>
       </p:sp>
@@ -9754,12 +13908,12 @@
   </p:clrMapOvr>
   <mc:AlternateContent xmlns:mc="http://schemas.openxmlformats.org/markup-compatibility/2006" xmlns:p14="http://schemas.microsoft.com/office/powerpoint/2010/main">
     <mc:Choice Requires="p14">
-      <p:transition spd="slow" p14:dur="1200">
-        <p14:prism/>
+      <p:transition spd="slow" p14:dur="2000">
+        <p14:prism isContent="1"/>
       </p:transition>
     </mc:Choice>
     <mc:Fallback xmlns="">
-      <p:transition xmlns:p14="http://schemas.microsoft.com/office/powerpoint/2010/main" spd="slow">
+      <p:transition spd="slow">
         <p:fade/>
       </p:transition>
     </mc:Fallback>
@@ -9802,7 +13956,9 @@
         </p:nvSpPr>
         <p:spPr/>
         <p:txBody>
-          <a:bodyPr/>
+          <a:bodyPr>
+            <a:normAutofit fontScale="90000"/>
+          </a:bodyPr>
           <a:lstStyle/>
           <a:p>
             <a:r>
@@ -9837,6 +13993,92 @@
               <a:rPr lang="en-US" dirty="0"/>
               <a:t>Run all the relevant tests using a test framework. All should pass except the one (or more) tests you just wrote. If the new test(s) pass, something is wrong, and you’ll need to figure out what.</a:t>
             </a:r>
+          </a:p>
+        </p:txBody>
+      </p:sp>
+      <p:sp>
+        <p:nvSpPr>
+          <p:cNvPr id="4" name="Date Placeholder 3">
+            <a:extLst>
+              <a:ext uri="{FF2B5EF4-FFF2-40B4-BE49-F238E27FC236}">
+                <a16:creationId xmlns:a16="http://schemas.microsoft.com/office/drawing/2014/main" id="{5D5855C5-C169-F5F6-D9B5-BABC5A6DBA19}"/>
+              </a:ext>
+            </a:extLst>
+          </p:cNvPr>
+          <p:cNvSpPr>
+            <a:spLocks noGrp="1"/>
+          </p:cNvSpPr>
+          <p:nvPr>
+            <p:ph type="dt" sz="half" idx="10"/>
+          </p:nvPr>
+        </p:nvSpPr>
+        <p:spPr/>
+        <p:txBody>
+          <a:bodyPr/>
+          <a:lstStyle/>
+          <a:p>
+            <a:fld id="{D1E9AE74-170A-2D46-BA4D-D38BA76DDBEE}" type="datetime1">
+              <a:rPr lang="en-US" smtClean="0"/>
+              <a:t>10/8/26</a:t>
+            </a:fld>
+            <a:endParaRPr lang="en-US"/>
+          </a:p>
+        </p:txBody>
+      </p:sp>
+      <p:sp>
+        <p:nvSpPr>
+          <p:cNvPr id="5" name="Footer Placeholder 4">
+            <a:extLst>
+              <a:ext uri="{FF2B5EF4-FFF2-40B4-BE49-F238E27FC236}">
+                <a16:creationId xmlns:a16="http://schemas.microsoft.com/office/drawing/2014/main" id="{F8B2742E-F6C3-E899-030B-5EDFEA34284C}"/>
+              </a:ext>
+            </a:extLst>
+          </p:cNvPr>
+          <p:cNvSpPr>
+            <a:spLocks noGrp="1"/>
+          </p:cNvSpPr>
+          <p:nvPr>
+            <p:ph type="ftr" sz="quarter" idx="11"/>
+          </p:nvPr>
+        </p:nvSpPr>
+        <p:spPr/>
+        <p:txBody>
+          <a:bodyPr/>
+          <a:lstStyle/>
+          <a:p>
+            <a:r>
+              <a:rPr lang="en-US"/>
+              <a:t>© Steve Beaty and others as cited</a:t>
+            </a:r>
+          </a:p>
+        </p:txBody>
+      </p:sp>
+      <p:sp>
+        <p:nvSpPr>
+          <p:cNvPr id="6" name="Slide Number Placeholder 5">
+            <a:extLst>
+              <a:ext uri="{FF2B5EF4-FFF2-40B4-BE49-F238E27FC236}">
+                <a16:creationId xmlns:a16="http://schemas.microsoft.com/office/drawing/2014/main" id="{DD58E7D7-CF6E-A9AC-085F-1767EC321711}"/>
+              </a:ext>
+            </a:extLst>
+          </p:cNvPr>
+          <p:cNvSpPr>
+            <a:spLocks noGrp="1"/>
+          </p:cNvSpPr>
+          <p:nvPr>
+            <p:ph type="sldNum" sz="quarter" idx="12"/>
+          </p:nvPr>
+        </p:nvSpPr>
+        <p:spPr/>
+        <p:txBody>
+          <a:bodyPr/>
+          <a:lstStyle/>
+          <a:p>
+            <a:fld id="{5CA8E750-09AF-F04A-AC61-93A8E70A6AD8}" type="slidenum">
+              <a:rPr lang="en-US" smtClean="0"/>
+              <a:t>50</a:t>
+            </a:fld>
+            <a:endParaRPr lang="en-US"/>
           </a:p>
         </p:txBody>
       </p:sp>
@@ -9852,12 +14094,12 @@
   </p:clrMapOvr>
   <mc:AlternateContent xmlns:mc="http://schemas.openxmlformats.org/markup-compatibility/2006" xmlns:p14="http://schemas.microsoft.com/office/powerpoint/2010/main">
     <mc:Choice Requires="p14">
-      <p:transition spd="slow" p14:dur="1200">
-        <p14:prism/>
+      <p:transition spd="slow" p14:dur="2000">
+        <p14:prism isContent="1"/>
       </p:transition>
     </mc:Choice>
     <mc:Fallback xmlns="">
-      <p:transition xmlns:p14="http://schemas.microsoft.com/office/powerpoint/2010/main" spd="slow">
+      <p:transition spd="slow">
         <p:fade/>
       </p:transition>
     </mc:Fallback>
@@ -9900,7 +14142,9 @@
         </p:nvSpPr>
         <p:spPr/>
         <p:txBody>
-          <a:bodyPr/>
+          <a:bodyPr>
+            <a:normAutofit fontScale="90000"/>
+          </a:bodyPr>
           <a:lstStyle/>
           <a:p>
             <a:r>
@@ -9928,7 +14172,9 @@
         </p:nvSpPr>
         <p:spPr/>
         <p:txBody>
-          <a:bodyPr/>
+          <a:bodyPr>
+            <a:normAutofit fontScale="92500"/>
+          </a:bodyPr>
           <a:lstStyle/>
           <a:p>
             <a:r>
@@ -9963,6 +14209,92 @@
               <a:rPr lang="en-US" dirty="0"/>
               <a:t> Need It (YAGNI) is important here </a:t>
             </a:r>
+          </a:p>
+        </p:txBody>
+      </p:sp>
+      <p:sp>
+        <p:nvSpPr>
+          <p:cNvPr id="4" name="Date Placeholder 3">
+            <a:extLst>
+              <a:ext uri="{FF2B5EF4-FFF2-40B4-BE49-F238E27FC236}">
+                <a16:creationId xmlns:a16="http://schemas.microsoft.com/office/drawing/2014/main" id="{5C982B72-8334-5F11-E949-96E7762D8070}"/>
+              </a:ext>
+            </a:extLst>
+          </p:cNvPr>
+          <p:cNvSpPr>
+            <a:spLocks noGrp="1"/>
+          </p:cNvSpPr>
+          <p:nvPr>
+            <p:ph type="dt" sz="half" idx="10"/>
+          </p:nvPr>
+        </p:nvSpPr>
+        <p:spPr/>
+        <p:txBody>
+          <a:bodyPr/>
+          <a:lstStyle/>
+          <a:p>
+            <a:fld id="{4339BC4F-EE5F-4547-B2B3-BB2C47A39AF0}" type="datetime1">
+              <a:rPr lang="en-US" smtClean="0"/>
+              <a:t>10/8/26</a:t>
+            </a:fld>
+            <a:endParaRPr lang="en-US"/>
+          </a:p>
+        </p:txBody>
+      </p:sp>
+      <p:sp>
+        <p:nvSpPr>
+          <p:cNvPr id="5" name="Footer Placeholder 4">
+            <a:extLst>
+              <a:ext uri="{FF2B5EF4-FFF2-40B4-BE49-F238E27FC236}">
+                <a16:creationId xmlns:a16="http://schemas.microsoft.com/office/drawing/2014/main" id="{F87DA8EC-4E6E-3336-C628-6D8801E895A1}"/>
+              </a:ext>
+            </a:extLst>
+          </p:cNvPr>
+          <p:cNvSpPr>
+            <a:spLocks noGrp="1"/>
+          </p:cNvSpPr>
+          <p:nvPr>
+            <p:ph type="ftr" sz="quarter" idx="11"/>
+          </p:nvPr>
+        </p:nvSpPr>
+        <p:spPr/>
+        <p:txBody>
+          <a:bodyPr/>
+          <a:lstStyle/>
+          <a:p>
+            <a:r>
+              <a:rPr lang="en-US"/>
+              <a:t>© Steve Beaty and others as cited</a:t>
+            </a:r>
+          </a:p>
+        </p:txBody>
+      </p:sp>
+      <p:sp>
+        <p:nvSpPr>
+          <p:cNvPr id="6" name="Slide Number Placeholder 5">
+            <a:extLst>
+              <a:ext uri="{FF2B5EF4-FFF2-40B4-BE49-F238E27FC236}">
+                <a16:creationId xmlns:a16="http://schemas.microsoft.com/office/drawing/2014/main" id="{6D16434A-D1FE-7CDE-0EF5-D5296371F721}"/>
+              </a:ext>
+            </a:extLst>
+          </p:cNvPr>
+          <p:cNvSpPr>
+            <a:spLocks noGrp="1"/>
+          </p:cNvSpPr>
+          <p:nvPr>
+            <p:ph type="sldNum" sz="quarter" idx="12"/>
+          </p:nvPr>
+        </p:nvSpPr>
+        <p:spPr/>
+        <p:txBody>
+          <a:bodyPr/>
+          <a:lstStyle/>
+          <a:p>
+            <a:fld id="{5CA8E750-09AF-F04A-AC61-93A8E70A6AD8}" type="slidenum">
+              <a:rPr lang="en-US" smtClean="0"/>
+              <a:t>51</a:t>
+            </a:fld>
+            <a:endParaRPr lang="en-US"/>
           </a:p>
         </p:txBody>
       </p:sp>
@@ -9978,12 +14310,12 @@
   </p:clrMapOvr>
   <mc:AlternateContent xmlns:mc="http://schemas.openxmlformats.org/markup-compatibility/2006" xmlns:p14="http://schemas.microsoft.com/office/powerpoint/2010/main">
     <mc:Choice Requires="p14">
-      <p:transition spd="slow" p14:dur="1200">
-        <p14:prism/>
+      <p:transition spd="slow" p14:dur="2000">
+        <p14:prism isContent="1"/>
       </p:transition>
     </mc:Choice>
     <mc:Fallback xmlns="">
-      <p:transition xmlns:p14="http://schemas.microsoft.com/office/powerpoint/2010/main" spd="slow">
+      <p:transition spd="slow">
         <p:fade/>
       </p:transition>
     </mc:Fallback>
@@ -10026,7 +14358,9 @@
         </p:nvSpPr>
         <p:spPr/>
         <p:txBody>
-          <a:bodyPr/>
+          <a:bodyPr>
+            <a:normAutofit fontScale="90000"/>
+          </a:bodyPr>
           <a:lstStyle/>
           <a:p>
             <a:r>
@@ -10061,6 +14395,92 @@
               <a:rPr lang="en-US" dirty="0"/>
               <a:t>Run the tests and make sure they pass.</a:t>
             </a:r>
+          </a:p>
+        </p:txBody>
+      </p:sp>
+      <p:sp>
+        <p:nvSpPr>
+          <p:cNvPr id="4" name="Date Placeholder 3">
+            <a:extLst>
+              <a:ext uri="{FF2B5EF4-FFF2-40B4-BE49-F238E27FC236}">
+                <a16:creationId xmlns:a16="http://schemas.microsoft.com/office/drawing/2014/main" id="{CC040BC8-499D-149D-41F2-B864A4F3264E}"/>
+              </a:ext>
+            </a:extLst>
+          </p:cNvPr>
+          <p:cNvSpPr>
+            <a:spLocks noGrp="1"/>
+          </p:cNvSpPr>
+          <p:nvPr>
+            <p:ph type="dt" sz="half" idx="10"/>
+          </p:nvPr>
+        </p:nvSpPr>
+        <p:spPr/>
+        <p:txBody>
+          <a:bodyPr/>
+          <a:lstStyle/>
+          <a:p>
+            <a:fld id="{606FD8FE-7B10-D942-99DC-AB1AE1B2ADF0}" type="datetime1">
+              <a:rPr lang="en-US" smtClean="0"/>
+              <a:t>10/8/26</a:t>
+            </a:fld>
+            <a:endParaRPr lang="en-US"/>
+          </a:p>
+        </p:txBody>
+      </p:sp>
+      <p:sp>
+        <p:nvSpPr>
+          <p:cNvPr id="5" name="Footer Placeholder 4">
+            <a:extLst>
+              <a:ext uri="{FF2B5EF4-FFF2-40B4-BE49-F238E27FC236}">
+                <a16:creationId xmlns:a16="http://schemas.microsoft.com/office/drawing/2014/main" id="{5EEA11AA-90A1-6C03-D4CA-124328507124}"/>
+              </a:ext>
+            </a:extLst>
+          </p:cNvPr>
+          <p:cNvSpPr>
+            <a:spLocks noGrp="1"/>
+          </p:cNvSpPr>
+          <p:nvPr>
+            <p:ph type="ftr" sz="quarter" idx="11"/>
+          </p:nvPr>
+        </p:nvSpPr>
+        <p:spPr/>
+        <p:txBody>
+          <a:bodyPr/>
+          <a:lstStyle/>
+          <a:p>
+            <a:r>
+              <a:rPr lang="en-US"/>
+              <a:t>© Steve Beaty and others as cited</a:t>
+            </a:r>
+          </a:p>
+        </p:txBody>
+      </p:sp>
+      <p:sp>
+        <p:nvSpPr>
+          <p:cNvPr id="6" name="Slide Number Placeholder 5">
+            <a:extLst>
+              <a:ext uri="{FF2B5EF4-FFF2-40B4-BE49-F238E27FC236}">
+                <a16:creationId xmlns:a16="http://schemas.microsoft.com/office/drawing/2014/main" id="{58FE5814-6D24-9F0D-5BF0-B8AF7A4DC135}"/>
+              </a:ext>
+            </a:extLst>
+          </p:cNvPr>
+          <p:cNvSpPr>
+            <a:spLocks noGrp="1"/>
+          </p:cNvSpPr>
+          <p:nvPr>
+            <p:ph type="sldNum" sz="quarter" idx="12"/>
+          </p:nvPr>
+        </p:nvSpPr>
+        <p:spPr/>
+        <p:txBody>
+          <a:bodyPr/>
+          <a:lstStyle/>
+          <a:p>
+            <a:fld id="{5CA8E750-09AF-F04A-AC61-93A8E70A6AD8}" type="slidenum">
+              <a:rPr lang="en-US" smtClean="0"/>
+              <a:t>52</a:t>
+            </a:fld>
+            <a:endParaRPr lang="en-US"/>
           </a:p>
         </p:txBody>
       </p:sp>
@@ -10076,12 +14496,12 @@
   </p:clrMapOvr>
   <mc:AlternateContent xmlns:mc="http://schemas.openxmlformats.org/markup-compatibility/2006" xmlns:p14="http://schemas.microsoft.com/office/powerpoint/2010/main">
     <mc:Choice Requires="p14">
-      <p:transition spd="slow" p14:dur="1200">
-        <p14:prism/>
+      <p:transition spd="slow" p14:dur="2000">
+        <p14:prism isContent="1"/>
       </p:transition>
     </mc:Choice>
     <mc:Fallback xmlns="">
-      <p:transition xmlns:p14="http://schemas.microsoft.com/office/powerpoint/2010/main" spd="slow">
+      <p:transition spd="slow">
         <p:fade/>
       </p:transition>
     </mc:Fallback>
@@ -10124,7 +14544,9 @@
         </p:nvSpPr>
         <p:spPr/>
         <p:txBody>
-          <a:bodyPr/>
+          <a:bodyPr>
+            <a:normAutofit fontScale="90000"/>
+          </a:bodyPr>
           <a:lstStyle/>
           <a:p>
             <a:r>
@@ -10152,7 +14574,9 @@
         </p:nvSpPr>
         <p:spPr/>
         <p:txBody>
-          <a:bodyPr/>
+          <a:bodyPr>
+            <a:normAutofit lnSpcReduction="10000"/>
+          </a:bodyPr>
           <a:lstStyle/>
           <a:p>
             <a:r>
@@ -10171,6 +14595,92 @@
               <a:rPr lang="en-US" dirty="0"/>
               <a:t>We must improve the code when we find redundancies, inefficient code, and errors</a:t>
             </a:r>
+          </a:p>
+        </p:txBody>
+      </p:sp>
+      <p:sp>
+        <p:nvSpPr>
+          <p:cNvPr id="4" name="Date Placeholder 3">
+            <a:extLst>
+              <a:ext uri="{FF2B5EF4-FFF2-40B4-BE49-F238E27FC236}">
+                <a16:creationId xmlns:a16="http://schemas.microsoft.com/office/drawing/2014/main" id="{981F4835-BF2F-8C6F-0CAA-42CB0EC218A7}"/>
+              </a:ext>
+            </a:extLst>
+          </p:cNvPr>
+          <p:cNvSpPr>
+            <a:spLocks noGrp="1"/>
+          </p:cNvSpPr>
+          <p:nvPr>
+            <p:ph type="dt" sz="half" idx="10"/>
+          </p:nvPr>
+        </p:nvSpPr>
+        <p:spPr/>
+        <p:txBody>
+          <a:bodyPr/>
+          <a:lstStyle/>
+          <a:p>
+            <a:fld id="{93EAAC53-34C7-5140-99EE-D0088E807D3C}" type="datetime1">
+              <a:rPr lang="en-US" smtClean="0"/>
+              <a:t>10/8/26</a:t>
+            </a:fld>
+            <a:endParaRPr lang="en-US"/>
+          </a:p>
+        </p:txBody>
+      </p:sp>
+      <p:sp>
+        <p:nvSpPr>
+          <p:cNvPr id="5" name="Footer Placeholder 4">
+            <a:extLst>
+              <a:ext uri="{FF2B5EF4-FFF2-40B4-BE49-F238E27FC236}">
+                <a16:creationId xmlns:a16="http://schemas.microsoft.com/office/drawing/2014/main" id="{6EF1999B-0507-E6B2-CA98-76CC60864850}"/>
+              </a:ext>
+            </a:extLst>
+          </p:cNvPr>
+          <p:cNvSpPr>
+            <a:spLocks noGrp="1"/>
+          </p:cNvSpPr>
+          <p:nvPr>
+            <p:ph type="ftr" sz="quarter" idx="11"/>
+          </p:nvPr>
+        </p:nvSpPr>
+        <p:spPr/>
+        <p:txBody>
+          <a:bodyPr/>
+          <a:lstStyle/>
+          <a:p>
+            <a:r>
+              <a:rPr lang="en-US"/>
+              <a:t>© Steve Beaty and others as cited</a:t>
+            </a:r>
+          </a:p>
+        </p:txBody>
+      </p:sp>
+      <p:sp>
+        <p:nvSpPr>
+          <p:cNvPr id="6" name="Slide Number Placeholder 5">
+            <a:extLst>
+              <a:ext uri="{FF2B5EF4-FFF2-40B4-BE49-F238E27FC236}">
+                <a16:creationId xmlns:a16="http://schemas.microsoft.com/office/drawing/2014/main" id="{B0530A4A-B2C8-83AF-A3EC-25EC4D3A4D77}"/>
+              </a:ext>
+            </a:extLst>
+          </p:cNvPr>
+          <p:cNvSpPr>
+            <a:spLocks noGrp="1"/>
+          </p:cNvSpPr>
+          <p:nvPr>
+            <p:ph type="sldNum" sz="quarter" idx="12"/>
+          </p:nvPr>
+        </p:nvSpPr>
+        <p:spPr/>
+        <p:txBody>
+          <a:bodyPr/>
+          <a:lstStyle/>
+          <a:p>
+            <a:fld id="{5CA8E750-09AF-F04A-AC61-93A8E70A6AD8}" type="slidenum">
+              <a:rPr lang="en-US" smtClean="0"/>
+              <a:t>53</a:t>
+            </a:fld>
+            <a:endParaRPr lang="en-US"/>
           </a:p>
         </p:txBody>
       </p:sp>
@@ -10186,12 +14696,12 @@
   </p:clrMapOvr>
   <mc:AlternateContent xmlns:mc="http://schemas.openxmlformats.org/markup-compatibility/2006" xmlns:p14="http://schemas.microsoft.com/office/powerpoint/2010/main">
     <mc:Choice Requires="p14">
-      <p:transition spd="slow" p14:dur="1200">
-        <p14:prism/>
+      <p:transition spd="slow" p14:dur="2000">
+        <p14:prism isContent="1"/>
       </p:transition>
     </mc:Choice>
     <mc:Fallback xmlns="">
-      <p:transition xmlns:p14="http://schemas.microsoft.com/office/powerpoint/2010/main" spd="slow">
+      <p:transition spd="slow">
         <p:fade/>
       </p:transition>
     </mc:Fallback>
@@ -10234,7 +14744,9 @@
         </p:nvSpPr>
         <p:spPr/>
         <p:txBody>
-          <a:bodyPr/>
+          <a:bodyPr>
+            <a:normAutofit fontScale="90000"/>
+          </a:bodyPr>
           <a:lstStyle/>
           <a:p>
             <a:r>
@@ -10269,6 +14781,92 @@
               <a:rPr lang="en-US" dirty="0"/>
               <a:t>When we write tests, we think “How can I break this? Under what circumstances should/shouldn’t this work?” in addition to the usual “How can I make this work?” </a:t>
             </a:r>
+          </a:p>
+        </p:txBody>
+      </p:sp>
+      <p:sp>
+        <p:nvSpPr>
+          <p:cNvPr id="4" name="Date Placeholder 3">
+            <a:extLst>
+              <a:ext uri="{FF2B5EF4-FFF2-40B4-BE49-F238E27FC236}">
+                <a16:creationId xmlns:a16="http://schemas.microsoft.com/office/drawing/2014/main" id="{3ACA62F5-BC49-8466-D107-5B6D2166709C}"/>
+              </a:ext>
+            </a:extLst>
+          </p:cNvPr>
+          <p:cNvSpPr>
+            <a:spLocks noGrp="1"/>
+          </p:cNvSpPr>
+          <p:nvPr>
+            <p:ph type="dt" sz="half" idx="10"/>
+          </p:nvPr>
+        </p:nvSpPr>
+        <p:spPr/>
+        <p:txBody>
+          <a:bodyPr/>
+          <a:lstStyle/>
+          <a:p>
+            <a:fld id="{C0C4222D-28B7-FE40-B141-490992AF2987}" type="datetime1">
+              <a:rPr lang="en-US" smtClean="0"/>
+              <a:t>10/8/26</a:t>
+            </a:fld>
+            <a:endParaRPr lang="en-US"/>
+          </a:p>
+        </p:txBody>
+      </p:sp>
+      <p:sp>
+        <p:nvSpPr>
+          <p:cNvPr id="5" name="Footer Placeholder 4">
+            <a:extLst>
+              <a:ext uri="{FF2B5EF4-FFF2-40B4-BE49-F238E27FC236}">
+                <a16:creationId xmlns:a16="http://schemas.microsoft.com/office/drawing/2014/main" id="{A1D01F80-B3E9-FCB2-D9BA-B88A77FCCADE}"/>
+              </a:ext>
+            </a:extLst>
+          </p:cNvPr>
+          <p:cNvSpPr>
+            <a:spLocks noGrp="1"/>
+          </p:cNvSpPr>
+          <p:nvPr>
+            <p:ph type="ftr" sz="quarter" idx="11"/>
+          </p:nvPr>
+        </p:nvSpPr>
+        <p:spPr/>
+        <p:txBody>
+          <a:bodyPr/>
+          <a:lstStyle/>
+          <a:p>
+            <a:r>
+              <a:rPr lang="en-US"/>
+              <a:t>© Steve Beaty and others as cited</a:t>
+            </a:r>
+          </a:p>
+        </p:txBody>
+      </p:sp>
+      <p:sp>
+        <p:nvSpPr>
+          <p:cNvPr id="6" name="Slide Number Placeholder 5">
+            <a:extLst>
+              <a:ext uri="{FF2B5EF4-FFF2-40B4-BE49-F238E27FC236}">
+                <a16:creationId xmlns:a16="http://schemas.microsoft.com/office/drawing/2014/main" id="{BF8ED8C9-D9B9-4299-2C92-1929C9B6F86A}"/>
+              </a:ext>
+            </a:extLst>
+          </p:cNvPr>
+          <p:cNvSpPr>
+            <a:spLocks noGrp="1"/>
+          </p:cNvSpPr>
+          <p:nvPr>
+            <p:ph type="sldNum" sz="quarter" idx="12"/>
+          </p:nvPr>
+        </p:nvSpPr>
+        <p:spPr/>
+        <p:txBody>
+          <a:bodyPr/>
+          <a:lstStyle/>
+          <a:p>
+            <a:fld id="{5CA8E750-09AF-F04A-AC61-93A8E70A6AD8}" type="slidenum">
+              <a:rPr lang="en-US" smtClean="0"/>
+              <a:t>54</a:t>
+            </a:fld>
+            <a:endParaRPr lang="en-US"/>
           </a:p>
         </p:txBody>
       </p:sp>
@@ -10284,12 +14882,12 @@
   </p:clrMapOvr>
   <mc:AlternateContent xmlns:mc="http://schemas.openxmlformats.org/markup-compatibility/2006" xmlns:p14="http://schemas.microsoft.com/office/powerpoint/2010/main">
     <mc:Choice Requires="p14">
-      <p:transition spd="slow" p14:dur="1200">
-        <p14:prism/>
+      <p:transition spd="slow" p14:dur="2000">
+        <p14:prism isContent="1"/>
       </p:transition>
     </mc:Choice>
     <mc:Fallback xmlns="">
-      <p:transition xmlns:p14="http://schemas.microsoft.com/office/powerpoint/2010/main" spd="slow">
+      <p:transition spd="slow">
         <p:fade/>
       </p:transition>
     </mc:Fallback>
@@ -10332,7 +14930,9 @@
         </p:nvSpPr>
         <p:spPr/>
         <p:txBody>
-          <a:bodyPr/>
+          <a:bodyPr>
+            <a:normAutofit fontScale="90000"/>
+          </a:bodyPr>
           <a:lstStyle/>
           <a:p>
             <a:r>
@@ -10360,7 +14960,9 @@
         </p:nvSpPr>
         <p:spPr/>
         <p:txBody>
-          <a:bodyPr/>
+          <a:bodyPr>
+            <a:normAutofit lnSpcReduction="10000"/>
+          </a:bodyPr>
           <a:lstStyle/>
           <a:p>
             <a:r>
@@ -10393,6 +14995,92 @@
               <a:rPr lang="en-US" dirty="0"/>
               <a:t>Helps when we need to refactor</a:t>
             </a:r>
+          </a:p>
+        </p:txBody>
+      </p:sp>
+      <p:sp>
+        <p:nvSpPr>
+          <p:cNvPr id="4" name="Date Placeholder 3">
+            <a:extLst>
+              <a:ext uri="{FF2B5EF4-FFF2-40B4-BE49-F238E27FC236}">
+                <a16:creationId xmlns:a16="http://schemas.microsoft.com/office/drawing/2014/main" id="{C01CBDB2-A006-0D93-3DC2-1DC0C90F27FF}"/>
+              </a:ext>
+            </a:extLst>
+          </p:cNvPr>
+          <p:cNvSpPr>
+            <a:spLocks noGrp="1"/>
+          </p:cNvSpPr>
+          <p:nvPr>
+            <p:ph type="dt" sz="half" idx="10"/>
+          </p:nvPr>
+        </p:nvSpPr>
+        <p:spPr/>
+        <p:txBody>
+          <a:bodyPr/>
+          <a:lstStyle/>
+          <a:p>
+            <a:fld id="{CF5AC9D1-C556-A24A-AA11-87FD0F1F1815}" type="datetime1">
+              <a:rPr lang="en-US" smtClean="0"/>
+              <a:t>10/8/26</a:t>
+            </a:fld>
+            <a:endParaRPr lang="en-US"/>
+          </a:p>
+        </p:txBody>
+      </p:sp>
+      <p:sp>
+        <p:nvSpPr>
+          <p:cNvPr id="5" name="Footer Placeholder 4">
+            <a:extLst>
+              <a:ext uri="{FF2B5EF4-FFF2-40B4-BE49-F238E27FC236}">
+                <a16:creationId xmlns:a16="http://schemas.microsoft.com/office/drawing/2014/main" id="{73684FF5-C819-473E-D04E-E17AB04C180D}"/>
+              </a:ext>
+            </a:extLst>
+          </p:cNvPr>
+          <p:cNvSpPr>
+            <a:spLocks noGrp="1"/>
+          </p:cNvSpPr>
+          <p:nvPr>
+            <p:ph type="ftr" sz="quarter" idx="11"/>
+          </p:nvPr>
+        </p:nvSpPr>
+        <p:spPr/>
+        <p:txBody>
+          <a:bodyPr/>
+          <a:lstStyle/>
+          <a:p>
+            <a:r>
+              <a:rPr lang="en-US"/>
+              <a:t>© Steve Beaty and others as cited</a:t>
+            </a:r>
+          </a:p>
+        </p:txBody>
+      </p:sp>
+      <p:sp>
+        <p:nvSpPr>
+          <p:cNvPr id="6" name="Slide Number Placeholder 5">
+            <a:extLst>
+              <a:ext uri="{FF2B5EF4-FFF2-40B4-BE49-F238E27FC236}">
+                <a16:creationId xmlns:a16="http://schemas.microsoft.com/office/drawing/2014/main" id="{70453511-AF27-5A6A-C487-CFDF4585204F}"/>
+              </a:ext>
+            </a:extLst>
+          </p:cNvPr>
+          <p:cNvSpPr>
+            <a:spLocks noGrp="1"/>
+          </p:cNvSpPr>
+          <p:nvPr>
+            <p:ph type="sldNum" sz="quarter" idx="12"/>
+          </p:nvPr>
+        </p:nvSpPr>
+        <p:spPr/>
+        <p:txBody>
+          <a:bodyPr/>
+          <a:lstStyle/>
+          <a:p>
+            <a:fld id="{5CA8E750-09AF-F04A-AC61-93A8E70A6AD8}" type="slidenum">
+              <a:rPr lang="en-US" smtClean="0"/>
+              <a:t>55</a:t>
+            </a:fld>
+            <a:endParaRPr lang="en-US"/>
           </a:p>
         </p:txBody>
       </p:sp>
@@ -10408,12 +15096,12 @@
   </p:clrMapOvr>
   <mc:AlternateContent xmlns:mc="http://schemas.openxmlformats.org/markup-compatibility/2006" xmlns:p14="http://schemas.microsoft.com/office/powerpoint/2010/main">
     <mc:Choice Requires="p14">
-      <p:transition spd="slow" p14:dur="1200">
-        <p14:prism/>
+      <p:transition spd="slow" p14:dur="2000">
+        <p14:prism isContent="1"/>
       </p:transition>
     </mc:Choice>
     <mc:Fallback xmlns="">
-      <p:transition xmlns:p14="http://schemas.microsoft.com/office/powerpoint/2010/main" spd="slow">
+      <p:transition spd="slow">
         <p:fade/>
       </p:transition>
     </mc:Fallback>
@@ -10456,7 +15144,9 @@
         </p:nvSpPr>
         <p:spPr/>
         <p:txBody>
-          <a:bodyPr/>
+          <a:bodyPr>
+            <a:normAutofit fontScale="90000"/>
+          </a:bodyPr>
           <a:lstStyle/>
           <a:p>
             <a:r>
@@ -10593,6 +15283,92 @@
           </a:p>
           <a:p>
             <a:endParaRPr lang="en-US" sz="2000" dirty="0"/>
+          </a:p>
+        </p:txBody>
+      </p:sp>
+      <p:sp>
+        <p:nvSpPr>
+          <p:cNvPr id="4" name="Date Placeholder 3">
+            <a:extLst>
+              <a:ext uri="{FF2B5EF4-FFF2-40B4-BE49-F238E27FC236}">
+                <a16:creationId xmlns:a16="http://schemas.microsoft.com/office/drawing/2014/main" id="{8EBD9758-B08F-AF20-66A0-B21DE35CD024}"/>
+              </a:ext>
+            </a:extLst>
+          </p:cNvPr>
+          <p:cNvSpPr>
+            <a:spLocks noGrp="1"/>
+          </p:cNvSpPr>
+          <p:nvPr>
+            <p:ph type="dt" sz="half" idx="10"/>
+          </p:nvPr>
+        </p:nvSpPr>
+        <p:spPr/>
+        <p:txBody>
+          <a:bodyPr/>
+          <a:lstStyle/>
+          <a:p>
+            <a:fld id="{498BF96E-4605-7B42-8F20-73C7EE44B466}" type="datetime1">
+              <a:rPr lang="en-US" smtClean="0"/>
+              <a:t>10/8/26</a:t>
+            </a:fld>
+            <a:endParaRPr lang="en-US"/>
+          </a:p>
+        </p:txBody>
+      </p:sp>
+      <p:sp>
+        <p:nvSpPr>
+          <p:cNvPr id="5" name="Footer Placeholder 4">
+            <a:extLst>
+              <a:ext uri="{FF2B5EF4-FFF2-40B4-BE49-F238E27FC236}">
+                <a16:creationId xmlns:a16="http://schemas.microsoft.com/office/drawing/2014/main" id="{2CBA32ED-4BEC-C228-C46B-572F140F5FD4}"/>
+              </a:ext>
+            </a:extLst>
+          </p:cNvPr>
+          <p:cNvSpPr>
+            <a:spLocks noGrp="1"/>
+          </p:cNvSpPr>
+          <p:nvPr>
+            <p:ph type="ftr" sz="quarter" idx="11"/>
+          </p:nvPr>
+        </p:nvSpPr>
+        <p:spPr/>
+        <p:txBody>
+          <a:bodyPr/>
+          <a:lstStyle/>
+          <a:p>
+            <a:r>
+              <a:rPr lang="en-US"/>
+              <a:t>© Steve Beaty and others as cited</a:t>
+            </a:r>
+          </a:p>
+        </p:txBody>
+      </p:sp>
+      <p:sp>
+        <p:nvSpPr>
+          <p:cNvPr id="6" name="Slide Number Placeholder 5">
+            <a:extLst>
+              <a:ext uri="{FF2B5EF4-FFF2-40B4-BE49-F238E27FC236}">
+                <a16:creationId xmlns:a16="http://schemas.microsoft.com/office/drawing/2014/main" id="{129EBDD9-985B-35D0-7E96-48ABB3C0E77A}"/>
+              </a:ext>
+            </a:extLst>
+          </p:cNvPr>
+          <p:cNvSpPr>
+            <a:spLocks noGrp="1"/>
+          </p:cNvSpPr>
+          <p:nvPr>
+            <p:ph type="sldNum" sz="quarter" idx="12"/>
+          </p:nvPr>
+        </p:nvSpPr>
+        <p:spPr/>
+        <p:txBody>
+          <a:bodyPr/>
+          <a:lstStyle/>
+          <a:p>
+            <a:fld id="{5CA8E750-09AF-F04A-AC61-93A8E70A6AD8}" type="slidenum">
+              <a:rPr lang="en-US" smtClean="0"/>
+              <a:t>56</a:t>
+            </a:fld>
+            <a:endParaRPr lang="en-US"/>
           </a:p>
         </p:txBody>
       </p:sp>
@@ -10656,7 +15432,9 @@
         </p:nvSpPr>
         <p:spPr/>
         <p:txBody>
-          <a:bodyPr/>
+          <a:bodyPr>
+            <a:normAutofit fontScale="90000"/>
+          </a:bodyPr>
           <a:lstStyle/>
           <a:p>
             <a:r>
@@ -10703,6 +15481,92 @@
               <a:rPr lang="en-US" dirty="0"/>
               <a:t>Then the state of the system changes</a:t>
             </a:r>
+          </a:p>
+        </p:txBody>
+      </p:sp>
+      <p:sp>
+        <p:nvSpPr>
+          <p:cNvPr id="3" name="Date Placeholder 2">
+            <a:extLst>
+              <a:ext uri="{FF2B5EF4-FFF2-40B4-BE49-F238E27FC236}">
+                <a16:creationId xmlns:a16="http://schemas.microsoft.com/office/drawing/2014/main" id="{B1A99927-2A5E-70BA-D005-8F068B78BA28}"/>
+              </a:ext>
+            </a:extLst>
+          </p:cNvPr>
+          <p:cNvSpPr>
+            <a:spLocks noGrp="1"/>
+          </p:cNvSpPr>
+          <p:nvPr>
+            <p:ph type="dt" sz="half" idx="10"/>
+          </p:nvPr>
+        </p:nvSpPr>
+        <p:spPr/>
+        <p:txBody>
+          <a:bodyPr/>
+          <a:lstStyle/>
+          <a:p>
+            <a:fld id="{73F012FC-4427-AF4F-9E63-5F271FF168C2}" type="datetime1">
+              <a:rPr lang="en-US" smtClean="0"/>
+              <a:t>10/8/26</a:t>
+            </a:fld>
+            <a:endParaRPr lang="en-US"/>
+          </a:p>
+        </p:txBody>
+      </p:sp>
+      <p:sp>
+        <p:nvSpPr>
+          <p:cNvPr id="5" name="Footer Placeholder 4">
+            <a:extLst>
+              <a:ext uri="{FF2B5EF4-FFF2-40B4-BE49-F238E27FC236}">
+                <a16:creationId xmlns:a16="http://schemas.microsoft.com/office/drawing/2014/main" id="{95997A27-E132-A01D-F17E-50DB263DEF89}"/>
+              </a:ext>
+            </a:extLst>
+          </p:cNvPr>
+          <p:cNvSpPr>
+            <a:spLocks noGrp="1"/>
+          </p:cNvSpPr>
+          <p:nvPr>
+            <p:ph type="ftr" sz="quarter" idx="11"/>
+          </p:nvPr>
+        </p:nvSpPr>
+        <p:spPr/>
+        <p:txBody>
+          <a:bodyPr/>
+          <a:lstStyle/>
+          <a:p>
+            <a:r>
+              <a:rPr lang="en-US"/>
+              <a:t>© Steve Beaty and others as cited</a:t>
+            </a:r>
+          </a:p>
+        </p:txBody>
+      </p:sp>
+      <p:sp>
+        <p:nvSpPr>
+          <p:cNvPr id="6" name="Slide Number Placeholder 5">
+            <a:extLst>
+              <a:ext uri="{FF2B5EF4-FFF2-40B4-BE49-F238E27FC236}">
+                <a16:creationId xmlns:a16="http://schemas.microsoft.com/office/drawing/2014/main" id="{F61C0ABF-E860-2D41-7F00-8C6551542FEF}"/>
+              </a:ext>
+            </a:extLst>
+          </p:cNvPr>
+          <p:cNvSpPr>
+            <a:spLocks noGrp="1"/>
+          </p:cNvSpPr>
+          <p:nvPr>
+            <p:ph type="sldNum" sz="quarter" idx="12"/>
+          </p:nvPr>
+        </p:nvSpPr>
+        <p:spPr/>
+        <p:txBody>
+          <a:bodyPr/>
+          <a:lstStyle/>
+          <a:p>
+            <a:fld id="{5CA8E750-09AF-F04A-AC61-93A8E70A6AD8}" type="slidenum">
+              <a:rPr lang="en-US" smtClean="0"/>
+              <a:t>57</a:t>
+            </a:fld>
+            <a:endParaRPr lang="en-US"/>
           </a:p>
         </p:txBody>
       </p:sp>
@@ -10718,12 +15582,12 @@
   </p:clrMapOvr>
   <mc:AlternateContent xmlns:mc="http://schemas.openxmlformats.org/markup-compatibility/2006" xmlns:p14="http://schemas.microsoft.com/office/powerpoint/2010/main">
     <mc:Choice Requires="p14">
-      <p:transition spd="slow" p14:dur="1200">
-        <p14:prism/>
+      <p:transition spd="slow" p14:dur="2000">
+        <p14:prism isContent="1"/>
       </p:transition>
     </mc:Choice>
     <mc:Fallback xmlns="">
-      <p:transition xmlns:p14="http://schemas.microsoft.com/office/powerpoint/2010/main" spd="slow">
+      <p:transition spd="slow">
         <p:fade/>
       </p:transition>
     </mc:Fallback>
@@ -10766,7 +15630,9 @@
         </p:nvSpPr>
         <p:spPr/>
         <p:txBody>
-          <a:bodyPr/>
+          <a:bodyPr>
+            <a:normAutofit fontScale="90000"/>
+          </a:bodyPr>
           <a:lstStyle/>
           <a:p>
             <a:r>
@@ -10930,6 +15796,92 @@
               <a:rPr lang="en-US" sz="2000" dirty="0"/>
               <a:t>  end</a:t>
             </a:r>
+          </a:p>
+        </p:txBody>
+      </p:sp>
+      <p:sp>
+        <p:nvSpPr>
+          <p:cNvPr id="2" name="Date Placeholder 1">
+            <a:extLst>
+              <a:ext uri="{FF2B5EF4-FFF2-40B4-BE49-F238E27FC236}">
+                <a16:creationId xmlns:a16="http://schemas.microsoft.com/office/drawing/2014/main" id="{E7ACE0E4-F1B0-A338-CD92-EDFDE27CBD01}"/>
+              </a:ext>
+            </a:extLst>
+          </p:cNvPr>
+          <p:cNvSpPr>
+            <a:spLocks noGrp="1"/>
+          </p:cNvSpPr>
+          <p:nvPr>
+            <p:ph type="dt" sz="half" idx="10"/>
+          </p:nvPr>
+        </p:nvSpPr>
+        <p:spPr/>
+        <p:txBody>
+          <a:bodyPr/>
+          <a:lstStyle/>
+          <a:p>
+            <a:fld id="{B4794341-9D39-EF44-BB41-DAB231A3C574}" type="datetime1">
+              <a:rPr lang="en-US" smtClean="0"/>
+              <a:t>10/8/26</a:t>
+            </a:fld>
+            <a:endParaRPr lang="en-US"/>
+          </a:p>
+        </p:txBody>
+      </p:sp>
+      <p:sp>
+        <p:nvSpPr>
+          <p:cNvPr id="5" name="Footer Placeholder 4">
+            <a:extLst>
+              <a:ext uri="{FF2B5EF4-FFF2-40B4-BE49-F238E27FC236}">
+                <a16:creationId xmlns:a16="http://schemas.microsoft.com/office/drawing/2014/main" id="{10D504EB-61A3-0F40-714A-0F9A1ADBB87F}"/>
+              </a:ext>
+            </a:extLst>
+          </p:cNvPr>
+          <p:cNvSpPr>
+            <a:spLocks noGrp="1"/>
+          </p:cNvSpPr>
+          <p:nvPr>
+            <p:ph type="ftr" sz="quarter" idx="11"/>
+          </p:nvPr>
+        </p:nvSpPr>
+        <p:spPr/>
+        <p:txBody>
+          <a:bodyPr/>
+          <a:lstStyle/>
+          <a:p>
+            <a:r>
+              <a:rPr lang="en-US"/>
+              <a:t>© Steve Beaty and others as cited</a:t>
+            </a:r>
+          </a:p>
+        </p:txBody>
+      </p:sp>
+      <p:sp>
+        <p:nvSpPr>
+          <p:cNvPr id="6" name="Slide Number Placeholder 5">
+            <a:extLst>
+              <a:ext uri="{FF2B5EF4-FFF2-40B4-BE49-F238E27FC236}">
+                <a16:creationId xmlns:a16="http://schemas.microsoft.com/office/drawing/2014/main" id="{8177C04C-D714-FAFB-3DAE-A0BED8A3DDB8}"/>
+              </a:ext>
+            </a:extLst>
+          </p:cNvPr>
+          <p:cNvSpPr>
+            <a:spLocks noGrp="1"/>
+          </p:cNvSpPr>
+          <p:nvPr>
+            <p:ph type="sldNum" sz="quarter" idx="12"/>
+          </p:nvPr>
+        </p:nvSpPr>
+        <p:spPr/>
+        <p:txBody>
+          <a:bodyPr/>
+          <a:lstStyle/>
+          <a:p>
+            <a:fld id="{5CA8E750-09AF-F04A-AC61-93A8E70A6AD8}" type="slidenum">
+              <a:rPr lang="en-US" smtClean="0"/>
+              <a:t>58</a:t>
+            </a:fld>
+            <a:endParaRPr lang="en-US"/>
           </a:p>
         </p:txBody>
       </p:sp>
@@ -10993,7 +15945,9 @@
         </p:nvSpPr>
         <p:spPr/>
         <p:txBody>
-          <a:bodyPr/>
+          <a:bodyPr>
+            <a:normAutofit fontScale="90000"/>
+          </a:bodyPr>
           <a:lstStyle/>
           <a:p>
             <a:r>
@@ -11022,7 +15976,7 @@
         <p:spPr/>
         <p:txBody>
           <a:bodyPr>
-            <a:normAutofit fontScale="92500" lnSpcReduction="10000"/>
+            <a:normAutofit fontScale="92500" lnSpcReduction="20000"/>
           </a:bodyPr>
           <a:lstStyle/>
           <a:p>
@@ -11172,6 +16126,92 @@
               <a:rPr lang="en-US" sz="2400" dirty="0"/>
               <a:t>  end</a:t>
             </a:r>
+          </a:p>
+        </p:txBody>
+      </p:sp>
+      <p:sp>
+        <p:nvSpPr>
+          <p:cNvPr id="4" name="Date Placeholder 3">
+            <a:extLst>
+              <a:ext uri="{FF2B5EF4-FFF2-40B4-BE49-F238E27FC236}">
+                <a16:creationId xmlns:a16="http://schemas.microsoft.com/office/drawing/2014/main" id="{C8E20E7E-FA9E-686F-0343-EAFEC9C3D25A}"/>
+              </a:ext>
+            </a:extLst>
+          </p:cNvPr>
+          <p:cNvSpPr>
+            <a:spLocks noGrp="1"/>
+          </p:cNvSpPr>
+          <p:nvPr>
+            <p:ph type="dt" sz="half" idx="10"/>
+          </p:nvPr>
+        </p:nvSpPr>
+        <p:spPr/>
+        <p:txBody>
+          <a:bodyPr/>
+          <a:lstStyle/>
+          <a:p>
+            <a:fld id="{FF0AE411-BF9A-9947-9CB7-D7D414E892E2}" type="datetime1">
+              <a:rPr lang="en-US" smtClean="0"/>
+              <a:t>10/8/26</a:t>
+            </a:fld>
+            <a:endParaRPr lang="en-US"/>
+          </a:p>
+        </p:txBody>
+      </p:sp>
+      <p:sp>
+        <p:nvSpPr>
+          <p:cNvPr id="5" name="Footer Placeholder 4">
+            <a:extLst>
+              <a:ext uri="{FF2B5EF4-FFF2-40B4-BE49-F238E27FC236}">
+                <a16:creationId xmlns:a16="http://schemas.microsoft.com/office/drawing/2014/main" id="{B1C8C082-0F6D-59A4-6BF3-91DC9A5D7E3E}"/>
+              </a:ext>
+            </a:extLst>
+          </p:cNvPr>
+          <p:cNvSpPr>
+            <a:spLocks noGrp="1"/>
+          </p:cNvSpPr>
+          <p:nvPr>
+            <p:ph type="ftr" sz="quarter" idx="11"/>
+          </p:nvPr>
+        </p:nvSpPr>
+        <p:spPr/>
+        <p:txBody>
+          <a:bodyPr/>
+          <a:lstStyle/>
+          <a:p>
+            <a:r>
+              <a:rPr lang="en-US"/>
+              <a:t>© Steve Beaty and others as cited</a:t>
+            </a:r>
+          </a:p>
+        </p:txBody>
+      </p:sp>
+      <p:sp>
+        <p:nvSpPr>
+          <p:cNvPr id="6" name="Slide Number Placeholder 5">
+            <a:extLst>
+              <a:ext uri="{FF2B5EF4-FFF2-40B4-BE49-F238E27FC236}">
+                <a16:creationId xmlns:a16="http://schemas.microsoft.com/office/drawing/2014/main" id="{CB2A0A05-2529-8667-FC3F-07C052B8A977}"/>
+              </a:ext>
+            </a:extLst>
+          </p:cNvPr>
+          <p:cNvSpPr>
+            <a:spLocks noGrp="1"/>
+          </p:cNvSpPr>
+          <p:nvPr>
+            <p:ph type="sldNum" sz="quarter" idx="12"/>
+          </p:nvPr>
+        </p:nvSpPr>
+        <p:spPr/>
+        <p:txBody>
+          <a:bodyPr/>
+          <a:lstStyle/>
+          <a:p>
+            <a:fld id="{5CA8E750-09AF-F04A-AC61-93A8E70A6AD8}" type="slidenum">
+              <a:rPr lang="en-US" smtClean="0"/>
+              <a:t>59</a:t>
+            </a:fld>
+            <a:endParaRPr lang="en-US"/>
           </a:p>
         </p:txBody>
       </p:sp>
@@ -11185,6 +16225,18 @@
   <p:clrMapOvr>
     <a:masterClrMapping/>
   </p:clrMapOvr>
+  <mc:AlternateContent xmlns:mc="http://schemas.openxmlformats.org/markup-compatibility/2006" xmlns:p14="http://schemas.microsoft.com/office/powerpoint/2010/main">
+    <mc:Choice Requires="p14">
+      <p:transition spd="slow" p14:dur="2000">
+        <p14:prism isContent="1"/>
+      </p:transition>
+    </mc:Choice>
+    <mc:Fallback xmlns="">
+      <p:transition spd="slow">
+        <p:fade/>
+      </p:transition>
+    </mc:Fallback>
+  </mc:AlternateContent>
 </p:sld>
 </file>
 
@@ -11223,7 +16275,9 @@
         </p:nvSpPr>
         <p:spPr/>
         <p:txBody>
-          <a:bodyPr/>
+          <a:bodyPr>
+            <a:normAutofit fontScale="90000"/>
+          </a:bodyPr>
           <a:lstStyle/>
           <a:p>
             <a:r>
@@ -11272,6 +16326,92 @@
               <a:rPr lang="en-US" dirty="0"/>
               <a:t>Rails requires none, but you can customize</a:t>
             </a:r>
+          </a:p>
+        </p:txBody>
+      </p:sp>
+      <p:sp>
+        <p:nvSpPr>
+          <p:cNvPr id="2" name="Date Placeholder 1">
+            <a:extLst>
+              <a:ext uri="{FF2B5EF4-FFF2-40B4-BE49-F238E27FC236}">
+                <a16:creationId xmlns:a16="http://schemas.microsoft.com/office/drawing/2014/main" id="{01FEE67D-90D6-B95C-130F-A9532F5CAC44}"/>
+              </a:ext>
+            </a:extLst>
+          </p:cNvPr>
+          <p:cNvSpPr>
+            <a:spLocks noGrp="1"/>
+          </p:cNvSpPr>
+          <p:nvPr>
+            <p:ph type="dt" sz="half" idx="10"/>
+          </p:nvPr>
+        </p:nvSpPr>
+        <p:spPr/>
+        <p:txBody>
+          <a:bodyPr/>
+          <a:lstStyle/>
+          <a:p>
+            <a:fld id="{3B48828F-08A3-D24B-875D-EDC27A9B8DC0}" type="datetime1">
+              <a:rPr lang="en-US" smtClean="0"/>
+              <a:t>10/8/26</a:t>
+            </a:fld>
+            <a:endParaRPr lang="en-US"/>
+          </a:p>
+        </p:txBody>
+      </p:sp>
+      <p:sp>
+        <p:nvSpPr>
+          <p:cNvPr id="3" name="Footer Placeholder 2">
+            <a:extLst>
+              <a:ext uri="{FF2B5EF4-FFF2-40B4-BE49-F238E27FC236}">
+                <a16:creationId xmlns:a16="http://schemas.microsoft.com/office/drawing/2014/main" id="{5DF86EFA-2DD0-9F93-8FFC-030147150B61}"/>
+              </a:ext>
+            </a:extLst>
+          </p:cNvPr>
+          <p:cNvSpPr>
+            <a:spLocks noGrp="1"/>
+          </p:cNvSpPr>
+          <p:nvPr>
+            <p:ph type="ftr" sz="quarter" idx="11"/>
+          </p:nvPr>
+        </p:nvSpPr>
+        <p:spPr/>
+        <p:txBody>
+          <a:bodyPr/>
+          <a:lstStyle/>
+          <a:p>
+            <a:r>
+              <a:rPr lang="en-US"/>
+              <a:t>© Steve Beaty and others as cited</a:t>
+            </a:r>
+          </a:p>
+        </p:txBody>
+      </p:sp>
+      <p:sp>
+        <p:nvSpPr>
+          <p:cNvPr id="4" name="Slide Number Placeholder 3">
+            <a:extLst>
+              <a:ext uri="{FF2B5EF4-FFF2-40B4-BE49-F238E27FC236}">
+                <a16:creationId xmlns:a16="http://schemas.microsoft.com/office/drawing/2014/main" id="{2590332D-FA51-56F2-DF49-0516375FB3DF}"/>
+              </a:ext>
+            </a:extLst>
+          </p:cNvPr>
+          <p:cNvSpPr>
+            <a:spLocks noGrp="1"/>
+          </p:cNvSpPr>
+          <p:nvPr>
+            <p:ph type="sldNum" sz="quarter" idx="12"/>
+          </p:nvPr>
+        </p:nvSpPr>
+        <p:spPr/>
+        <p:txBody>
+          <a:bodyPr/>
+          <a:lstStyle/>
+          <a:p>
+            <a:fld id="{5CA8E750-09AF-F04A-AC61-93A8E70A6AD8}" type="slidenum">
+              <a:rPr lang="en-US" smtClean="0"/>
+              <a:t>6</a:t>
+            </a:fld>
+            <a:endParaRPr lang="en-US"/>
           </a:p>
         </p:txBody>
       </p:sp>
@@ -11287,12 +16427,12 @@
   </p:clrMapOvr>
   <mc:AlternateContent xmlns:mc="http://schemas.openxmlformats.org/markup-compatibility/2006" xmlns:p14="http://schemas.microsoft.com/office/powerpoint/2010/main">
     <mc:Choice Requires="p14">
-      <p:transition spd="slow" p14:dur="1200">
-        <p14:prism/>
+      <p:transition spd="slow" p14:dur="2000">
+        <p14:prism isContent="1"/>
       </p:transition>
     </mc:Choice>
     <mc:Fallback xmlns="">
-      <p:transition xmlns:p14="http://schemas.microsoft.com/office/powerpoint/2010/main" spd="slow">
+      <p:transition spd="slow">
         <p:fade/>
       </p:transition>
     </mc:Fallback>
@@ -11335,7 +16475,9 @@
         </p:nvSpPr>
         <p:spPr/>
         <p:txBody>
-          <a:bodyPr/>
+          <a:bodyPr>
+            <a:normAutofit fontScale="90000"/>
+          </a:bodyPr>
           <a:lstStyle/>
           <a:p>
             <a:r>
@@ -11395,6 +16537,92 @@
               <a:rPr lang="en-US" dirty="0"/>
               <a:t>Faster for certain operations</a:t>
             </a:r>
+          </a:p>
+        </p:txBody>
+      </p:sp>
+      <p:sp>
+        <p:nvSpPr>
+          <p:cNvPr id="3" name="Date Placeholder 2">
+            <a:extLst>
+              <a:ext uri="{FF2B5EF4-FFF2-40B4-BE49-F238E27FC236}">
+                <a16:creationId xmlns:a16="http://schemas.microsoft.com/office/drawing/2014/main" id="{F94F73BF-005A-8083-D84F-91AFAEE3C029}"/>
+              </a:ext>
+            </a:extLst>
+          </p:cNvPr>
+          <p:cNvSpPr>
+            <a:spLocks noGrp="1"/>
+          </p:cNvSpPr>
+          <p:nvPr>
+            <p:ph type="dt" sz="half" idx="10"/>
+          </p:nvPr>
+        </p:nvSpPr>
+        <p:spPr/>
+        <p:txBody>
+          <a:bodyPr/>
+          <a:lstStyle/>
+          <a:p>
+            <a:fld id="{08F3DE71-AA5B-7C44-94A4-6EC7133E59ED}" type="datetime1">
+              <a:rPr lang="en-US" smtClean="0"/>
+              <a:t>10/8/26</a:t>
+            </a:fld>
+            <a:endParaRPr lang="en-US"/>
+          </a:p>
+        </p:txBody>
+      </p:sp>
+      <p:sp>
+        <p:nvSpPr>
+          <p:cNvPr id="5" name="Footer Placeholder 4">
+            <a:extLst>
+              <a:ext uri="{FF2B5EF4-FFF2-40B4-BE49-F238E27FC236}">
+                <a16:creationId xmlns:a16="http://schemas.microsoft.com/office/drawing/2014/main" id="{1E63B49B-086C-9205-8650-6BD8CE8C0E42}"/>
+              </a:ext>
+            </a:extLst>
+          </p:cNvPr>
+          <p:cNvSpPr>
+            <a:spLocks noGrp="1"/>
+          </p:cNvSpPr>
+          <p:nvPr>
+            <p:ph type="ftr" sz="quarter" idx="11"/>
+          </p:nvPr>
+        </p:nvSpPr>
+        <p:spPr/>
+        <p:txBody>
+          <a:bodyPr/>
+          <a:lstStyle/>
+          <a:p>
+            <a:r>
+              <a:rPr lang="en-US"/>
+              <a:t>© Steve Beaty and others as cited</a:t>
+            </a:r>
+          </a:p>
+        </p:txBody>
+      </p:sp>
+      <p:sp>
+        <p:nvSpPr>
+          <p:cNvPr id="6" name="Slide Number Placeholder 5">
+            <a:extLst>
+              <a:ext uri="{FF2B5EF4-FFF2-40B4-BE49-F238E27FC236}">
+                <a16:creationId xmlns:a16="http://schemas.microsoft.com/office/drawing/2014/main" id="{0405AA53-87D7-00F8-244C-5BFF135D1E08}"/>
+              </a:ext>
+            </a:extLst>
+          </p:cNvPr>
+          <p:cNvSpPr>
+            <a:spLocks noGrp="1"/>
+          </p:cNvSpPr>
+          <p:nvPr>
+            <p:ph type="sldNum" sz="quarter" idx="12"/>
+          </p:nvPr>
+        </p:nvSpPr>
+        <p:spPr/>
+        <p:txBody>
+          <a:bodyPr/>
+          <a:lstStyle/>
+          <a:p>
+            <a:fld id="{5CA8E750-09AF-F04A-AC61-93A8E70A6AD8}" type="slidenum">
+              <a:rPr lang="en-US" smtClean="0"/>
+              <a:t>60</a:t>
+            </a:fld>
+            <a:endParaRPr lang="en-US"/>
           </a:p>
         </p:txBody>
       </p:sp>
@@ -11410,12 +16638,12 @@
   </p:clrMapOvr>
   <mc:AlternateContent xmlns:mc="http://schemas.openxmlformats.org/markup-compatibility/2006" xmlns:p14="http://schemas.microsoft.com/office/powerpoint/2010/main">
     <mc:Choice Requires="p14">
-      <p:transition spd="slow" p14:dur="1200">
-        <p14:prism/>
+      <p:transition spd="slow" p14:dur="2000">
+        <p14:prism isContent="1"/>
       </p:transition>
     </mc:Choice>
     <mc:Fallback xmlns="">
-      <p:transition xmlns:p14="http://schemas.microsoft.com/office/powerpoint/2010/main" spd="slow">
+      <p:transition spd="slow">
         <p:fade/>
       </p:transition>
     </mc:Fallback>
@@ -11458,7 +16686,9 @@
         </p:nvSpPr>
         <p:spPr/>
         <p:txBody>
-          <a:bodyPr/>
+          <a:bodyPr>
+            <a:normAutofit fontScale="90000"/>
+          </a:bodyPr>
           <a:lstStyle/>
           <a:p>
             <a:r>
@@ -11486,7 +16716,9 @@
         </p:nvSpPr>
         <p:spPr/>
         <p:txBody>
-          <a:bodyPr/>
+          <a:bodyPr>
+            <a:normAutofit lnSpcReduction="10000"/>
+          </a:bodyPr>
           <a:lstStyle/>
           <a:p>
             <a:r>
@@ -11520,6 +16752,92 @@
               <a:rPr lang="en-US" dirty="0"/>
               <a:t>Modifications can be slower</a:t>
             </a:r>
+          </a:p>
+        </p:txBody>
+      </p:sp>
+      <p:sp>
+        <p:nvSpPr>
+          <p:cNvPr id="4" name="Date Placeholder 3">
+            <a:extLst>
+              <a:ext uri="{FF2B5EF4-FFF2-40B4-BE49-F238E27FC236}">
+                <a16:creationId xmlns:a16="http://schemas.microsoft.com/office/drawing/2014/main" id="{F9E12FA4-95E4-2CFE-4A15-253BB7783191}"/>
+              </a:ext>
+            </a:extLst>
+          </p:cNvPr>
+          <p:cNvSpPr>
+            <a:spLocks noGrp="1"/>
+          </p:cNvSpPr>
+          <p:nvPr>
+            <p:ph type="dt" sz="half" idx="10"/>
+          </p:nvPr>
+        </p:nvSpPr>
+        <p:spPr/>
+        <p:txBody>
+          <a:bodyPr/>
+          <a:lstStyle/>
+          <a:p>
+            <a:fld id="{318ED49B-5682-3347-BF92-A869A91E7BEB}" type="datetime1">
+              <a:rPr lang="en-US" smtClean="0"/>
+              <a:t>10/8/26</a:t>
+            </a:fld>
+            <a:endParaRPr lang="en-US"/>
+          </a:p>
+        </p:txBody>
+      </p:sp>
+      <p:sp>
+        <p:nvSpPr>
+          <p:cNvPr id="5" name="Footer Placeholder 4">
+            <a:extLst>
+              <a:ext uri="{FF2B5EF4-FFF2-40B4-BE49-F238E27FC236}">
+                <a16:creationId xmlns:a16="http://schemas.microsoft.com/office/drawing/2014/main" id="{6EAE8456-5F90-FC07-31FE-B4A226F1FDC1}"/>
+              </a:ext>
+            </a:extLst>
+          </p:cNvPr>
+          <p:cNvSpPr>
+            <a:spLocks noGrp="1"/>
+          </p:cNvSpPr>
+          <p:nvPr>
+            <p:ph type="ftr" sz="quarter" idx="11"/>
+          </p:nvPr>
+        </p:nvSpPr>
+        <p:spPr/>
+        <p:txBody>
+          <a:bodyPr/>
+          <a:lstStyle/>
+          <a:p>
+            <a:r>
+              <a:rPr lang="en-US"/>
+              <a:t>© Steve Beaty and others as cited</a:t>
+            </a:r>
+          </a:p>
+        </p:txBody>
+      </p:sp>
+      <p:sp>
+        <p:nvSpPr>
+          <p:cNvPr id="6" name="Slide Number Placeholder 5">
+            <a:extLst>
+              <a:ext uri="{FF2B5EF4-FFF2-40B4-BE49-F238E27FC236}">
+                <a16:creationId xmlns:a16="http://schemas.microsoft.com/office/drawing/2014/main" id="{FF1BBF3F-F96E-F102-2A2C-7D833D5CC8A9}"/>
+              </a:ext>
+            </a:extLst>
+          </p:cNvPr>
+          <p:cNvSpPr>
+            <a:spLocks noGrp="1"/>
+          </p:cNvSpPr>
+          <p:nvPr>
+            <p:ph type="sldNum" sz="quarter" idx="12"/>
+          </p:nvPr>
+        </p:nvSpPr>
+        <p:spPr/>
+        <p:txBody>
+          <a:bodyPr/>
+          <a:lstStyle/>
+          <a:p>
+            <a:fld id="{5CA8E750-09AF-F04A-AC61-93A8E70A6AD8}" type="slidenum">
+              <a:rPr lang="en-US" smtClean="0"/>
+              <a:t>61</a:t>
+            </a:fld>
+            <a:endParaRPr lang="en-US"/>
           </a:p>
         </p:txBody>
       </p:sp>
@@ -11535,12 +16853,12 @@
   </p:clrMapOvr>
   <mc:AlternateContent xmlns:mc="http://schemas.openxmlformats.org/markup-compatibility/2006" xmlns:p14="http://schemas.microsoft.com/office/powerpoint/2010/main">
     <mc:Choice Requires="p14">
-      <p:transition spd="slow" p14:dur="1200">
-        <p14:prism/>
+      <p:transition spd="slow" p14:dur="2000">
+        <p14:prism isContent="1"/>
       </p:transition>
     </mc:Choice>
     <mc:Fallback xmlns="">
-      <p:transition xmlns:p14="http://schemas.microsoft.com/office/powerpoint/2010/main" spd="slow">
+      <p:transition spd="slow">
         <p:fade/>
       </p:transition>
     </mc:Fallback>
@@ -11583,7 +16901,9 @@
         </p:nvSpPr>
         <p:spPr/>
         <p:txBody>
-          <a:bodyPr/>
+          <a:bodyPr>
+            <a:normAutofit fontScale="90000"/>
+          </a:bodyPr>
           <a:lstStyle/>
           <a:p>
             <a:r>
@@ -11645,6 +16965,92 @@
           </a:p>
           <a:p>
             <a:endParaRPr lang="en-US" dirty="0"/>
+          </a:p>
+        </p:txBody>
+      </p:sp>
+      <p:sp>
+        <p:nvSpPr>
+          <p:cNvPr id="4" name="Date Placeholder 3">
+            <a:extLst>
+              <a:ext uri="{FF2B5EF4-FFF2-40B4-BE49-F238E27FC236}">
+                <a16:creationId xmlns:a16="http://schemas.microsoft.com/office/drawing/2014/main" id="{B5A021B8-A783-8905-7430-07CF44D2D0F1}"/>
+              </a:ext>
+            </a:extLst>
+          </p:cNvPr>
+          <p:cNvSpPr>
+            <a:spLocks noGrp="1"/>
+          </p:cNvSpPr>
+          <p:nvPr>
+            <p:ph type="dt" sz="half" idx="10"/>
+          </p:nvPr>
+        </p:nvSpPr>
+        <p:spPr/>
+        <p:txBody>
+          <a:bodyPr/>
+          <a:lstStyle/>
+          <a:p>
+            <a:fld id="{EECFE285-3354-A24C-87A8-A69554C8C805}" type="datetime1">
+              <a:rPr lang="en-US" smtClean="0"/>
+              <a:t>10/8/26</a:t>
+            </a:fld>
+            <a:endParaRPr lang="en-US"/>
+          </a:p>
+        </p:txBody>
+      </p:sp>
+      <p:sp>
+        <p:nvSpPr>
+          <p:cNvPr id="5" name="Footer Placeholder 4">
+            <a:extLst>
+              <a:ext uri="{FF2B5EF4-FFF2-40B4-BE49-F238E27FC236}">
+                <a16:creationId xmlns:a16="http://schemas.microsoft.com/office/drawing/2014/main" id="{64A98951-E91E-F9DF-C284-DE8A4977FAD7}"/>
+              </a:ext>
+            </a:extLst>
+          </p:cNvPr>
+          <p:cNvSpPr>
+            <a:spLocks noGrp="1"/>
+          </p:cNvSpPr>
+          <p:nvPr>
+            <p:ph type="ftr" sz="quarter" idx="11"/>
+          </p:nvPr>
+        </p:nvSpPr>
+        <p:spPr/>
+        <p:txBody>
+          <a:bodyPr/>
+          <a:lstStyle/>
+          <a:p>
+            <a:r>
+              <a:rPr lang="en-US"/>
+              <a:t>© Steve Beaty and others as cited</a:t>
+            </a:r>
+          </a:p>
+        </p:txBody>
+      </p:sp>
+      <p:sp>
+        <p:nvSpPr>
+          <p:cNvPr id="6" name="Slide Number Placeholder 5">
+            <a:extLst>
+              <a:ext uri="{FF2B5EF4-FFF2-40B4-BE49-F238E27FC236}">
+                <a16:creationId xmlns:a16="http://schemas.microsoft.com/office/drawing/2014/main" id="{1DF45F16-C31B-73F0-D2AC-817EE95726FF}"/>
+              </a:ext>
+            </a:extLst>
+          </p:cNvPr>
+          <p:cNvSpPr>
+            <a:spLocks noGrp="1"/>
+          </p:cNvSpPr>
+          <p:nvPr>
+            <p:ph type="sldNum" sz="quarter" idx="12"/>
+          </p:nvPr>
+        </p:nvSpPr>
+        <p:spPr/>
+        <p:txBody>
+          <a:bodyPr/>
+          <a:lstStyle/>
+          <a:p>
+            <a:fld id="{5CA8E750-09AF-F04A-AC61-93A8E70A6AD8}" type="slidenum">
+              <a:rPr lang="en-US" smtClean="0"/>
+              <a:t>62</a:t>
+            </a:fld>
+            <a:endParaRPr lang="en-US"/>
           </a:p>
         </p:txBody>
       </p:sp>
@@ -11660,12 +17066,12 @@
   </p:clrMapOvr>
   <mc:AlternateContent xmlns:mc="http://schemas.openxmlformats.org/markup-compatibility/2006" xmlns:p14="http://schemas.microsoft.com/office/powerpoint/2010/main">
     <mc:Choice Requires="p14">
-      <p:transition spd="slow" p14:dur="1200">
-        <p14:prism/>
+      <p:transition spd="slow" p14:dur="2000">
+        <p14:prism isContent="1"/>
       </p:transition>
     </mc:Choice>
     <mc:Fallback xmlns="">
-      <p:transition xmlns:p14="http://schemas.microsoft.com/office/powerpoint/2010/main" spd="slow">
+      <p:transition spd="slow">
         <p:fade/>
       </p:transition>
     </mc:Fallback>
@@ -11708,7 +17114,9 @@
         </p:nvSpPr>
         <p:spPr/>
         <p:txBody>
-          <a:bodyPr/>
+          <a:bodyPr>
+            <a:normAutofit fontScale="90000"/>
+          </a:bodyPr>
           <a:lstStyle/>
           <a:p>
             <a:r>
@@ -11737,7 +17145,7 @@
         <p:spPr/>
         <p:txBody>
           <a:bodyPr>
-            <a:normAutofit lnSpcReduction="10000"/>
+            <a:normAutofit fontScale="92500"/>
           </a:bodyPr>
           <a:lstStyle/>
           <a:p>
@@ -11767,6 +17175,92 @@
               <a:rPr lang="en-US" dirty="0"/>
               <a:t>Start it and make sure it’s listening to port 27017</a:t>
             </a:r>
+          </a:p>
+        </p:txBody>
+      </p:sp>
+      <p:sp>
+        <p:nvSpPr>
+          <p:cNvPr id="4" name="Date Placeholder 3">
+            <a:extLst>
+              <a:ext uri="{FF2B5EF4-FFF2-40B4-BE49-F238E27FC236}">
+                <a16:creationId xmlns:a16="http://schemas.microsoft.com/office/drawing/2014/main" id="{035A0335-792A-8ED9-61D2-3A0B8A979882}"/>
+              </a:ext>
+            </a:extLst>
+          </p:cNvPr>
+          <p:cNvSpPr>
+            <a:spLocks noGrp="1"/>
+          </p:cNvSpPr>
+          <p:nvPr>
+            <p:ph type="dt" sz="half" idx="10"/>
+          </p:nvPr>
+        </p:nvSpPr>
+        <p:spPr/>
+        <p:txBody>
+          <a:bodyPr/>
+          <a:lstStyle/>
+          <a:p>
+            <a:fld id="{2A892E5B-2620-5040-8613-D21E4445EEDF}" type="datetime1">
+              <a:rPr lang="en-US" smtClean="0"/>
+              <a:t>10/8/26</a:t>
+            </a:fld>
+            <a:endParaRPr lang="en-US"/>
+          </a:p>
+        </p:txBody>
+      </p:sp>
+      <p:sp>
+        <p:nvSpPr>
+          <p:cNvPr id="5" name="Footer Placeholder 4">
+            <a:extLst>
+              <a:ext uri="{FF2B5EF4-FFF2-40B4-BE49-F238E27FC236}">
+                <a16:creationId xmlns:a16="http://schemas.microsoft.com/office/drawing/2014/main" id="{DD42BB75-B218-6049-7443-4F818779A5A9}"/>
+              </a:ext>
+            </a:extLst>
+          </p:cNvPr>
+          <p:cNvSpPr>
+            <a:spLocks noGrp="1"/>
+          </p:cNvSpPr>
+          <p:nvPr>
+            <p:ph type="ftr" sz="quarter" idx="11"/>
+          </p:nvPr>
+        </p:nvSpPr>
+        <p:spPr/>
+        <p:txBody>
+          <a:bodyPr/>
+          <a:lstStyle/>
+          <a:p>
+            <a:r>
+              <a:rPr lang="en-US"/>
+              <a:t>© Steve Beaty and others as cited</a:t>
+            </a:r>
+          </a:p>
+        </p:txBody>
+      </p:sp>
+      <p:sp>
+        <p:nvSpPr>
+          <p:cNvPr id="6" name="Slide Number Placeholder 5">
+            <a:extLst>
+              <a:ext uri="{FF2B5EF4-FFF2-40B4-BE49-F238E27FC236}">
+                <a16:creationId xmlns:a16="http://schemas.microsoft.com/office/drawing/2014/main" id="{180B228F-BD0A-9068-76A2-6F89D4EBBAC7}"/>
+              </a:ext>
+            </a:extLst>
+          </p:cNvPr>
+          <p:cNvSpPr>
+            <a:spLocks noGrp="1"/>
+          </p:cNvSpPr>
+          <p:nvPr>
+            <p:ph type="sldNum" sz="quarter" idx="12"/>
+          </p:nvPr>
+        </p:nvSpPr>
+        <p:spPr/>
+        <p:txBody>
+          <a:bodyPr/>
+          <a:lstStyle/>
+          <a:p>
+            <a:fld id="{5CA8E750-09AF-F04A-AC61-93A8E70A6AD8}" type="slidenum">
+              <a:rPr lang="en-US" smtClean="0"/>
+              <a:t>63</a:t>
+            </a:fld>
+            <a:endParaRPr lang="en-US"/>
           </a:p>
         </p:txBody>
       </p:sp>
@@ -11782,12 +17276,12 @@
   </p:clrMapOvr>
   <mc:AlternateContent xmlns:mc="http://schemas.openxmlformats.org/markup-compatibility/2006" xmlns:p14="http://schemas.microsoft.com/office/powerpoint/2010/main">
     <mc:Choice Requires="p14">
-      <p:transition spd="slow" p14:dur="1200">
-        <p14:prism/>
+      <p:transition spd="slow" p14:dur="2000">
+        <p14:prism isContent="1"/>
       </p:transition>
     </mc:Choice>
     <mc:Fallback xmlns="">
-      <p:transition xmlns:p14="http://schemas.microsoft.com/office/powerpoint/2010/main" spd="slow">
+      <p:transition spd="slow">
         <p:fade/>
       </p:transition>
     </mc:Fallback>
@@ -11830,7 +17324,9 @@
         </p:nvSpPr>
         <p:spPr/>
         <p:txBody>
-          <a:bodyPr/>
+          <a:bodyPr>
+            <a:normAutofit fontScale="90000"/>
+          </a:bodyPr>
           <a:lstStyle/>
           <a:p>
             <a:r>
@@ -11984,6 +17480,92 @@
                 <a:srgbClr val="FF0000"/>
               </a:solidFill>
             </a:endParaRPr>
+          </a:p>
+        </p:txBody>
+      </p:sp>
+      <p:sp>
+        <p:nvSpPr>
+          <p:cNvPr id="4" name="Date Placeholder 3">
+            <a:extLst>
+              <a:ext uri="{FF2B5EF4-FFF2-40B4-BE49-F238E27FC236}">
+                <a16:creationId xmlns:a16="http://schemas.microsoft.com/office/drawing/2014/main" id="{10F0557C-0037-A399-E7DF-D38757199F29}"/>
+              </a:ext>
+            </a:extLst>
+          </p:cNvPr>
+          <p:cNvSpPr>
+            <a:spLocks noGrp="1"/>
+          </p:cNvSpPr>
+          <p:nvPr>
+            <p:ph type="dt" sz="half" idx="10"/>
+          </p:nvPr>
+        </p:nvSpPr>
+        <p:spPr/>
+        <p:txBody>
+          <a:bodyPr/>
+          <a:lstStyle/>
+          <a:p>
+            <a:fld id="{0299A207-5CF6-DA44-BF92-16874C49BF38}" type="datetime1">
+              <a:rPr lang="en-US" smtClean="0"/>
+              <a:t>10/8/26</a:t>
+            </a:fld>
+            <a:endParaRPr lang="en-US"/>
+          </a:p>
+        </p:txBody>
+      </p:sp>
+      <p:sp>
+        <p:nvSpPr>
+          <p:cNvPr id="5" name="Footer Placeholder 4">
+            <a:extLst>
+              <a:ext uri="{FF2B5EF4-FFF2-40B4-BE49-F238E27FC236}">
+                <a16:creationId xmlns:a16="http://schemas.microsoft.com/office/drawing/2014/main" id="{26A80DC3-4927-A85C-29FC-464BA601507A}"/>
+              </a:ext>
+            </a:extLst>
+          </p:cNvPr>
+          <p:cNvSpPr>
+            <a:spLocks noGrp="1"/>
+          </p:cNvSpPr>
+          <p:nvPr>
+            <p:ph type="ftr" sz="quarter" idx="11"/>
+          </p:nvPr>
+        </p:nvSpPr>
+        <p:spPr/>
+        <p:txBody>
+          <a:bodyPr/>
+          <a:lstStyle/>
+          <a:p>
+            <a:r>
+              <a:rPr lang="en-US"/>
+              <a:t>© Steve Beaty and others as cited</a:t>
+            </a:r>
+          </a:p>
+        </p:txBody>
+      </p:sp>
+      <p:sp>
+        <p:nvSpPr>
+          <p:cNvPr id="6" name="Slide Number Placeholder 5">
+            <a:extLst>
+              <a:ext uri="{FF2B5EF4-FFF2-40B4-BE49-F238E27FC236}">
+                <a16:creationId xmlns:a16="http://schemas.microsoft.com/office/drawing/2014/main" id="{721E8FDA-7FA9-BC53-6613-0270964E252D}"/>
+              </a:ext>
+            </a:extLst>
+          </p:cNvPr>
+          <p:cNvSpPr>
+            <a:spLocks noGrp="1"/>
+          </p:cNvSpPr>
+          <p:nvPr>
+            <p:ph type="sldNum" sz="quarter" idx="12"/>
+          </p:nvPr>
+        </p:nvSpPr>
+        <p:spPr/>
+        <p:txBody>
+          <a:bodyPr/>
+          <a:lstStyle/>
+          <a:p>
+            <a:fld id="{5CA8E750-09AF-F04A-AC61-93A8E70A6AD8}" type="slidenum">
+              <a:rPr lang="en-US" smtClean="0"/>
+              <a:t>64</a:t>
+            </a:fld>
+            <a:endParaRPr lang="en-US"/>
           </a:p>
         </p:txBody>
       </p:sp>
@@ -12047,7 +17629,9 @@
         </p:nvSpPr>
         <p:spPr/>
         <p:txBody>
-          <a:bodyPr/>
+          <a:bodyPr>
+            <a:normAutofit fontScale="90000"/>
+          </a:bodyPr>
           <a:lstStyle/>
           <a:p>
             <a:r>
@@ -12076,7 +17660,7 @@
         <p:spPr/>
         <p:txBody>
           <a:bodyPr>
-            <a:normAutofit lnSpcReduction="10000"/>
+            <a:normAutofit fontScale="92500"/>
           </a:bodyPr>
           <a:lstStyle/>
           <a:p>
@@ -12096,6 +17680,92 @@
               <a:rPr lang="en-US" dirty="0"/>
               <a:t>The data in a table are snake-cased and singular.</a:t>
             </a:r>
+          </a:p>
+        </p:txBody>
+      </p:sp>
+      <p:sp>
+        <p:nvSpPr>
+          <p:cNvPr id="4" name="Date Placeholder 3">
+            <a:extLst>
+              <a:ext uri="{FF2B5EF4-FFF2-40B4-BE49-F238E27FC236}">
+                <a16:creationId xmlns:a16="http://schemas.microsoft.com/office/drawing/2014/main" id="{7F62722A-72B7-CD2E-B1F1-90DECBEF3413}"/>
+              </a:ext>
+            </a:extLst>
+          </p:cNvPr>
+          <p:cNvSpPr>
+            <a:spLocks noGrp="1"/>
+          </p:cNvSpPr>
+          <p:nvPr>
+            <p:ph type="dt" sz="half" idx="10"/>
+          </p:nvPr>
+        </p:nvSpPr>
+        <p:spPr/>
+        <p:txBody>
+          <a:bodyPr/>
+          <a:lstStyle/>
+          <a:p>
+            <a:fld id="{0C396093-C95C-E544-93C3-33D33BF514F7}" type="datetime1">
+              <a:rPr lang="en-US" smtClean="0"/>
+              <a:t>10/8/26</a:t>
+            </a:fld>
+            <a:endParaRPr lang="en-US"/>
+          </a:p>
+        </p:txBody>
+      </p:sp>
+      <p:sp>
+        <p:nvSpPr>
+          <p:cNvPr id="5" name="Footer Placeholder 4">
+            <a:extLst>
+              <a:ext uri="{FF2B5EF4-FFF2-40B4-BE49-F238E27FC236}">
+                <a16:creationId xmlns:a16="http://schemas.microsoft.com/office/drawing/2014/main" id="{5686424A-7C83-C946-00D5-34FA22CC4A7E}"/>
+              </a:ext>
+            </a:extLst>
+          </p:cNvPr>
+          <p:cNvSpPr>
+            <a:spLocks noGrp="1"/>
+          </p:cNvSpPr>
+          <p:nvPr>
+            <p:ph type="ftr" sz="quarter" idx="11"/>
+          </p:nvPr>
+        </p:nvSpPr>
+        <p:spPr/>
+        <p:txBody>
+          <a:bodyPr/>
+          <a:lstStyle/>
+          <a:p>
+            <a:r>
+              <a:rPr lang="en-US"/>
+              <a:t>© Steve Beaty and others as cited</a:t>
+            </a:r>
+          </a:p>
+        </p:txBody>
+      </p:sp>
+      <p:sp>
+        <p:nvSpPr>
+          <p:cNvPr id="6" name="Slide Number Placeholder 5">
+            <a:extLst>
+              <a:ext uri="{FF2B5EF4-FFF2-40B4-BE49-F238E27FC236}">
+                <a16:creationId xmlns:a16="http://schemas.microsoft.com/office/drawing/2014/main" id="{6745600B-9E98-1379-18F9-9B63BBD7C3B0}"/>
+              </a:ext>
+            </a:extLst>
+          </p:cNvPr>
+          <p:cNvSpPr>
+            <a:spLocks noGrp="1"/>
+          </p:cNvSpPr>
+          <p:nvPr>
+            <p:ph type="sldNum" sz="quarter" idx="12"/>
+          </p:nvPr>
+        </p:nvSpPr>
+        <p:spPr/>
+        <p:txBody>
+          <a:bodyPr/>
+          <a:lstStyle/>
+          <a:p>
+            <a:fld id="{5CA8E750-09AF-F04A-AC61-93A8E70A6AD8}" type="slidenum">
+              <a:rPr lang="en-US" smtClean="0"/>
+              <a:t>7</a:t>
+            </a:fld>
+            <a:endParaRPr lang="en-US"/>
           </a:p>
         </p:txBody>
       </p:sp>
@@ -12111,12 +17781,12 @@
   </p:clrMapOvr>
   <mc:AlternateContent xmlns:mc="http://schemas.openxmlformats.org/markup-compatibility/2006" xmlns:p14="http://schemas.microsoft.com/office/powerpoint/2010/main">
     <mc:Choice Requires="p14">
-      <p:transition spd="slow" p14:dur="1200">
-        <p14:prism/>
+      <p:transition spd="slow" p14:dur="2000">
+        <p14:prism isContent="1"/>
       </p:transition>
     </mc:Choice>
     <mc:Fallback xmlns="">
-      <p:transition xmlns:p14="http://schemas.microsoft.com/office/powerpoint/2010/main" spd="slow">
+      <p:transition spd="slow">
         <p:fade/>
       </p:transition>
     </mc:Fallback>
@@ -12159,7 +17829,9 @@
         </p:nvSpPr>
         <p:spPr/>
         <p:txBody>
-          <a:bodyPr/>
+          <a:bodyPr>
+            <a:normAutofit fontScale="90000"/>
+          </a:bodyPr>
           <a:lstStyle/>
           <a:p>
             <a:r>
@@ -12188,7 +17860,7 @@
         <p:spPr/>
         <p:txBody>
           <a:bodyPr>
-            <a:normAutofit lnSpcReduction="10000"/>
+            <a:normAutofit fontScale="92500" lnSpcReduction="10000"/>
           </a:bodyPr>
           <a:lstStyle/>
           <a:p>
@@ -12221,6 +17893,92 @@
           </a:p>
           <a:p>
             <a:endParaRPr lang="en-US" dirty="0"/>
+          </a:p>
+        </p:txBody>
+      </p:sp>
+      <p:sp>
+        <p:nvSpPr>
+          <p:cNvPr id="4" name="Date Placeholder 3">
+            <a:extLst>
+              <a:ext uri="{FF2B5EF4-FFF2-40B4-BE49-F238E27FC236}">
+                <a16:creationId xmlns:a16="http://schemas.microsoft.com/office/drawing/2014/main" id="{04B0DBA8-7F8B-0A6B-4CA5-0F62E26A0D96}"/>
+              </a:ext>
+            </a:extLst>
+          </p:cNvPr>
+          <p:cNvSpPr>
+            <a:spLocks noGrp="1"/>
+          </p:cNvSpPr>
+          <p:nvPr>
+            <p:ph type="dt" sz="half" idx="10"/>
+          </p:nvPr>
+        </p:nvSpPr>
+        <p:spPr/>
+        <p:txBody>
+          <a:bodyPr/>
+          <a:lstStyle/>
+          <a:p>
+            <a:fld id="{2AB4B376-844B-0843-AE42-2FB2C67FD353}" type="datetime1">
+              <a:rPr lang="en-US" smtClean="0"/>
+              <a:t>10/8/26</a:t>
+            </a:fld>
+            <a:endParaRPr lang="en-US"/>
+          </a:p>
+        </p:txBody>
+      </p:sp>
+      <p:sp>
+        <p:nvSpPr>
+          <p:cNvPr id="5" name="Footer Placeholder 4">
+            <a:extLst>
+              <a:ext uri="{FF2B5EF4-FFF2-40B4-BE49-F238E27FC236}">
+                <a16:creationId xmlns:a16="http://schemas.microsoft.com/office/drawing/2014/main" id="{CF77F020-56AA-AE0A-F225-4356E3B653C5}"/>
+              </a:ext>
+            </a:extLst>
+          </p:cNvPr>
+          <p:cNvSpPr>
+            <a:spLocks noGrp="1"/>
+          </p:cNvSpPr>
+          <p:nvPr>
+            <p:ph type="ftr" sz="quarter" idx="11"/>
+          </p:nvPr>
+        </p:nvSpPr>
+        <p:spPr/>
+        <p:txBody>
+          <a:bodyPr/>
+          <a:lstStyle/>
+          <a:p>
+            <a:r>
+              <a:rPr lang="en-US"/>
+              <a:t>© Steve Beaty and others as cited</a:t>
+            </a:r>
+          </a:p>
+        </p:txBody>
+      </p:sp>
+      <p:sp>
+        <p:nvSpPr>
+          <p:cNvPr id="6" name="Slide Number Placeholder 5">
+            <a:extLst>
+              <a:ext uri="{FF2B5EF4-FFF2-40B4-BE49-F238E27FC236}">
+                <a16:creationId xmlns:a16="http://schemas.microsoft.com/office/drawing/2014/main" id="{1997F769-74A4-0F77-8578-064FBD90DF0D}"/>
+              </a:ext>
+            </a:extLst>
+          </p:cNvPr>
+          <p:cNvSpPr>
+            <a:spLocks noGrp="1"/>
+          </p:cNvSpPr>
+          <p:nvPr>
+            <p:ph type="sldNum" sz="quarter" idx="12"/>
+          </p:nvPr>
+        </p:nvSpPr>
+        <p:spPr/>
+        <p:txBody>
+          <a:bodyPr/>
+          <a:lstStyle/>
+          <a:p>
+            <a:fld id="{5CA8E750-09AF-F04A-AC61-93A8E70A6AD8}" type="slidenum">
+              <a:rPr lang="en-US" smtClean="0"/>
+              <a:t>8</a:t>
+            </a:fld>
+            <a:endParaRPr lang="en-US"/>
           </a:p>
         </p:txBody>
       </p:sp>
@@ -12236,12 +17994,12 @@
   </p:clrMapOvr>
   <mc:AlternateContent xmlns:mc="http://schemas.openxmlformats.org/markup-compatibility/2006" xmlns:p14="http://schemas.microsoft.com/office/powerpoint/2010/main">
     <mc:Choice Requires="p14">
-      <p:transition spd="slow" p14:dur="1200">
-        <p14:prism/>
+      <p:transition spd="slow" p14:dur="2000">
+        <p14:prism isContent="1"/>
       </p:transition>
     </mc:Choice>
     <mc:Fallback xmlns="">
-      <p:transition xmlns:p14="http://schemas.microsoft.com/office/powerpoint/2010/main" spd="slow">
+      <p:transition spd="slow">
         <p:fade/>
       </p:transition>
     </mc:Fallback>
@@ -12284,7 +18042,9 @@
         </p:nvSpPr>
         <p:spPr/>
         <p:txBody>
-          <a:bodyPr/>
+          <a:bodyPr>
+            <a:normAutofit fontScale="90000"/>
+          </a:bodyPr>
           <a:lstStyle/>
           <a:p>
             <a:r>
@@ -12331,6 +18091,92 @@
               <a:rPr lang="en-US" dirty="0"/>
               <a:t>If you don’t write “main”, you’re using a framework</a:t>
             </a:r>
+          </a:p>
+        </p:txBody>
+      </p:sp>
+      <p:sp>
+        <p:nvSpPr>
+          <p:cNvPr id="4" name="Date Placeholder 3">
+            <a:extLst>
+              <a:ext uri="{FF2B5EF4-FFF2-40B4-BE49-F238E27FC236}">
+                <a16:creationId xmlns:a16="http://schemas.microsoft.com/office/drawing/2014/main" id="{504DC45C-27D4-E3E2-A907-A65C468D9D78}"/>
+              </a:ext>
+            </a:extLst>
+          </p:cNvPr>
+          <p:cNvSpPr>
+            <a:spLocks noGrp="1"/>
+          </p:cNvSpPr>
+          <p:nvPr>
+            <p:ph type="dt" sz="half" idx="10"/>
+          </p:nvPr>
+        </p:nvSpPr>
+        <p:spPr/>
+        <p:txBody>
+          <a:bodyPr/>
+          <a:lstStyle/>
+          <a:p>
+            <a:fld id="{91274B90-88C4-974F-8D5A-0235CAB841DF}" type="datetime1">
+              <a:rPr lang="en-US" smtClean="0"/>
+              <a:t>10/8/26</a:t>
+            </a:fld>
+            <a:endParaRPr lang="en-US"/>
+          </a:p>
+        </p:txBody>
+      </p:sp>
+      <p:sp>
+        <p:nvSpPr>
+          <p:cNvPr id="5" name="Footer Placeholder 4">
+            <a:extLst>
+              <a:ext uri="{FF2B5EF4-FFF2-40B4-BE49-F238E27FC236}">
+                <a16:creationId xmlns:a16="http://schemas.microsoft.com/office/drawing/2014/main" id="{E592F40E-7E8E-2BDF-EA21-F31C9FAE08DB}"/>
+              </a:ext>
+            </a:extLst>
+          </p:cNvPr>
+          <p:cNvSpPr>
+            <a:spLocks noGrp="1"/>
+          </p:cNvSpPr>
+          <p:nvPr>
+            <p:ph type="ftr" sz="quarter" idx="11"/>
+          </p:nvPr>
+        </p:nvSpPr>
+        <p:spPr/>
+        <p:txBody>
+          <a:bodyPr/>
+          <a:lstStyle/>
+          <a:p>
+            <a:r>
+              <a:rPr lang="en-US"/>
+              <a:t>© Steve Beaty and others as cited</a:t>
+            </a:r>
+          </a:p>
+        </p:txBody>
+      </p:sp>
+      <p:sp>
+        <p:nvSpPr>
+          <p:cNvPr id="6" name="Slide Number Placeholder 5">
+            <a:extLst>
+              <a:ext uri="{FF2B5EF4-FFF2-40B4-BE49-F238E27FC236}">
+                <a16:creationId xmlns:a16="http://schemas.microsoft.com/office/drawing/2014/main" id="{AA67EA5D-2845-6C87-5DEA-840C4E7D1AED}"/>
+              </a:ext>
+            </a:extLst>
+          </p:cNvPr>
+          <p:cNvSpPr>
+            <a:spLocks noGrp="1"/>
+          </p:cNvSpPr>
+          <p:nvPr>
+            <p:ph type="sldNum" sz="quarter" idx="12"/>
+          </p:nvPr>
+        </p:nvSpPr>
+        <p:spPr/>
+        <p:txBody>
+          <a:bodyPr/>
+          <a:lstStyle/>
+          <a:p>
+            <a:fld id="{5CA8E750-09AF-F04A-AC61-93A8E70A6AD8}" type="slidenum">
+              <a:rPr lang="en-US" smtClean="0"/>
+              <a:t>9</a:t>
+            </a:fld>
+            <a:endParaRPr lang="en-US"/>
           </a:p>
         </p:txBody>
       </p:sp>
@@ -12346,12 +18192,12 @@
   </p:clrMapOvr>
   <mc:AlternateContent xmlns:mc="http://schemas.openxmlformats.org/markup-compatibility/2006" xmlns:p14="http://schemas.microsoft.com/office/powerpoint/2010/main">
     <mc:Choice Requires="p14">
-      <p:transition spd="slow" p14:dur="1200">
-        <p14:prism/>
+      <p:transition spd="slow" p14:dur="2000">
+        <p14:prism isContent="1"/>
       </p:transition>
     </mc:Choice>
     <mc:Fallback xmlns="">
-      <p:transition xmlns:p14="http://schemas.microsoft.com/office/powerpoint/2010/main" spd="slow">
+      <p:transition spd="slow">
         <p:fade/>
       </p:transition>
     </mc:Fallback>
@@ -12678,7 +18524,7 @@
   <a:extraClrSchemeLst/>
   <a:extLst>
     <a:ext uri="{05A4C25C-085E-4340-85A3-A5531E510DB2}">
-      <thm15:themeFamily xmlns:thm15="http://schemas.microsoft.com/office/thememl/2012/main" name="Cognella" id="{9B7AACB3-BED8-6844-ADDB-C87436244734}" vid="{7749C953-94DA-D341-AC03-734E71A764AB}"/>
+      <thm15:themeFamily xmlns:thm15="http://schemas.microsoft.com/office/thememl/2012/main" name="Presentation1" id="{9DA9736E-330F-4D40-A0AF-1CC780C29072}" vid="{881790AE-4280-6941-9F6C-19A6C408C41E}"/>
     </a:ext>
   </a:extLst>
 </a:theme>
